--- a/submission/stage/作品PPT.pptx
+++ b/submission/stage/作品PPT.pptx
@@ -3632,7 +3632,7 @@
                   <a:srgbClr val="595959"/>
                 </a:solidFill>
               </a:rPr>
-              <a:t>•  已实现:真实溯源数据集(7 类约 755 张)+ 宏观融合与四级预警分支 + 显微 MindSpore 识别分支(95.4%)+ 双分支前端;</a:t>
+              <a:t>•  已实现:真实溯源数据集(7 类约 755 张)+ 宏观融合与四级预警分支 + 显微 MindSpore 识别分支(95.4%)+ v3 渔民友好双页签前端;</a:t>
             </a:r>
           </a:p>
         </p:txBody>
@@ -3666,7 +3666,7 @@
                   <a:srgbClr val="595959"/>
                 </a:solidFill>
               </a:rPr>
-              <a:t>•  展望:积累本地海域实测海面照校准色块阈值;接入细胞计数估算赤潮密度;部署至昇腾端侧;</a:t>
+              <a:t>•  后续工作:迁移微信小程序入口(扫码即用、免装环境)+ 弱信号离线出结论 + 同点位时序趋势曲线;</a:t>
             </a:r>
           </a:p>
         </p:txBody>
@@ -3679,7 +3679,7 @@
         </p:nvSpPr>
         <p:spPr>
           <a:xfrm>
-            <a:off x="640080" y="3108960"/>
+            <a:off x="640080" y="3840480"/>
             <a:ext cx="10881360" cy="914400"/>
           </a:xfrm>
           <a:prstGeom prst="rect">
@@ -3701,6 +3701,40 @@
                 </a:solidFill>
               </a:rPr>
               <a:t>•  本工具可为近岸养殖区赤潮早期预警与贝类安全监测提供辅助决策支持。</a:t>
+            </a:r>
+          </a:p>
+        </p:txBody>
+      </p:sp>
+      <p:sp>
+        <p:nvSpPr>
+          <p:cNvPr id="5" name="TextBox 4"/>
+          <p:cNvSpPr txBox="1"/>
+          <p:nvPr/>
+        </p:nvSpPr>
+        <p:spPr>
+          <a:xfrm>
+            <a:off x="640080" y="3108960"/>
+            <a:ext cx="10881360" cy="914400"/>
+          </a:xfrm>
+          <a:prstGeom prst="rect">
+            <a:avLst/>
+          </a:prstGeom>
+          <a:noFill/>
+        </p:spPr>
+        <p:txBody>
+          <a:bodyPr wrap="square" anchor="t">
+            <a:spAutoFit/>
+          </a:bodyPr>
+          <a:lstStyle/>
+          <a:p>
+            <a:pPr algn="l"/>
+            <a:r>
+              <a:rPr sz="1900" b="0">
+                <a:solidFill>
+                  <a:srgbClr val="595959"/>
+                </a:solidFill>
+              </a:rPr>
+              <a:t>•  宏观 CNN 重启:待现场实测海面照达标(正常≥60/绿潮≥30),以冻结骨干二分类作为第三路证据接入融合;</a:t>
             </a:r>
           </a:p>
         </p:txBody>
@@ -5522,7 +5556,7 @@
                   <a:srgbClr val="595959"/>
                 </a:solidFill>
               </a:rPr>
-              <a:t>•  Streamlit Web 前端双 Tab:宏观海面(主,上传+6题问卷+融合卡)/ 显微(次,实验室确认);</a:t>
+              <a:t>•  Streamlit 双页签前端:『拍海面查风险(渔民用)』(主,上传海面照+6题问卷+四级预警卡)/『显微照片(化验室人员用)』(次,实验室确认);</a:t>
             </a:r>
           </a:p>
         </p:txBody>
@@ -5556,7 +5590,7 @@
                   <a:srgbClr val="595959"/>
                 </a:solidFill>
               </a:rPr>
-              <a:t>•  显微识别自动联动《藻种知识库》:风险等级、毒素、生态、养殖影响、爆发规律、监测优先级;</a:t>
+              <a:t>•  面向渔民重做交互:结论压成三句大白话(什么情况/该干什么/该找谁)+『念给我听』语音播报+『复制上报话术』一键生成上报文本+『附上我的位置』定位;</a:t>
             </a:r>
           </a:p>
         </p:txBody>
@@ -5590,7 +5624,7 @@
                   <a:srgbClr val="595959"/>
                 </a:solidFill>
               </a:rPr>
-              <a:t>•  宏观分支输出后验概率与证据链,结论可追溯到低饱和/色块等中间量;</a:t>
+              <a:t>•  后验概率与似然证据链折叠进『我给专家看的』区,附✅好照片/❌不合适照片示例与本地查询历史;显微识别自动联动《藻种知识库》;</a:t>
             </a:r>
           </a:p>
         </p:txBody>
@@ -5624,7 +5658,41 @@
                   <a:srgbClr val="595959"/>
                 </a:solidFill>
               </a:rPr>
-              <a:t>•  低饱和度图像自动提示『疑似显微照』,引导切换分支,避免误用。</a:t>
+              <a:t>•  低饱和度图像自动提示『疑似显微照』引导切换;页脚附福建省海洋与渔业局官方入口;交互层改动不影响融合算法与预警阈值输出;</a:t>
+            </a:r>
+          </a:p>
+        </p:txBody>
+      </p:sp>
+      <p:sp>
+        <p:nvSpPr>
+          <p:cNvPr id="7" name="TextBox 6"/>
+          <p:cNvSpPr txBox="1"/>
+          <p:nvPr/>
+        </p:nvSpPr>
+        <p:spPr>
+          <a:xfrm>
+            <a:off x="640080" y="4023360"/>
+            <a:ext cx="10881360" cy="777240"/>
+          </a:xfrm>
+          <a:prstGeom prst="rect">
+            <a:avLst/>
+          </a:prstGeom>
+          <a:noFill/>
+        </p:spPr>
+        <p:txBody>
+          <a:bodyPr wrap="square" anchor="t">
+            <a:spAutoFit/>
+          </a:bodyPr>
+          <a:lstStyle/>
+          <a:p>
+            <a:pPr algn="l"/>
+            <a:r>
+              <a:rPr sz="1800" b="0">
+                <a:solidFill>
+                  <a:srgbClr val="595959"/>
+                </a:solidFill>
+              </a:rPr>
+              <a:t>•  v3 迭代仅改展示与交互层,融合与四级预警输出与 v2 完全一致(已回归验证),结论可信、可复现。</a:t>
             </a:r>
           </a:p>
         </p:txBody>

--- a/submission/stage/作品PPT.pptx
+++ b/submission/stage/作品PPT.pptx
@@ -1,23 +1,27 @@
 
 <file path=ppt/presentation.xml><?xml version="1.0" encoding="utf-8"?>
-<p:presentation xmlns:a="http://schemas.openxmlformats.org/drawingml/2006/main" xmlns:r="http://schemas.openxmlformats.org/officeDocument/2006/relationships" xmlns:p="http://schemas.openxmlformats.org/presentationml/2006/main" saveSubsetFonts="1" autoCompressPictures="0">
+<p:presentation xmlns:a="http://schemas.openxmlformats.org/drawingml/2006/main" xmlns:r="http://schemas.openxmlformats.org/officeDocument/2006/relationships" xmlns:p="http://schemas.openxmlformats.org/presentationml/2006/main" autoCompressPictures="0">
   <p:sldMasterIdLst>
     <p:sldMasterId id="2147483648" r:id="rId1"/>
   </p:sldMasterIdLst>
+  <p:notesMasterIdLst>
+    <p:notesMasterId r:id="rId12"/>
+  </p:notesMasterIdLst>
   <p:sldIdLst>
-    <p:sldId id="256" r:id="rId7"/>
-    <p:sldId id="257" r:id="rId8"/>
-    <p:sldId id="258" r:id="rId9"/>
-    <p:sldId id="259" r:id="rId10"/>
-    <p:sldId id="260" r:id="rId11"/>
-    <p:sldId id="261" r:id="rId12"/>
-    <p:sldId id="262" r:id="rId13"/>
-    <p:sldId id="263" r:id="rId14"/>
-    <p:sldId id="264" r:id="rId15"/>
-    <p:sldId id="265" r:id="rId16"/>
-    <p:sldId id="266" r:id="rId17"/>
+    <p:sldId id="256" r:id="rId3"/>
+    <p:sldId id="257" r:id="rId4"/>
+    <p:sldId id="258" r:id="rId5"/>
+    <p:sldId id="259" r:id="rId6"/>
+    <p:sldId id="260" r:id="rId7"/>
+    <p:sldId id="261" r:id="rId8"/>
+    <p:sldId id="262" r:id="rId9"/>
+    <p:sldId id="263" r:id="rId10"/>
+    <p:sldId id="267" r:id="rId11"/>
+    <p:sldId id="264" r:id="rId13"/>
+    <p:sldId id="265" r:id="rId14"/>
+    <p:sldId id="266" r:id="rId15"/>
   </p:sldIdLst>
-  <p:sldSz cx="12191695" cy="6858000" type="screen4x3"/>
+  <p:sldSz cx="12191365" cy="6858000" type="screen4x3"/>
   <p:notesSz cx="6858000" cy="9144000"/>
   <p:defaultTextStyle>
     <a:defPPr>
@@ -114,7 +118,478 @@
       </a:defRPr>
     </a:lvl9pPr>
   </p:defaultTextStyle>
+  <p:extLst>
+    <p:ext uri="{EFAFB233-063F-42B5-8137-9DF3F51BA10A}">
+      <p15:sldGuideLst xmlns:p15="http://schemas.microsoft.com/office/powerpoint/2012/main">
+        <p15:guide id="1" orient="horz" pos="2160" userDrawn="1">
+          <p15:clr>
+            <a:srgbClr val="A4A3A4"/>
+          </p15:clr>
+        </p15:guide>
+        <p15:guide id="2" pos="2880" userDrawn="1">
+          <p15:clr>
+            <a:srgbClr val="A4A3A4"/>
+          </p15:clr>
+        </p15:guide>
+      </p15:sldGuideLst>
+    </p:ext>
+  </p:extLst>
 </p:presentation>
+</file>
+
+<file path=ppt/notesMasters/notesMaster1.xml><?xml version="1.0" encoding="utf-8"?>
+<p:notesMaster xmlns:a="http://schemas.openxmlformats.org/drawingml/2006/main" xmlns:r="http://schemas.openxmlformats.org/officeDocument/2006/relationships" xmlns:p="http://schemas.openxmlformats.org/presentationml/2006/main">
+  <p:cSld>
+    <p:bg>
+      <p:bgRef idx="1001">
+        <a:schemeClr val="bg1"/>
+      </p:bgRef>
+    </p:bg>
+    <p:spTree>
+      <p:nvGrpSpPr>
+        <p:cNvPr id="1" name=""/>
+        <p:cNvGrpSpPr/>
+        <p:nvPr/>
+      </p:nvGrpSpPr>
+      <p:grpSpPr>
+        <a:xfrm>
+          <a:off x="0" y="0"/>
+          <a:ext cx="0" cy="0"/>
+          <a:chOff x="0" y="0"/>
+          <a:chExt cx="0" cy="0"/>
+        </a:xfrm>
+      </p:grpSpPr>
+      <p:sp>
+        <p:nvSpPr>
+          <p:cNvPr id="2" name="页眉占位符 1"/>
+          <p:cNvSpPr>
+            <a:spLocks noGrp="1"/>
+          </p:cNvSpPr>
+          <p:nvPr>
+            <p:ph type="hdr" sz="quarter"/>
+          </p:nvPr>
+        </p:nvSpPr>
+        <p:spPr>
+          <a:xfrm>
+            <a:off x="0" y="0"/>
+            <a:ext cx="2971800" cy="458788"/>
+          </a:xfrm>
+          <a:prstGeom prst="rect">
+            <a:avLst/>
+          </a:prstGeom>
+        </p:spPr>
+        <p:txBody>
+          <a:bodyPr vert="horz" lIns="91440" tIns="45720" rIns="91440" bIns="45720" rtlCol="0"/>
+          <a:lstStyle>
+            <a:lvl1pPr algn="l">
+              <a:defRPr sz="1200"/>
+            </a:lvl1pPr>
+          </a:lstStyle>
+          <a:p>
+            <a:endParaRPr lang="zh-CN" altLang="en-US"/>
+          </a:p>
+        </p:txBody>
+      </p:sp>
+      <p:sp>
+        <p:nvSpPr>
+          <p:cNvPr id="3" name="日期占位符 2"/>
+          <p:cNvSpPr>
+            <a:spLocks noGrp="1"/>
+          </p:cNvSpPr>
+          <p:nvPr>
+            <p:ph type="dt" idx="1"/>
+          </p:nvPr>
+        </p:nvSpPr>
+        <p:spPr>
+          <a:xfrm>
+            <a:off x="3884613" y="0"/>
+            <a:ext cx="2971800" cy="458788"/>
+          </a:xfrm>
+          <a:prstGeom prst="rect">
+            <a:avLst/>
+          </a:prstGeom>
+        </p:spPr>
+        <p:txBody>
+          <a:bodyPr vert="horz" lIns="91440" tIns="45720" rIns="91440" bIns="45720" rtlCol="0"/>
+          <a:lstStyle>
+            <a:lvl1pPr algn="r">
+              <a:defRPr sz="1200"/>
+            </a:lvl1pPr>
+          </a:lstStyle>
+          <a:p>
+            <a:fld id="{D2A48B96-639E-45A3-A0BA-2464DFDB1FAA}" type="datetimeFigureOut">
+              <a:rPr lang="zh-CN" altLang="en-US" smtClean="0"/>
+            </a:fld>
+            <a:endParaRPr lang="zh-CN" altLang="en-US"/>
+          </a:p>
+        </p:txBody>
+      </p:sp>
+      <p:sp>
+        <p:nvSpPr>
+          <p:cNvPr id="4" name="幻灯片图像占位符 3"/>
+          <p:cNvSpPr>
+            <a:spLocks noGrp="1" noRot="1" noChangeAspect="1"/>
+          </p:cNvSpPr>
+          <p:nvPr>
+            <p:ph type="sldImg" idx="2"/>
+          </p:nvPr>
+        </p:nvSpPr>
+        <p:spPr>
+          <a:xfrm>
+            <a:off x="685943" y="1143000"/>
+            <a:ext cx="5486114" cy="3086100"/>
+          </a:xfrm>
+          <a:prstGeom prst="rect">
+            <a:avLst/>
+          </a:prstGeom>
+          <a:noFill/>
+          <a:ln w="12700">
+            <a:solidFill>
+              <a:prstClr val="black"/>
+            </a:solidFill>
+          </a:ln>
+        </p:spPr>
+        <p:txBody>
+          <a:bodyPr vert="horz" lIns="91440" tIns="45720" rIns="91440" bIns="45720" rtlCol="0" anchor="ctr"/>
+          <a:lstStyle/>
+          <a:p>
+            <a:endParaRPr lang="zh-CN" altLang="en-US"/>
+          </a:p>
+        </p:txBody>
+      </p:sp>
+      <p:sp>
+        <p:nvSpPr>
+          <p:cNvPr id="5" name="备注占位符 4"/>
+          <p:cNvSpPr>
+            <a:spLocks noGrp="1"/>
+          </p:cNvSpPr>
+          <p:nvPr>
+            <p:ph type="body" sz="quarter" idx="3"/>
+          </p:nvPr>
+        </p:nvSpPr>
+        <p:spPr>
+          <a:xfrm>
+            <a:off x="685800" y="4400550"/>
+            <a:ext cx="5486400" cy="3600450"/>
+          </a:xfrm>
+          <a:prstGeom prst="rect">
+            <a:avLst/>
+          </a:prstGeom>
+        </p:spPr>
+        <p:txBody>
+          <a:bodyPr vert="horz" lIns="91440" tIns="45720" rIns="91440" bIns="45720" rtlCol="0"/>
+          <a:lstStyle/>
+          <a:p>
+            <a:pPr lvl="0"/>
+            <a:r>
+              <a:rPr lang="zh-CN" altLang="en-US" smtClean="0"/>
+              <a:t>单击此处编辑母版文本样式</a:t>
+            </a:r>
+            <a:endParaRPr lang="zh-CN" altLang="en-US" smtClean="0"/>
+          </a:p>
+          <a:p>
+            <a:pPr lvl="1"/>
+            <a:r>
+              <a:rPr lang="zh-CN" altLang="en-US" smtClean="0"/>
+              <a:t>第二级</a:t>
+            </a:r>
+            <a:endParaRPr lang="zh-CN" altLang="en-US" smtClean="0"/>
+          </a:p>
+          <a:p>
+            <a:pPr lvl="2"/>
+            <a:r>
+              <a:rPr lang="zh-CN" altLang="en-US" smtClean="0"/>
+              <a:t>第三级</a:t>
+            </a:r>
+            <a:endParaRPr lang="zh-CN" altLang="en-US" smtClean="0"/>
+          </a:p>
+          <a:p>
+            <a:pPr lvl="3"/>
+            <a:r>
+              <a:rPr lang="zh-CN" altLang="en-US" smtClean="0"/>
+              <a:t>第四级</a:t>
+            </a:r>
+            <a:endParaRPr lang="zh-CN" altLang="en-US" smtClean="0"/>
+          </a:p>
+          <a:p>
+            <a:pPr lvl="4"/>
+            <a:r>
+              <a:rPr lang="zh-CN" altLang="en-US" smtClean="0"/>
+              <a:t>第五级</a:t>
+            </a:r>
+            <a:endParaRPr lang="zh-CN" altLang="en-US"/>
+          </a:p>
+        </p:txBody>
+      </p:sp>
+      <p:sp>
+        <p:nvSpPr>
+          <p:cNvPr id="6" name="页脚占位符 5"/>
+          <p:cNvSpPr>
+            <a:spLocks noGrp="1"/>
+          </p:cNvSpPr>
+          <p:nvPr>
+            <p:ph type="ftr" sz="quarter" idx="4"/>
+          </p:nvPr>
+        </p:nvSpPr>
+        <p:spPr>
+          <a:xfrm>
+            <a:off x="0" y="8685213"/>
+            <a:ext cx="2971800" cy="458787"/>
+          </a:xfrm>
+          <a:prstGeom prst="rect">
+            <a:avLst/>
+          </a:prstGeom>
+        </p:spPr>
+        <p:txBody>
+          <a:bodyPr vert="horz" lIns="91440" tIns="45720" rIns="91440" bIns="45720" rtlCol="0" anchor="b"/>
+          <a:lstStyle>
+            <a:lvl1pPr algn="l">
+              <a:defRPr sz="1200"/>
+            </a:lvl1pPr>
+          </a:lstStyle>
+          <a:p>
+            <a:endParaRPr lang="zh-CN" altLang="en-US"/>
+          </a:p>
+        </p:txBody>
+      </p:sp>
+      <p:sp>
+        <p:nvSpPr>
+          <p:cNvPr id="7" name="灯片编号占位符 6"/>
+          <p:cNvSpPr>
+            <a:spLocks noGrp="1"/>
+          </p:cNvSpPr>
+          <p:nvPr>
+            <p:ph type="sldNum" sz="quarter" idx="5"/>
+          </p:nvPr>
+        </p:nvSpPr>
+        <p:spPr>
+          <a:xfrm>
+            <a:off x="3884613" y="8685213"/>
+            <a:ext cx="2971800" cy="458787"/>
+          </a:xfrm>
+          <a:prstGeom prst="rect">
+            <a:avLst/>
+          </a:prstGeom>
+        </p:spPr>
+        <p:txBody>
+          <a:bodyPr vert="horz" lIns="91440" tIns="45720" rIns="91440" bIns="45720" rtlCol="0" anchor="b"/>
+          <a:lstStyle>
+            <a:lvl1pPr algn="r">
+              <a:defRPr sz="1200"/>
+            </a:lvl1pPr>
+          </a:lstStyle>
+          <a:p>
+            <a:fld id="{A6837353-30EB-4A48-80EB-173D804AEFBD}" type="slidenum">
+              <a:rPr lang="zh-CN" altLang="en-US" smtClean="0"/>
+            </a:fld>
+            <a:endParaRPr lang="zh-CN" altLang="en-US"/>
+          </a:p>
+        </p:txBody>
+      </p:sp>
+    </p:spTree>
+  </p:cSld>
+  <p:clrMap bg1="lt1" tx1="dk1" bg2="lt2" tx2="dk2" accent1="accent1" accent2="accent2" accent3="accent3" accent4="accent4" accent5="accent5" accent6="accent6" hlink="hlink" folHlink="folHlink"/>
+  <p:notesStyle>
+    <a:lvl1pPr marL="0" algn="l" defTabSz="914400" rtl="0" eaLnBrk="1" latinLnBrk="0" hangingPunct="1">
+      <a:defRPr sz="1200" kern="1200">
+        <a:solidFill>
+          <a:schemeClr val="tx1"/>
+        </a:solidFill>
+        <a:latin typeface="+mn-lt"/>
+        <a:ea typeface="+mn-ea"/>
+        <a:cs typeface="+mn-cs"/>
+      </a:defRPr>
+    </a:lvl1pPr>
+    <a:lvl2pPr marL="457200" algn="l" defTabSz="914400" rtl="0" eaLnBrk="1" latinLnBrk="0" hangingPunct="1">
+      <a:defRPr sz="1200" kern="1200">
+        <a:solidFill>
+          <a:schemeClr val="tx1"/>
+        </a:solidFill>
+        <a:latin typeface="+mn-lt"/>
+        <a:ea typeface="+mn-ea"/>
+        <a:cs typeface="+mn-cs"/>
+      </a:defRPr>
+    </a:lvl2pPr>
+    <a:lvl3pPr marL="914400" algn="l" defTabSz="914400" rtl="0" eaLnBrk="1" latinLnBrk="0" hangingPunct="1">
+      <a:defRPr sz="1200" kern="1200">
+        <a:solidFill>
+          <a:schemeClr val="tx1"/>
+        </a:solidFill>
+        <a:latin typeface="+mn-lt"/>
+        <a:ea typeface="+mn-ea"/>
+        <a:cs typeface="+mn-cs"/>
+      </a:defRPr>
+    </a:lvl3pPr>
+    <a:lvl4pPr marL="1371600" algn="l" defTabSz="914400" rtl="0" eaLnBrk="1" latinLnBrk="0" hangingPunct="1">
+      <a:defRPr sz="1200" kern="1200">
+        <a:solidFill>
+          <a:schemeClr val="tx1"/>
+        </a:solidFill>
+        <a:latin typeface="+mn-lt"/>
+        <a:ea typeface="+mn-ea"/>
+        <a:cs typeface="+mn-cs"/>
+      </a:defRPr>
+    </a:lvl4pPr>
+    <a:lvl5pPr marL="1828800" algn="l" defTabSz="914400" rtl="0" eaLnBrk="1" latinLnBrk="0" hangingPunct="1">
+      <a:defRPr sz="1200" kern="1200">
+        <a:solidFill>
+          <a:schemeClr val="tx1"/>
+        </a:solidFill>
+        <a:latin typeface="+mn-lt"/>
+        <a:ea typeface="+mn-ea"/>
+        <a:cs typeface="+mn-cs"/>
+      </a:defRPr>
+    </a:lvl5pPr>
+    <a:lvl6pPr marL="2286000" algn="l" defTabSz="914400" rtl="0" eaLnBrk="1" latinLnBrk="0" hangingPunct="1">
+      <a:defRPr sz="1200" kern="1200">
+        <a:solidFill>
+          <a:schemeClr val="tx1"/>
+        </a:solidFill>
+        <a:latin typeface="+mn-lt"/>
+        <a:ea typeface="+mn-ea"/>
+        <a:cs typeface="+mn-cs"/>
+      </a:defRPr>
+    </a:lvl6pPr>
+    <a:lvl7pPr marL="2743200" algn="l" defTabSz="914400" rtl="0" eaLnBrk="1" latinLnBrk="0" hangingPunct="1">
+      <a:defRPr sz="1200" kern="1200">
+        <a:solidFill>
+          <a:schemeClr val="tx1"/>
+        </a:solidFill>
+        <a:latin typeface="+mn-lt"/>
+        <a:ea typeface="+mn-ea"/>
+        <a:cs typeface="+mn-cs"/>
+      </a:defRPr>
+    </a:lvl7pPr>
+    <a:lvl8pPr marL="3200400" algn="l" defTabSz="914400" rtl="0" eaLnBrk="1" latinLnBrk="0" hangingPunct="1">
+      <a:defRPr sz="1200" kern="1200">
+        <a:solidFill>
+          <a:schemeClr val="tx1"/>
+        </a:solidFill>
+        <a:latin typeface="+mn-lt"/>
+        <a:ea typeface="+mn-ea"/>
+        <a:cs typeface="+mn-cs"/>
+      </a:defRPr>
+    </a:lvl8pPr>
+    <a:lvl9pPr marL="3657600" algn="l" defTabSz="914400" rtl="0" eaLnBrk="1" latinLnBrk="0" hangingPunct="1">
+      <a:defRPr sz="1200" kern="1200">
+        <a:solidFill>
+          <a:schemeClr val="tx1"/>
+        </a:solidFill>
+        <a:latin typeface="+mn-lt"/>
+        <a:ea typeface="+mn-ea"/>
+        <a:cs typeface="+mn-cs"/>
+      </a:defRPr>
+    </a:lvl9pPr>
+  </p:notesStyle>
+</p:notesMaster>
+</file>
+
+<file path=ppt/notesSlides/notesSlide1.xml><?xml version="1.0" encoding="utf-8"?>
+<p:notes xmlns:a="http://schemas.openxmlformats.org/drawingml/2006/main" xmlns:r="http://schemas.openxmlformats.org/officeDocument/2006/relationships" xmlns:p="http://schemas.openxmlformats.org/presentationml/2006/main">
+  <p:cSld>
+    <p:spTree>
+      <p:nvGrpSpPr>
+        <p:cNvPr id="1" name=""/>
+        <p:cNvGrpSpPr/>
+        <p:nvPr/>
+      </p:nvGrpSpPr>
+      <p:grpSpPr/>
+      <p:sp>
+        <p:nvSpPr>
+          <p:cNvPr id="2" name="幻灯片图像占位符 1"/>
+          <p:cNvSpPr>
+            <a:spLocks noGrp="1"/>
+          </p:cNvSpPr>
+          <p:nvPr>
+            <p:ph type="sldImg" idx="2"/>
+          </p:nvPr>
+        </p:nvSpPr>
+        <p:spPr/>
+      </p:sp>
+      <p:sp>
+        <p:nvSpPr>
+          <p:cNvPr id="3" name="文本占位符 2"/>
+          <p:cNvSpPr>
+            <a:spLocks noGrp="1"/>
+          </p:cNvSpPr>
+          <p:nvPr>
+            <p:ph type="body" idx="3"/>
+          </p:nvPr>
+        </p:nvSpPr>
+        <p:spPr/>
+        <p:txBody>
+          <a:bodyPr/>
+          <a:p>
+            <a:r>
+              <a:rPr lang="zh-CN" altLang="en-US"/>
+              <a:t>宏观</a:t>
+            </a:r>
+            <a:r>
+              <a:rPr lang="en-US" altLang="zh-CN"/>
+              <a:t> CNN </a:t>
+            </a:r>
+            <a:r>
+              <a:rPr lang="zh-CN" altLang="en-US"/>
+              <a:t>定位是第三路证据流</a:t>
+            </a:r>
+            <a:r>
+              <a:rPr lang="en-US" altLang="zh-CN"/>
+              <a:t>,</a:t>
+            </a:r>
+            <a:r>
+              <a:rPr lang="zh-CN" altLang="en-US"/>
+              <a:t>与规则流互补而非替代</a:t>
+            </a:r>
+            <a:r>
+              <a:rPr lang="en-US" altLang="zh-CN"/>
+              <a:t>;</a:t>
+            </a:r>
+            <a:r>
+              <a:rPr lang="zh-CN" altLang="en-US"/>
+              <a:t>优先级</a:t>
+            </a:r>
+            <a:r>
+              <a:rPr lang="en-US" altLang="zh-CN"/>
+              <a:t>:</a:t>
+            </a:r>
+            <a:r>
+              <a:rPr lang="zh-CN" altLang="en-US"/>
+              <a:t>规则流</a:t>
+            </a:r>
+            <a:r>
+              <a:rPr lang="en-US" altLang="zh-CN"/>
+              <a:t>(</a:t>
+            </a:r>
+            <a:r>
+              <a:rPr lang="zh-CN" altLang="en-US"/>
+              <a:t>可解释、</a:t>
+            </a:r>
+            <a:r>
+              <a:rPr lang="en-US" altLang="zh-CN"/>
+              <a:t>92%)</a:t>
+            </a:r>
+            <a:r>
+              <a:rPr lang="zh-CN" altLang="en-US"/>
+              <a:t>为主</a:t>
+            </a:r>
+            <a:r>
+              <a:rPr lang="en-US" altLang="zh-CN"/>
+              <a:t>,CNN </a:t>
+            </a:r>
+            <a:r>
+              <a:rPr lang="zh-CN" altLang="en-US"/>
+              <a:t>辅助。</a:t>
+            </a:r>
+            <a:endParaRPr lang="zh-CN" altLang="en-US"/>
+          </a:p>
+        </p:txBody>
+      </p:sp>
+    </p:spTree>
+  </p:cSld>
+  <p:clrMapOvr>
+    <a:masterClrMapping/>
+  </p:clrMapOvr>
+</p:notes>
 </file>
 
 <file path=ppt/slideLayouts/slideLayout1.xml><?xml version="1.0" encoding="utf-8"?>
@@ -298,7 +773,6 @@
           <a:p>
             <a:fld id="{5BCAD085-E8A6-8845-BD4E-CB4CCA059FC4}" type="datetimeFigureOut">
               <a:rPr lang="en-US" smtClean="0"/>
-              <a:t>1/27/13</a:t>
             </a:fld>
             <a:endParaRPr lang="en-US"/>
           </a:p>
@@ -340,18 +814,12 @@
           <a:p>
             <a:fld id="{C1FF6DA9-008F-8B48-92A6-B652298478BF}" type="slidenum">
               <a:rPr lang="en-US" smtClean="0"/>
-              <a:t>‹#›</a:t>
             </a:fld>
             <a:endParaRPr lang="en-US"/>
           </a:p>
         </p:txBody>
       </p:sp>
     </p:spTree>
-    <p:extLst>
-      <p:ext uri="{BB962C8B-B14F-4D97-AF65-F5344CB8AC3E}">
-        <p14:creationId xmlns:p14="http://schemas.microsoft.com/office/powerpoint/2010/main" val="3168075583"/>
-      </p:ext>
-    </p:extLst>
   </p:cSld>
   <p:clrMapOvr>
     <a:masterClrMapping/>
@@ -419,6 +887,7 @@
               <a:rPr lang="en-US" smtClean="0"/>
               <a:t>Click to edit Master text styles</a:t>
             </a:r>
+            <a:endParaRPr lang="en-US" smtClean="0"/>
           </a:p>
           <a:p>
             <a:pPr lvl="1"/>
@@ -426,6 +895,7 @@
               <a:rPr lang="en-US" smtClean="0"/>
               <a:t>Second level</a:t>
             </a:r>
+            <a:endParaRPr lang="en-US" smtClean="0"/>
           </a:p>
           <a:p>
             <a:pPr lvl="2"/>
@@ -433,6 +903,7 @@
               <a:rPr lang="en-US" smtClean="0"/>
               <a:t>Third level</a:t>
             </a:r>
+            <a:endParaRPr lang="en-US" smtClean="0"/>
           </a:p>
           <a:p>
             <a:pPr lvl="3"/>
@@ -440,6 +911,7 @@
               <a:rPr lang="en-US" smtClean="0"/>
               <a:t>Fourth level</a:t>
             </a:r>
+            <a:endParaRPr lang="en-US" smtClean="0"/>
           </a:p>
           <a:p>
             <a:pPr lvl="4"/>
@@ -468,7 +940,6 @@
           <a:p>
             <a:fld id="{5BCAD085-E8A6-8845-BD4E-CB4CCA059FC4}" type="datetimeFigureOut">
               <a:rPr lang="en-US" smtClean="0"/>
-              <a:t>1/27/13</a:t>
             </a:fld>
             <a:endParaRPr lang="en-US"/>
           </a:p>
@@ -510,18 +981,12 @@
           <a:p>
             <a:fld id="{C1FF6DA9-008F-8B48-92A6-B652298478BF}" type="slidenum">
               <a:rPr lang="en-US" smtClean="0"/>
-              <a:t>‹#›</a:t>
             </a:fld>
             <a:endParaRPr lang="en-US"/>
           </a:p>
         </p:txBody>
       </p:sp>
     </p:spTree>
-    <p:extLst>
-      <p:ext uri="{BB962C8B-B14F-4D97-AF65-F5344CB8AC3E}">
-        <p14:creationId xmlns:p14="http://schemas.microsoft.com/office/powerpoint/2010/main" val="2910927964"/>
-      </p:ext>
-    </p:extLst>
   </p:cSld>
   <p:clrMapOvr>
     <a:masterClrMapping/>
@@ -599,6 +1064,7 @@
               <a:rPr lang="en-US" smtClean="0"/>
               <a:t>Click to edit Master text styles</a:t>
             </a:r>
+            <a:endParaRPr lang="en-US" smtClean="0"/>
           </a:p>
           <a:p>
             <a:pPr lvl="1"/>
@@ -606,6 +1072,7 @@
               <a:rPr lang="en-US" smtClean="0"/>
               <a:t>Second level</a:t>
             </a:r>
+            <a:endParaRPr lang="en-US" smtClean="0"/>
           </a:p>
           <a:p>
             <a:pPr lvl="2"/>
@@ -613,6 +1080,7 @@
               <a:rPr lang="en-US" smtClean="0"/>
               <a:t>Third level</a:t>
             </a:r>
+            <a:endParaRPr lang="en-US" smtClean="0"/>
           </a:p>
           <a:p>
             <a:pPr lvl="3"/>
@@ -620,6 +1088,7 @@
               <a:rPr lang="en-US" smtClean="0"/>
               <a:t>Fourth level</a:t>
             </a:r>
+            <a:endParaRPr lang="en-US" smtClean="0"/>
           </a:p>
           <a:p>
             <a:pPr lvl="4"/>
@@ -648,7 +1117,6 @@
           <a:p>
             <a:fld id="{5BCAD085-E8A6-8845-BD4E-CB4CCA059FC4}" type="datetimeFigureOut">
               <a:rPr lang="en-US" smtClean="0"/>
-              <a:t>1/27/13</a:t>
             </a:fld>
             <a:endParaRPr lang="en-US"/>
           </a:p>
@@ -690,18 +1158,12 @@
           <a:p>
             <a:fld id="{C1FF6DA9-008F-8B48-92A6-B652298478BF}" type="slidenum">
               <a:rPr lang="en-US" smtClean="0"/>
-              <a:t>‹#›</a:t>
             </a:fld>
             <a:endParaRPr lang="en-US"/>
           </a:p>
         </p:txBody>
       </p:sp>
     </p:spTree>
-    <p:extLst>
-      <p:ext uri="{BB962C8B-B14F-4D97-AF65-F5344CB8AC3E}">
-        <p14:creationId xmlns:p14="http://schemas.microsoft.com/office/powerpoint/2010/main" val="3612223792"/>
-      </p:ext>
-    </p:extLst>
   </p:cSld>
   <p:clrMapOvr>
     <a:masterClrMapping/>
@@ -769,6 +1231,7 @@
               <a:rPr lang="en-US" smtClean="0"/>
               <a:t>Click to edit Master text styles</a:t>
             </a:r>
+            <a:endParaRPr lang="en-US" smtClean="0"/>
           </a:p>
           <a:p>
             <a:pPr lvl="1"/>
@@ -776,6 +1239,7 @@
               <a:rPr lang="en-US" smtClean="0"/>
               <a:t>Second level</a:t>
             </a:r>
+            <a:endParaRPr lang="en-US" smtClean="0"/>
           </a:p>
           <a:p>
             <a:pPr lvl="2"/>
@@ -783,6 +1247,7 @@
               <a:rPr lang="en-US" smtClean="0"/>
               <a:t>Third level</a:t>
             </a:r>
+            <a:endParaRPr lang="en-US" smtClean="0"/>
           </a:p>
           <a:p>
             <a:pPr lvl="3"/>
@@ -790,6 +1255,7 @@
               <a:rPr lang="en-US" smtClean="0"/>
               <a:t>Fourth level</a:t>
             </a:r>
+            <a:endParaRPr lang="en-US" smtClean="0"/>
           </a:p>
           <a:p>
             <a:pPr lvl="4"/>
@@ -818,7 +1284,6 @@
           <a:p>
             <a:fld id="{5BCAD085-E8A6-8845-BD4E-CB4CCA059FC4}" type="datetimeFigureOut">
               <a:rPr lang="en-US" smtClean="0"/>
-              <a:t>1/27/13</a:t>
             </a:fld>
             <a:endParaRPr lang="en-US"/>
           </a:p>
@@ -860,18 +1325,12 @@
           <a:p>
             <a:fld id="{C1FF6DA9-008F-8B48-92A6-B652298478BF}" type="slidenum">
               <a:rPr lang="en-US" smtClean="0"/>
-              <a:t>‹#›</a:t>
             </a:fld>
             <a:endParaRPr lang="en-US"/>
           </a:p>
         </p:txBody>
       </p:sp>
     </p:spTree>
-    <p:extLst>
-      <p:ext uri="{BB962C8B-B14F-4D97-AF65-F5344CB8AC3E}">
-        <p14:creationId xmlns:p14="http://schemas.microsoft.com/office/powerpoint/2010/main" val="2614314258"/>
-      </p:ext>
-    </p:extLst>
   </p:cSld>
   <p:clrMapOvr>
     <a:masterClrMapping/>
@@ -1044,6 +1503,7 @@
               <a:rPr lang="en-US" smtClean="0"/>
               <a:t>Click to edit Master text styles</a:t>
             </a:r>
+            <a:endParaRPr lang="en-US" smtClean="0"/>
           </a:p>
         </p:txBody>
       </p:sp>
@@ -1064,7 +1524,6 @@
           <a:p>
             <a:fld id="{5BCAD085-E8A6-8845-BD4E-CB4CCA059FC4}" type="datetimeFigureOut">
               <a:rPr lang="en-US" smtClean="0"/>
-              <a:t>1/27/13</a:t>
             </a:fld>
             <a:endParaRPr lang="en-US"/>
           </a:p>
@@ -1106,18 +1565,12 @@
           <a:p>
             <a:fld id="{C1FF6DA9-008F-8B48-92A6-B652298478BF}" type="slidenum">
               <a:rPr lang="en-US" smtClean="0"/>
-              <a:t>‹#›</a:t>
             </a:fld>
             <a:endParaRPr lang="en-US"/>
           </a:p>
         </p:txBody>
       </p:sp>
     </p:spTree>
-    <p:extLst>
-      <p:ext uri="{BB962C8B-B14F-4D97-AF65-F5344CB8AC3E}">
-        <p14:creationId xmlns:p14="http://schemas.microsoft.com/office/powerpoint/2010/main" val="960648375"/>
-      </p:ext>
-    </p:extLst>
   </p:cSld>
   <p:clrMapOvr>
     <a:masterClrMapping/>
@@ -1218,6 +1671,7 @@
               <a:rPr lang="en-US" smtClean="0"/>
               <a:t>Click to edit Master text styles</a:t>
             </a:r>
+            <a:endParaRPr lang="en-US" smtClean="0"/>
           </a:p>
           <a:p>
             <a:pPr lvl="1"/>
@@ -1225,6 +1679,7 @@
               <a:rPr lang="en-US" smtClean="0"/>
               <a:t>Second level</a:t>
             </a:r>
+            <a:endParaRPr lang="en-US" smtClean="0"/>
           </a:p>
           <a:p>
             <a:pPr lvl="2"/>
@@ -1232,6 +1687,7 @@
               <a:rPr lang="en-US" smtClean="0"/>
               <a:t>Third level</a:t>
             </a:r>
+            <a:endParaRPr lang="en-US" smtClean="0"/>
           </a:p>
           <a:p>
             <a:pPr lvl="3"/>
@@ -1239,6 +1695,7 @@
               <a:rPr lang="en-US" smtClean="0"/>
               <a:t>Fourth level</a:t>
             </a:r>
+            <a:endParaRPr lang="en-US" smtClean="0"/>
           </a:p>
           <a:p>
             <a:pPr lvl="4"/>
@@ -1303,6 +1760,7 @@
               <a:rPr lang="en-US" smtClean="0"/>
               <a:t>Click to edit Master text styles</a:t>
             </a:r>
+            <a:endParaRPr lang="en-US" smtClean="0"/>
           </a:p>
           <a:p>
             <a:pPr lvl="1"/>
@@ -1310,6 +1768,7 @@
               <a:rPr lang="en-US" smtClean="0"/>
               <a:t>Second level</a:t>
             </a:r>
+            <a:endParaRPr lang="en-US" smtClean="0"/>
           </a:p>
           <a:p>
             <a:pPr lvl="2"/>
@@ -1317,6 +1776,7 @@
               <a:rPr lang="en-US" smtClean="0"/>
               <a:t>Third level</a:t>
             </a:r>
+            <a:endParaRPr lang="en-US" smtClean="0"/>
           </a:p>
           <a:p>
             <a:pPr lvl="3"/>
@@ -1324,6 +1784,7 @@
               <a:rPr lang="en-US" smtClean="0"/>
               <a:t>Fourth level</a:t>
             </a:r>
+            <a:endParaRPr lang="en-US" smtClean="0"/>
           </a:p>
           <a:p>
             <a:pPr lvl="4"/>
@@ -1352,7 +1813,6 @@
           <a:p>
             <a:fld id="{5BCAD085-E8A6-8845-BD4E-CB4CCA059FC4}" type="datetimeFigureOut">
               <a:rPr lang="en-US" smtClean="0"/>
-              <a:t>1/27/13</a:t>
             </a:fld>
             <a:endParaRPr lang="en-US"/>
           </a:p>
@@ -1394,18 +1854,12 @@
           <a:p>
             <a:fld id="{C1FF6DA9-008F-8B48-92A6-B652298478BF}" type="slidenum">
               <a:rPr lang="en-US" smtClean="0"/>
-              <a:t>‹#›</a:t>
             </a:fld>
             <a:endParaRPr lang="en-US"/>
           </a:p>
         </p:txBody>
       </p:sp>
     </p:spTree>
-    <p:extLst>
-      <p:ext uri="{BB962C8B-B14F-4D97-AF65-F5344CB8AC3E}">
-        <p14:creationId xmlns:p14="http://schemas.microsoft.com/office/powerpoint/2010/main" val="2782244947"/>
-      </p:ext>
-    </p:extLst>
   </p:cSld>
   <p:clrMapOvr>
     <a:masterClrMapping/>
@@ -1519,6 +1973,7 @@
               <a:rPr lang="en-US" smtClean="0"/>
               <a:t>Click to edit Master text styles</a:t>
             </a:r>
+            <a:endParaRPr lang="en-US" smtClean="0"/>
           </a:p>
         </p:txBody>
       </p:sp>
@@ -1575,6 +2030,7 @@
               <a:rPr lang="en-US" smtClean="0"/>
               <a:t>Click to edit Master text styles</a:t>
             </a:r>
+            <a:endParaRPr lang="en-US" smtClean="0"/>
           </a:p>
           <a:p>
             <a:pPr lvl="1"/>
@@ -1582,6 +2038,7 @@
               <a:rPr lang="en-US" smtClean="0"/>
               <a:t>Second level</a:t>
             </a:r>
+            <a:endParaRPr lang="en-US" smtClean="0"/>
           </a:p>
           <a:p>
             <a:pPr lvl="2"/>
@@ -1589,6 +2046,7 @@
               <a:rPr lang="en-US" smtClean="0"/>
               <a:t>Third level</a:t>
             </a:r>
+            <a:endParaRPr lang="en-US" smtClean="0"/>
           </a:p>
           <a:p>
             <a:pPr lvl="3"/>
@@ -1596,6 +2054,7 @@
               <a:rPr lang="en-US" smtClean="0"/>
               <a:t>Fourth level</a:t>
             </a:r>
+            <a:endParaRPr lang="en-US" smtClean="0"/>
           </a:p>
           <a:p>
             <a:pPr lvl="4"/>
@@ -1669,6 +2128,7 @@
               <a:rPr lang="en-US" smtClean="0"/>
               <a:t>Click to edit Master text styles</a:t>
             </a:r>
+            <a:endParaRPr lang="en-US" smtClean="0"/>
           </a:p>
         </p:txBody>
       </p:sp>
@@ -1725,6 +2185,7 @@
               <a:rPr lang="en-US" smtClean="0"/>
               <a:t>Click to edit Master text styles</a:t>
             </a:r>
+            <a:endParaRPr lang="en-US" smtClean="0"/>
           </a:p>
           <a:p>
             <a:pPr lvl="1"/>
@@ -1732,6 +2193,7 @@
               <a:rPr lang="en-US" smtClean="0"/>
               <a:t>Second level</a:t>
             </a:r>
+            <a:endParaRPr lang="en-US" smtClean="0"/>
           </a:p>
           <a:p>
             <a:pPr lvl="2"/>
@@ -1739,6 +2201,7 @@
               <a:rPr lang="en-US" smtClean="0"/>
               <a:t>Third level</a:t>
             </a:r>
+            <a:endParaRPr lang="en-US" smtClean="0"/>
           </a:p>
           <a:p>
             <a:pPr lvl="3"/>
@@ -1746,6 +2209,7 @@
               <a:rPr lang="en-US" smtClean="0"/>
               <a:t>Fourth level</a:t>
             </a:r>
+            <a:endParaRPr lang="en-US" smtClean="0"/>
           </a:p>
           <a:p>
             <a:pPr lvl="4"/>
@@ -1774,7 +2238,6 @@
           <a:p>
             <a:fld id="{5BCAD085-E8A6-8845-BD4E-CB4CCA059FC4}" type="datetimeFigureOut">
               <a:rPr lang="en-US" smtClean="0"/>
-              <a:t>1/27/13</a:t>
             </a:fld>
             <a:endParaRPr lang="en-US"/>
           </a:p>
@@ -1816,18 +2279,12 @@
           <a:p>
             <a:fld id="{C1FF6DA9-008F-8B48-92A6-B652298478BF}" type="slidenum">
               <a:rPr lang="en-US" smtClean="0"/>
-              <a:t>‹#›</a:t>
             </a:fld>
             <a:endParaRPr lang="en-US"/>
           </a:p>
         </p:txBody>
       </p:sp>
     </p:spTree>
-    <p:extLst>
-      <p:ext uri="{BB962C8B-B14F-4D97-AF65-F5344CB8AC3E}">
-        <p14:creationId xmlns:p14="http://schemas.microsoft.com/office/powerpoint/2010/main" val="990158736"/>
-      </p:ext>
-    </p:extLst>
   </p:cSld>
   <p:clrMapOvr>
     <a:masterClrMapping/>
@@ -1892,7 +2349,6 @@
           <a:p>
             <a:fld id="{5BCAD085-E8A6-8845-BD4E-CB4CCA059FC4}" type="datetimeFigureOut">
               <a:rPr lang="en-US" smtClean="0"/>
-              <a:t>1/27/13</a:t>
             </a:fld>
             <a:endParaRPr lang="en-US"/>
           </a:p>
@@ -1934,18 +2390,12 @@
           <a:p>
             <a:fld id="{C1FF6DA9-008F-8B48-92A6-B652298478BF}" type="slidenum">
               <a:rPr lang="en-US" smtClean="0"/>
-              <a:t>‹#›</a:t>
             </a:fld>
             <a:endParaRPr lang="en-US"/>
           </a:p>
         </p:txBody>
       </p:sp>
     </p:spTree>
-    <p:extLst>
-      <p:ext uri="{BB962C8B-B14F-4D97-AF65-F5344CB8AC3E}">
-        <p14:creationId xmlns:p14="http://schemas.microsoft.com/office/powerpoint/2010/main" val="727027711"/>
-      </p:ext>
-    </p:extLst>
   </p:cSld>
   <p:clrMapOvr>
     <a:masterClrMapping/>
@@ -1987,7 +2437,6 @@
           <a:p>
             <a:fld id="{5BCAD085-E8A6-8845-BD4E-CB4CCA059FC4}" type="datetimeFigureOut">
               <a:rPr lang="en-US" smtClean="0"/>
-              <a:t>1/27/13</a:t>
             </a:fld>
             <a:endParaRPr lang="en-US"/>
           </a:p>
@@ -2029,18 +2478,12 @@
           <a:p>
             <a:fld id="{C1FF6DA9-008F-8B48-92A6-B652298478BF}" type="slidenum">
               <a:rPr lang="en-US" smtClean="0"/>
-              <a:t>‹#›</a:t>
             </a:fld>
             <a:endParaRPr lang="en-US"/>
           </a:p>
         </p:txBody>
       </p:sp>
     </p:spTree>
-    <p:extLst>
-      <p:ext uri="{BB962C8B-B14F-4D97-AF65-F5344CB8AC3E}">
-        <p14:creationId xmlns:p14="http://schemas.microsoft.com/office/powerpoint/2010/main" val="1212999818"/>
-      </p:ext>
-    </p:extLst>
   </p:cSld>
   <p:clrMapOvr>
     <a:masterClrMapping/>
@@ -2150,6 +2593,7 @@
               <a:rPr lang="en-US" smtClean="0"/>
               <a:t>Click to edit Master text styles</a:t>
             </a:r>
+            <a:endParaRPr lang="en-US" smtClean="0"/>
           </a:p>
           <a:p>
             <a:pPr lvl="1"/>
@@ -2157,6 +2601,7 @@
               <a:rPr lang="en-US" smtClean="0"/>
               <a:t>Second level</a:t>
             </a:r>
+            <a:endParaRPr lang="en-US" smtClean="0"/>
           </a:p>
           <a:p>
             <a:pPr lvl="2"/>
@@ -2164,6 +2609,7 @@
               <a:rPr lang="en-US" smtClean="0"/>
               <a:t>Third level</a:t>
             </a:r>
+            <a:endParaRPr lang="en-US" smtClean="0"/>
           </a:p>
           <a:p>
             <a:pPr lvl="3"/>
@@ -2171,6 +2617,7 @@
               <a:rPr lang="en-US" smtClean="0"/>
               <a:t>Fourth level</a:t>
             </a:r>
+            <a:endParaRPr lang="en-US" smtClean="0"/>
           </a:p>
           <a:p>
             <a:pPr lvl="4"/>
@@ -2244,6 +2691,7 @@
               <a:rPr lang="en-US" smtClean="0"/>
               <a:t>Click to edit Master text styles</a:t>
             </a:r>
+            <a:endParaRPr lang="en-US" smtClean="0"/>
           </a:p>
         </p:txBody>
       </p:sp>
@@ -2264,7 +2712,6 @@
           <a:p>
             <a:fld id="{5BCAD085-E8A6-8845-BD4E-CB4CCA059FC4}" type="datetimeFigureOut">
               <a:rPr lang="en-US" smtClean="0"/>
-              <a:t>1/27/13</a:t>
             </a:fld>
             <a:endParaRPr lang="en-US"/>
           </a:p>
@@ -2306,18 +2753,12 @@
           <a:p>
             <a:fld id="{C1FF6DA9-008F-8B48-92A6-B652298478BF}" type="slidenum">
               <a:rPr lang="en-US" smtClean="0"/>
-              <a:t>‹#›</a:t>
             </a:fld>
             <a:endParaRPr lang="en-US"/>
           </a:p>
         </p:txBody>
       </p:sp>
     </p:spTree>
-    <p:extLst>
-      <p:ext uri="{BB962C8B-B14F-4D97-AF65-F5344CB8AC3E}">
-        <p14:creationId xmlns:p14="http://schemas.microsoft.com/office/powerpoint/2010/main" val="1840726560"/>
-      </p:ext>
-    </p:extLst>
   </p:cSld>
   <p:clrMapOvr>
     <a:masterClrMapping/>
@@ -2497,6 +2938,7 @@
               <a:rPr lang="en-US" smtClean="0"/>
               <a:t>Click to edit Master text styles</a:t>
             </a:r>
+            <a:endParaRPr lang="en-US" smtClean="0"/>
           </a:p>
         </p:txBody>
       </p:sp>
@@ -2517,7 +2959,6 @@
           <a:p>
             <a:fld id="{5BCAD085-E8A6-8845-BD4E-CB4CCA059FC4}" type="datetimeFigureOut">
               <a:rPr lang="en-US" smtClean="0"/>
-              <a:t>1/27/13</a:t>
             </a:fld>
             <a:endParaRPr lang="en-US"/>
           </a:p>
@@ -2559,18 +3000,12 @@
           <a:p>
             <a:fld id="{C1FF6DA9-008F-8B48-92A6-B652298478BF}" type="slidenum">
               <a:rPr lang="en-US" smtClean="0"/>
-              <a:t>‹#›</a:t>
             </a:fld>
             <a:endParaRPr lang="en-US"/>
           </a:p>
         </p:txBody>
       </p:sp>
     </p:spTree>
-    <p:extLst>
-      <p:ext uri="{BB962C8B-B14F-4D97-AF65-F5344CB8AC3E}">
-        <p14:creationId xmlns:p14="http://schemas.microsoft.com/office/powerpoint/2010/main" val="3889236939"/>
-      </p:ext>
-    </p:extLst>
   </p:cSld>
   <p:clrMapOvr>
     <a:masterClrMapping/>
@@ -2663,6 +3098,7 @@
               <a:rPr lang="en-US" smtClean="0"/>
               <a:t>Click to edit Master text styles</a:t>
             </a:r>
+            <a:endParaRPr lang="en-US" smtClean="0"/>
           </a:p>
           <a:p>
             <a:pPr lvl="1"/>
@@ -2670,6 +3106,7 @@
               <a:rPr lang="en-US" smtClean="0"/>
               <a:t>Second level</a:t>
             </a:r>
+            <a:endParaRPr lang="en-US" smtClean="0"/>
           </a:p>
           <a:p>
             <a:pPr lvl="2"/>
@@ -2677,6 +3114,7 @@
               <a:rPr lang="en-US" smtClean="0"/>
               <a:t>Third level</a:t>
             </a:r>
+            <a:endParaRPr lang="en-US" smtClean="0"/>
           </a:p>
           <a:p>
             <a:pPr lvl="3"/>
@@ -2684,6 +3122,7 @@
               <a:rPr lang="en-US" smtClean="0"/>
               <a:t>Fourth level</a:t>
             </a:r>
+            <a:endParaRPr lang="en-US" smtClean="0"/>
           </a:p>
           <a:p>
             <a:pPr lvl="4"/>
@@ -2730,7 +3169,6 @@
           <a:p>
             <a:fld id="{5BCAD085-E8A6-8845-BD4E-CB4CCA059FC4}" type="datetimeFigureOut">
               <a:rPr lang="en-US" smtClean="0"/>
-              <a:t>1/27/13</a:t>
             </a:fld>
             <a:endParaRPr lang="en-US"/>
           </a:p>
@@ -2808,18 +3246,12 @@
           <a:p>
             <a:fld id="{C1FF6DA9-008F-8B48-92A6-B652298478BF}" type="slidenum">
               <a:rPr lang="en-US" smtClean="0"/>
-              <a:t>‹#›</a:t>
             </a:fld>
             <a:endParaRPr lang="en-US"/>
           </a:p>
         </p:txBody>
       </p:sp>
     </p:spTree>
-    <p:extLst>
-      <p:ext uri="{BB962C8B-B14F-4D97-AF65-F5344CB8AC3E}">
-        <p14:creationId xmlns:p14="http://schemas.microsoft.com/office/powerpoint/2010/main" val="2209977519"/>
-      </p:ext>
-    </p:extLst>
   </p:cSld>
   <p:clrMap bg1="lt1" tx1="dk1" bg2="lt2" tx2="dk2" accent1="accent1" accent2="accent2" accent3="accent3" accent4="accent4" accent5="accent5" accent6="accent6" hlink="hlink" folHlink="folHlink"/>
   <p:sldLayoutIdLst>
@@ -2857,7 +3289,7 @@
         <a:spcBef>
           <a:spcPct val="20000"/>
         </a:spcBef>
-        <a:buFont typeface="Arial"/>
+        <a:buFont typeface="Arial" panose="020B0604020202020204"/>
         <a:buChar char="•"/>
         <a:defRPr sz="3200" kern="1200">
           <a:solidFill>
@@ -2872,7 +3304,7 @@
         <a:spcBef>
           <a:spcPct val="20000"/>
         </a:spcBef>
-        <a:buFont typeface="Arial"/>
+        <a:buFont typeface="Arial" panose="020B0604020202020204"/>
         <a:buChar char="–"/>
         <a:defRPr sz="2800" kern="1200">
           <a:solidFill>
@@ -2887,7 +3319,7 @@
         <a:spcBef>
           <a:spcPct val="20000"/>
         </a:spcBef>
-        <a:buFont typeface="Arial"/>
+        <a:buFont typeface="Arial" panose="020B0604020202020204"/>
         <a:buChar char="•"/>
         <a:defRPr sz="2400" kern="1200">
           <a:solidFill>
@@ -2902,7 +3334,7 @@
         <a:spcBef>
           <a:spcPct val="20000"/>
         </a:spcBef>
-        <a:buFont typeface="Arial"/>
+        <a:buFont typeface="Arial" panose="020B0604020202020204"/>
         <a:buChar char="–"/>
         <a:defRPr sz="2000" kern="1200">
           <a:solidFill>
@@ -2917,7 +3349,7 @@
         <a:spcBef>
           <a:spcPct val="20000"/>
         </a:spcBef>
-        <a:buFont typeface="Arial"/>
+        <a:buFont typeface="Arial" panose="020B0604020202020204"/>
         <a:buChar char="»"/>
         <a:defRPr sz="2000" kern="1200">
           <a:solidFill>
@@ -2932,7 +3364,7 @@
         <a:spcBef>
           <a:spcPct val="20000"/>
         </a:spcBef>
-        <a:buFont typeface="Arial"/>
+        <a:buFont typeface="Arial" panose="020B0604020202020204"/>
         <a:buChar char="•"/>
         <a:defRPr sz="2000" kern="1200">
           <a:solidFill>
@@ -2947,7 +3379,7 @@
         <a:spcBef>
           <a:spcPct val="20000"/>
         </a:spcBef>
-        <a:buFont typeface="Arial"/>
+        <a:buFont typeface="Arial" panose="020B0604020202020204"/>
         <a:buChar char="•"/>
         <a:defRPr sz="2000" kern="1200">
           <a:solidFill>
@@ -2962,7 +3394,7 @@
         <a:spcBef>
           <a:spcPct val="20000"/>
         </a:spcBef>
-        <a:buFont typeface="Arial"/>
+        <a:buFont typeface="Arial" panose="020B0604020202020204"/>
         <a:buChar char="•"/>
         <a:defRPr sz="2000" kern="1200">
           <a:solidFill>
@@ -2977,7 +3409,7 @@
         <a:spcBef>
           <a:spcPct val="20000"/>
         </a:spcBef>
-        <a:buFont typeface="Arial"/>
+        <a:buFont typeface="Arial" panose="020B0604020202020204"/>
         <a:buChar char="•"/>
         <a:defRPr sz="2000" kern="1200">
           <a:solidFill>
@@ -3089,7 +3521,7 @@
 </file>
 
 <file path=ppt/slides/slide1.xml><?xml version="1.0" encoding="utf-8"?>
-<p:sld xmlns:a="http://schemas.openxmlformats.org/drawingml/2006/main" xmlns:p="http://schemas.openxmlformats.org/presentationml/2006/main" xmlns:r="http://schemas.openxmlformats.org/officeDocument/2006/relationships">
+<p:sld xmlns:a="http://schemas.openxmlformats.org/drawingml/2006/main" xmlns:r="http://schemas.openxmlformats.org/officeDocument/2006/relationships" xmlns:p="http://schemas.openxmlformats.org/presentationml/2006/main">
   <p:cSld>
     <p:spTree>
       <p:nvGrpSpPr>
@@ -3172,6 +3604,11 @@
               </a:rPr>
               <a:t>海洋微藻智能识别与赤潮风险提示工具</a:t>
             </a:r>
+            <a:endParaRPr sz="4000" b="1">
+              <a:solidFill>
+                <a:srgbClr val="FFFFFF"/>
+              </a:solidFill>
+            </a:endParaRPr>
           </a:p>
         </p:txBody>
       </p:sp>
@@ -3206,6 +3643,11 @@
               </a:rPr>
               <a:t>双分支:宏观海面照片贝叶斯融合预警 × 显微图像 MindSpore 识别确认</a:t>
             </a:r>
+            <a:endParaRPr sz="2000" b="0">
+              <a:solidFill>
+                <a:srgbClr val="CFE3F5"/>
+              </a:solidFill>
+            </a:endParaRPr>
           </a:p>
         </p:txBody>
       </p:sp>
@@ -3240,6 +3682,11 @@
               </a:rPr>
               <a:t>2026 年海峡大学生人工智能创意大赛</a:t>
             </a:r>
+            <a:endParaRPr sz="1600" b="0">
+              <a:solidFill>
+                <a:srgbClr val="9FC5E8"/>
+              </a:solidFill>
+            </a:endParaRPr>
           </a:p>
         </p:txBody>
       </p:sp>
@@ -3252,7 +3699,7 @@
 </file>
 
 <file path=ppt/slides/slide10.xml><?xml version="1.0" encoding="utf-8"?>
-<p:sld xmlns:a="http://schemas.openxmlformats.org/drawingml/2006/main" xmlns:p="http://schemas.openxmlformats.org/presentationml/2006/main" xmlns:r="http://schemas.openxmlformats.org/officeDocument/2006/relationships">
+<p:sld xmlns:a="http://schemas.openxmlformats.org/drawingml/2006/main" xmlns:r="http://schemas.openxmlformats.org/officeDocument/2006/relationships" xmlns:p="http://schemas.openxmlformats.org/presentationml/2006/main">
   <p:cSld>
     <p:spTree>
       <p:nvGrpSpPr>
@@ -3333,8 +3780,13 @@
                   <a:srgbClr val="FFFFFF"/>
                 </a:solidFill>
               </a:rPr>
-              <a:t>九、创新点与特色</a:t>
-            </a:r>
+              <a:t>八、系统实现:双分支一体化前端</a:t>
+            </a:r>
+            <a:endParaRPr sz="3000" b="1">
+              <a:solidFill>
+                <a:srgbClr val="FFFFFF"/>
+              </a:solidFill>
+            </a:endParaRPr>
           </a:p>
         </p:txBody>
       </p:sp>
@@ -3347,7 +3799,7 @@
         <p:spPr>
           <a:xfrm>
             <a:off x="640080" y="1645920"/>
-            <a:ext cx="10881360" cy="804672"/>
+            <a:ext cx="10881360" cy="777240"/>
           </a:xfrm>
           <a:prstGeom prst="rect">
             <a:avLst/>
@@ -3367,8 +3819,13 @@
                   <a:srgbClr val="595959"/>
                 </a:solidFill>
               </a:rPr>
-              <a:t>•  宏观优先:直面真实用户只有海面照片的现状,用融合而非硬分类解决宏观定种难题;</a:t>
-            </a:r>
+              <a:t>•  Streamlit 双页签前端:『拍海面查风险(渔民用)』(主,上传海面照+6题问卷+四级预警卡)/『显微照片(化验室人员用)』(次,实验室确认);</a:t>
+            </a:r>
+            <a:endParaRPr sz="1800" b="0">
+              <a:solidFill>
+                <a:srgbClr val="595959"/>
+              </a:solidFill>
+            </a:endParaRPr>
           </a:p>
         </p:txBody>
       </p:sp>
@@ -3380,8 +3837,8 @@
         </p:nvSpPr>
         <p:spPr>
           <a:xfrm>
-            <a:off x="640080" y="2267712"/>
-            <a:ext cx="10881360" cy="804672"/>
+            <a:off x="640080" y="2240280"/>
+            <a:ext cx="10881360" cy="777240"/>
           </a:xfrm>
           <a:prstGeom prst="rect">
             <a:avLst/>
@@ -3401,8 +3858,13 @@
                   <a:srgbClr val="595959"/>
                 </a:solidFill>
               </a:rPr>
-              <a:t>•  贝叶斯可解释:问卷似然权重显式声明、证据链可审计,非黑箱;</a:t>
-            </a:r>
+              <a:t>•  面向渔民重做交互:结论压成三句大白话(什么情况/该干什么/该找谁)+『念给我听』语音播报+『复制上报话术』一键生成上报文本+『附上我的位置』定位;</a:t>
+            </a:r>
+            <a:endParaRPr sz="1800" b="0">
+              <a:solidFill>
+                <a:srgbClr val="595959"/>
+              </a:solidFill>
+            </a:endParaRPr>
           </a:p>
         </p:txBody>
       </p:sp>
@@ -3414,8 +3876,8 @@
         </p:nvSpPr>
         <p:spPr>
           <a:xfrm>
-            <a:off x="640080" y="2889504"/>
-            <a:ext cx="10881360" cy="804672"/>
+            <a:off x="640080" y="2834640"/>
+            <a:ext cx="10881360" cy="777240"/>
           </a:xfrm>
           <a:prstGeom prst="rect">
             <a:avLst/>
@@ -3435,8 +3897,13 @@
                   <a:srgbClr val="595959"/>
                 </a:solidFill>
               </a:rPr>
-              <a:t>•  真实可溯源:训练图像来自 GBIF 公开采集记录,逐张留存许可与权利人;</a:t>
-            </a:r>
+              <a:t>•  后验概率与似然证据链折叠进『我给专家看的』区,附✅好照片/❌不合适照片示例与本地查询历史;显微识别自动联动《藻种知识库》;</a:t>
+            </a:r>
+            <a:endParaRPr sz="1800" b="0">
+              <a:solidFill>
+                <a:srgbClr val="595959"/>
+              </a:solidFill>
+            </a:endParaRPr>
           </a:p>
         </p:txBody>
       </p:sp>
@@ -3448,8 +3915,8 @@
         </p:nvSpPr>
         <p:spPr>
           <a:xfrm>
-            <a:off x="640080" y="3511296"/>
-            <a:ext cx="10881360" cy="804672"/>
+            <a:off x="640080" y="3429000"/>
+            <a:ext cx="10881360" cy="777240"/>
           </a:xfrm>
           <a:prstGeom prst="rect">
             <a:avLst/>
@@ -3469,21 +3936,26 @@
                   <a:srgbClr val="595959"/>
                 </a:solidFill>
               </a:rPr>
-              <a:t>•  MindSpore 生态 + 轻量迁移学习:显微分支 7 类小样本达 95.4% 验证准确率;</a:t>
-            </a:r>
-          </a:p>
-        </p:txBody>
-      </p:sp>
-      <p:sp>
-        <p:nvSpPr>
-          <p:cNvPr id="8" name="TextBox 7"/>
+              <a:t>•  低饱和度图像自动提示『疑似显微照』引导切换;页脚附福建省海洋与渔业局官方入口;交互层改动不影响融合算法与预警阈值输出;</a:t>
+            </a:r>
+            <a:endParaRPr sz="1800" b="0">
+              <a:solidFill>
+                <a:srgbClr val="595959"/>
+              </a:solidFill>
+            </a:endParaRPr>
+          </a:p>
+        </p:txBody>
+      </p:sp>
+      <p:sp>
+        <p:nvSpPr>
+          <p:cNvPr id="8" name="TextBox 6"/>
           <p:cNvSpPr txBox="1"/>
           <p:nvPr/>
         </p:nvSpPr>
         <p:spPr>
           <a:xfrm>
-            <a:off x="640080" y="4133088"/>
-            <a:ext cx="10881360" cy="804672"/>
+            <a:off x="640080" y="4023360"/>
+            <a:ext cx="10881360" cy="777240"/>
           </a:xfrm>
           <a:prstGeom prst="rect">
             <a:avLst/>
@@ -3503,8 +3975,13 @@
                   <a:srgbClr val="595959"/>
                 </a:solidFill>
               </a:rPr>
-              <a:t>•  知识库驱动:风险结论来自结构化《藻种知识库》,可解释、可维护、可扩展。</a:t>
-            </a:r>
+              <a:t>•  v3 迭代仅改展示与交互层,融合与四级预警输出与 v2 完全一致(已回归验证),结论可信、可复现。</a:t>
+            </a:r>
+            <a:endParaRPr sz="1800" b="0">
+              <a:solidFill>
+                <a:srgbClr val="595959"/>
+              </a:solidFill>
+            </a:endParaRPr>
           </a:p>
         </p:txBody>
       </p:sp>
@@ -3517,7 +3994,7 @@
 </file>
 
 <file path=ppt/slides/slide11.xml><?xml version="1.0" encoding="utf-8"?>
-<p:sld xmlns:a="http://schemas.openxmlformats.org/drawingml/2006/main" xmlns:p="http://schemas.openxmlformats.org/presentationml/2006/main" xmlns:r="http://schemas.openxmlformats.org/officeDocument/2006/relationships">
+<p:sld xmlns:a="http://schemas.openxmlformats.org/drawingml/2006/main" xmlns:r="http://schemas.openxmlformats.org/officeDocument/2006/relationships" xmlns:p="http://schemas.openxmlformats.org/presentationml/2006/main">
   <p:cSld>
     <p:spTree>
       <p:nvGrpSpPr>
@@ -3598,8 +4075,13 @@
                   <a:srgbClr val="FFFFFF"/>
                 </a:solidFill>
               </a:rPr>
-              <a:t>十、总结与展望</a:t>
-            </a:r>
+              <a:t>九、创新点与特色</a:t>
+            </a:r>
+            <a:endParaRPr sz="3000" b="1">
+              <a:solidFill>
+                <a:srgbClr val="FFFFFF"/>
+              </a:solidFill>
+            </a:endParaRPr>
           </a:p>
         </p:txBody>
       </p:sp>
@@ -3612,7 +4094,7 @@
         <p:spPr>
           <a:xfrm>
             <a:off x="640080" y="1645920"/>
-            <a:ext cx="10881360" cy="914400"/>
+            <a:ext cx="10881360" cy="804672"/>
           </a:xfrm>
           <a:prstGeom prst="rect">
             <a:avLst/>
@@ -3627,13 +4109,18 @@
           <a:p>
             <a:pPr algn="l"/>
             <a:r>
-              <a:rPr sz="1900" b="0">
+              <a:rPr sz="1800" b="0">
                 <a:solidFill>
                   <a:srgbClr val="595959"/>
                 </a:solidFill>
               </a:rPr>
-              <a:t>•  已实现:真实溯源数据集(7 类约 755 张)+ 宏观融合与四级预警分支 + 显微 MindSpore 识别分支(95.4%)+ v3 渔民友好双页签前端;</a:t>
-            </a:r>
+              <a:t>•  宏观优先:直面真实用户只有海面照片的现状,用融合而非硬分类解决宏观定种难题;</a:t>
+            </a:r>
+            <a:endParaRPr sz="1800" b="0">
+              <a:solidFill>
+                <a:srgbClr val="595959"/>
+              </a:solidFill>
+            </a:endParaRPr>
           </a:p>
         </p:txBody>
       </p:sp>
@@ -3645,8 +4132,8 @@
         </p:nvSpPr>
         <p:spPr>
           <a:xfrm>
-            <a:off x="640080" y="2377440"/>
-            <a:ext cx="10881360" cy="914400"/>
+            <a:off x="640080" y="2267712"/>
+            <a:ext cx="10881360" cy="804672"/>
           </a:xfrm>
           <a:prstGeom prst="rect">
             <a:avLst/>
@@ -3661,13 +4148,18 @@
           <a:p>
             <a:pPr algn="l"/>
             <a:r>
-              <a:rPr sz="1900" b="0">
+              <a:rPr sz="1800" b="0">
                 <a:solidFill>
                   <a:srgbClr val="595959"/>
                 </a:solidFill>
               </a:rPr>
-              <a:t>•  后续工作:迁移微信小程序入口(扫码即用、免装环境)+ 弱信号离线出结论 + 同点位时序趋势曲线;</a:t>
-            </a:r>
+              <a:t>•  贝叶斯可解释:问卷似然权重显式声明、证据链可审计,非黑箱;</a:t>
+            </a:r>
+            <a:endParaRPr sz="1800" b="0">
+              <a:solidFill>
+                <a:srgbClr val="595959"/>
+              </a:solidFill>
+            </a:endParaRPr>
           </a:p>
         </p:txBody>
       </p:sp>
@@ -3679,8 +4171,8 @@
         </p:nvSpPr>
         <p:spPr>
           <a:xfrm>
-            <a:off x="640080" y="3840480"/>
-            <a:ext cx="10881360" cy="914400"/>
+            <a:off x="640080" y="2889504"/>
+            <a:ext cx="10881360" cy="804672"/>
           </a:xfrm>
           <a:prstGeom prst="rect">
             <a:avLst/>
@@ -3695,26 +4187,31 @@
           <a:p>
             <a:pPr algn="l"/>
             <a:r>
-              <a:rPr sz="1900" b="0">
+              <a:rPr sz="1800" b="0">
                 <a:solidFill>
                   <a:srgbClr val="595959"/>
                 </a:solidFill>
               </a:rPr>
-              <a:t>•  本工具可为近岸养殖区赤潮早期预警与贝类安全监测提供辅助决策支持。</a:t>
-            </a:r>
-          </a:p>
-        </p:txBody>
-      </p:sp>
-      <p:sp>
-        <p:nvSpPr>
-          <p:cNvPr id="5" name="TextBox 4"/>
+              <a:t>•  真实可溯源:训练图像来自 GBIF 公开采集记录,逐张留存许可与权利人;</a:t>
+            </a:r>
+            <a:endParaRPr sz="1800" b="0">
+              <a:solidFill>
+                <a:srgbClr val="595959"/>
+              </a:solidFill>
+            </a:endParaRPr>
+          </a:p>
+        </p:txBody>
+      </p:sp>
+      <p:sp>
+        <p:nvSpPr>
+          <p:cNvPr id="7" name="TextBox 6"/>
           <p:cNvSpPr txBox="1"/>
           <p:nvPr/>
         </p:nvSpPr>
         <p:spPr>
           <a:xfrm>
-            <a:off x="640080" y="3108960"/>
-            <a:ext cx="10881360" cy="914400"/>
+            <a:off x="640080" y="3511296"/>
+            <a:ext cx="10881360" cy="804672"/>
           </a:xfrm>
           <a:prstGeom prst="rect">
             <a:avLst/>
@@ -3729,13 +4226,57 @@
           <a:p>
             <a:pPr algn="l"/>
             <a:r>
-              <a:rPr sz="1900" b="0">
+              <a:rPr sz="1800" b="0">
                 <a:solidFill>
                   <a:srgbClr val="595959"/>
                 </a:solidFill>
               </a:rPr>
-              <a:t>•  宏观 CNN 重启:待现场实测海面照达标(正常≥60/绿潮≥30),以冻结骨干二分类作为第三路证据接入融合;</a:t>
-            </a:r>
+              <a:t>•  MindSpore 生态 + 轻量迁移学习:显微分支 7 类小样本达 95.4% 验证准确率;</a:t>
+            </a:r>
+            <a:endParaRPr sz="1800" b="0">
+              <a:solidFill>
+                <a:srgbClr val="595959"/>
+              </a:solidFill>
+            </a:endParaRPr>
+          </a:p>
+        </p:txBody>
+      </p:sp>
+      <p:sp>
+        <p:nvSpPr>
+          <p:cNvPr id="8" name="TextBox 7"/>
+          <p:cNvSpPr txBox="1"/>
+          <p:nvPr/>
+        </p:nvSpPr>
+        <p:spPr>
+          <a:xfrm>
+            <a:off x="640080" y="4133088"/>
+            <a:ext cx="10881360" cy="804672"/>
+          </a:xfrm>
+          <a:prstGeom prst="rect">
+            <a:avLst/>
+          </a:prstGeom>
+          <a:noFill/>
+        </p:spPr>
+        <p:txBody>
+          <a:bodyPr wrap="square" anchor="t">
+            <a:spAutoFit/>
+          </a:bodyPr>
+          <a:lstStyle/>
+          <a:p>
+            <a:pPr algn="l"/>
+            <a:r>
+              <a:rPr sz="1800" b="0">
+                <a:solidFill>
+                  <a:srgbClr val="595959"/>
+                </a:solidFill>
+              </a:rPr>
+              <a:t>•  知识库驱动:风险结论来自结构化《藻种知识库》,可解释、可维护、可扩展。</a:t>
+            </a:r>
+            <a:endParaRPr sz="1800" b="0">
+              <a:solidFill>
+                <a:srgbClr val="595959"/>
+              </a:solidFill>
+            </a:endParaRPr>
           </a:p>
         </p:txBody>
       </p:sp>
@@ -3747,8 +4288,8 @@
 </p:sld>
 </file>
 
-<file path=ppt/slides/slide2.xml><?xml version="1.0" encoding="utf-8"?>
-<p:sld xmlns:a="http://schemas.openxmlformats.org/drawingml/2006/main" xmlns:p="http://schemas.openxmlformats.org/presentationml/2006/main" xmlns:r="http://schemas.openxmlformats.org/officeDocument/2006/relationships">
+<file path=ppt/slides/slide12.xml><?xml version="1.0" encoding="utf-8"?>
+<p:sld xmlns:a="http://schemas.openxmlformats.org/drawingml/2006/main" xmlns:r="http://schemas.openxmlformats.org/officeDocument/2006/relationships" xmlns:p="http://schemas.openxmlformats.org/presentationml/2006/main">
   <p:cSld>
     <p:spTree>
       <p:nvGrpSpPr>
@@ -3829,8 +4370,13 @@
                   <a:srgbClr val="FFFFFF"/>
                 </a:solidFill>
               </a:rPr>
-              <a:t>一、背景与意义</a:t>
-            </a:r>
+              <a:t>十、总结与展望</a:t>
+            </a:r>
+            <a:endParaRPr sz="3000" b="1">
+              <a:solidFill>
+                <a:srgbClr val="FFFFFF"/>
+              </a:solidFill>
+            </a:endParaRPr>
           </a:p>
         </p:txBody>
       </p:sp>
@@ -3843,7 +4389,7 @@
         <p:spPr>
           <a:xfrm>
             <a:off x="640080" y="1645920"/>
-            <a:ext cx="10881360" cy="868680"/>
+            <a:ext cx="10881360" cy="914400"/>
           </a:xfrm>
           <a:prstGeom prst="rect">
             <a:avLst/>
@@ -3863,8 +4409,13 @@
                   <a:srgbClr val="595959"/>
                 </a:solidFill>
               </a:rPr>
-              <a:t>•  福建沿海是赤潮多发区,赤潮藻爆发威胁海水养殖、贝类安全与近岸生态;</a:t>
-            </a:r>
+              <a:t>•  已实现:真实溯源数据集(7 类约 755 张)+ 宏观融合与四级预警分支 + 显微 MindSpore 识别分支(95.4%)+ v3 渔民友好双页签前端;</a:t>
+            </a:r>
+            <a:endParaRPr sz="1900" b="0">
+              <a:solidFill>
+                <a:srgbClr val="595959"/>
+              </a:solidFill>
+            </a:endParaRPr>
           </a:p>
         </p:txBody>
       </p:sp>
@@ -3876,8 +4427,8 @@
         </p:nvSpPr>
         <p:spPr>
           <a:xfrm>
-            <a:off x="640080" y="2331720"/>
-            <a:ext cx="10881360" cy="868680"/>
+            <a:off x="640080" y="2377440"/>
+            <a:ext cx="10881360" cy="914400"/>
           </a:xfrm>
           <a:prstGeom prst="rect">
             <a:avLst/>
@@ -3897,8 +4448,13 @@
                   <a:srgbClr val="595959"/>
                 </a:solidFill>
               </a:rPr>
-              <a:t>•  现场人员(养殖户/巡查/公众)最先拿到的是海面现状照片,而非显微照片;</a:t>
-            </a:r>
+              <a:t>•  后续工作:迁移微信小程序入口(扫码即用、免装环境)+ 弱信号离线出结论 + 同点位时序趋势曲线;</a:t>
+            </a:r>
+            <a:endParaRPr sz="1900" b="0">
+              <a:solidFill>
+                <a:srgbClr val="595959"/>
+              </a:solidFill>
+            </a:endParaRPr>
           </a:p>
         </p:txBody>
       </p:sp>
@@ -3910,8 +4466,8 @@
         </p:nvSpPr>
         <p:spPr>
           <a:xfrm>
-            <a:off x="640080" y="3017520"/>
-            <a:ext cx="10881360" cy="868680"/>
+            <a:off x="640080" y="3840480"/>
+            <a:ext cx="10881360" cy="914400"/>
           </a:xfrm>
           <a:prstGeom prst="rect">
             <a:avLst/>
@@ -3931,21 +4487,26 @@
                   <a:srgbClr val="595959"/>
                 </a:solidFill>
               </a:rPr>
-              <a:t>•  但仅凭一张海面照片难以可靠定种,传统显微镜镜检又依赖专业人员、耗时长;</a:t>
-            </a:r>
-          </a:p>
-        </p:txBody>
-      </p:sp>
-      <p:sp>
-        <p:nvSpPr>
-          <p:cNvPr id="7" name="TextBox 6"/>
+              <a:t>•  本工具可为近岸养殖区赤潮早期预警与贝类安全监测提供辅助决策支持。</a:t>
+            </a:r>
+            <a:endParaRPr sz="1900" b="0">
+              <a:solidFill>
+                <a:srgbClr val="595959"/>
+              </a:solidFill>
+            </a:endParaRPr>
+          </a:p>
+        </p:txBody>
+      </p:sp>
+      <p:sp>
+        <p:nvSpPr>
+          <p:cNvPr id="7" name="TextBox 4"/>
           <p:cNvSpPr txBox="1"/>
           <p:nvPr/>
         </p:nvSpPr>
         <p:spPr>
           <a:xfrm>
-            <a:off x="640080" y="3703320"/>
-            <a:ext cx="10881360" cy="868680"/>
+            <a:off x="640080" y="3108960"/>
+            <a:ext cx="10881360" cy="914400"/>
           </a:xfrm>
           <a:prstGeom prst="rect">
             <a:avLst/>
@@ -3965,8 +4526,13 @@
                   <a:srgbClr val="595959"/>
                 </a:solidFill>
               </a:rPr>
-              <a:t>•  本工具思路:宏观海面照片+现场特征问卷做贝叶斯融合快速预警(主分支),显微照片做实验室级识别确认(次分支)。</a:t>
-            </a:r>
+              <a:t>•  宏观 CNN(弱监督自训练)已完成首版:3065 张伪标签海面图训练,25 张真实图验证 80%,作为第三路证据备用;后续以福建海域实测海面照(正常≥60/绿潮≥30)做本地校准与正式接入;</a:t>
+            </a:r>
+            <a:endParaRPr sz="1900" b="0">
+              <a:solidFill>
+                <a:srgbClr val="595959"/>
+              </a:solidFill>
+            </a:endParaRPr>
           </a:p>
         </p:txBody>
       </p:sp>
@@ -3978,8 +4544,8 @@
 </p:sld>
 </file>
 
-<file path=ppt/slides/slide3.xml><?xml version="1.0" encoding="utf-8"?>
-<p:sld xmlns:a="http://schemas.openxmlformats.org/drawingml/2006/main" xmlns:p="http://schemas.openxmlformats.org/presentationml/2006/main" xmlns:r="http://schemas.openxmlformats.org/officeDocument/2006/relationships">
+<file path=ppt/slides/slide2.xml><?xml version="1.0" encoding="utf-8"?>
+<p:sld xmlns:a="http://schemas.openxmlformats.org/drawingml/2006/main" xmlns:r="http://schemas.openxmlformats.org/officeDocument/2006/relationships" xmlns:p="http://schemas.openxmlformats.org/presentationml/2006/main">
   <p:cSld>
     <p:spTree>
       <p:nvGrpSpPr>
@@ -4060,8 +4626,13 @@
                   <a:srgbClr val="FFFFFF"/>
                 </a:solidFill>
               </a:rPr>
-              <a:t>二、数据集:真实、可溯源的赤潮藻影像</a:t>
-            </a:r>
+              <a:t>一、背景与意义</a:t>
+            </a:r>
+            <a:endParaRPr sz="3000" b="1">
+              <a:solidFill>
+                <a:srgbClr val="FFFFFF"/>
+              </a:solidFill>
+            </a:endParaRPr>
           </a:p>
         </p:txBody>
       </p:sp>
@@ -4074,7 +4645,7 @@
         <p:spPr>
           <a:xfrm>
             <a:off x="640080" y="1645920"/>
-            <a:ext cx="10881360" cy="731520"/>
+            <a:ext cx="10881360" cy="868680"/>
           </a:xfrm>
           <a:prstGeom prst="rect">
             <a:avLst/>
@@ -4089,13 +4660,18 @@
           <a:p>
             <a:pPr algn="l"/>
             <a:r>
-              <a:rPr sz="1700" b="0">
+              <a:rPr sz="1900" b="0">
                 <a:solidFill>
                   <a:srgbClr val="595959"/>
                 </a:solidFill>
               </a:rPr>
-              <a:t>•  图像来源:GBIF(全球生物多样性信息网络)公开采集影像,辅以 CNKI 学术显微图;</a:t>
-            </a:r>
+              <a:t>•  福建沿海是赤潮多发区,赤潮藻爆发威胁海水养殖、贝类安全与近岸生态;</a:t>
+            </a:r>
+            <a:endParaRPr sz="1900" b="0">
+              <a:solidFill>
+                <a:srgbClr val="595959"/>
+              </a:solidFill>
+            </a:endParaRPr>
           </a:p>
         </p:txBody>
       </p:sp>
@@ -4107,8 +4683,8 @@
         </p:nvSpPr>
         <p:spPr>
           <a:xfrm>
-            <a:off x="640080" y="2194560"/>
-            <a:ext cx="10881360" cy="731520"/>
+            <a:off x="640080" y="2331720"/>
+            <a:ext cx="10881360" cy="868680"/>
           </a:xfrm>
           <a:prstGeom prst="rect">
             <a:avLst/>
@@ -4123,13 +4699,18 @@
           <a:p>
             <a:pPr algn="l"/>
             <a:r>
-              <a:rPr sz="1700" b="0">
+              <a:rPr sz="1900" b="0">
                 <a:solidFill>
                   <a:srgbClr val="595959"/>
                 </a:solidFill>
               </a:rPr>
-              <a:t>•  每一张图均记录溯源信息:采集记录号、记录学名、影像 URL、许可协议、权利人;</a:t>
-            </a:r>
+              <a:t>•  现场人员(养殖户/巡查/公众)最先拿到的是海面现状照片,而非显微照片;</a:t>
+            </a:r>
+            <a:endParaRPr sz="1900" b="0">
+              <a:solidFill>
+                <a:srgbClr val="595959"/>
+              </a:solidFill>
+            </a:endParaRPr>
           </a:p>
         </p:txBody>
       </p:sp>
@@ -4141,8 +4722,8 @@
         </p:nvSpPr>
         <p:spPr>
           <a:xfrm>
-            <a:off x="640080" y="2743200"/>
-            <a:ext cx="10881360" cy="731520"/>
+            <a:off x="640080" y="3017520"/>
+            <a:ext cx="10881360" cy="868680"/>
           </a:xfrm>
           <a:prstGeom prst="rect">
             <a:avLst/>
@@ -4157,13 +4738,18 @@
           <a:p>
             <a:pPr algn="l"/>
             <a:r>
-              <a:rPr sz="1700" b="0">
+              <a:rPr sz="1900" b="0">
                 <a:solidFill>
                   <a:srgbClr val="595959"/>
                 </a:solidFill>
               </a:rPr>
-              <a:t>•  覆盖 7 个赤潮相关类群,共约 755 张真实影像(含显微与海面水华宏观照);</a:t>
-            </a:r>
+              <a:t>•  但仅凭一张海面照片难以可靠定种,传统显微镜镜检又依赖专业人员、耗时长;</a:t>
+            </a:r>
+            <a:endParaRPr sz="1900" b="0">
+              <a:solidFill>
+                <a:srgbClr val="595959"/>
+              </a:solidFill>
+            </a:endParaRPr>
           </a:p>
         </p:txBody>
       </p:sp>
@@ -4175,8 +4761,8 @@
         </p:nvSpPr>
         <p:spPr>
           <a:xfrm>
-            <a:off x="640080" y="3291840"/>
-            <a:ext cx="10881360" cy="731520"/>
+            <a:off x="640080" y="3703320"/>
+            <a:ext cx="10881360" cy="868680"/>
           </a:xfrm>
           <a:prstGeom prst="rect">
             <a:avLst/>
@@ -4191,40 +4777,21 @@
           <a:p>
             <a:pPr algn="l"/>
             <a:r>
-              <a:rPr sz="1700" b="0">
+              <a:rPr sz="1900" b="0">
                 <a:solidFill>
                   <a:srgbClr val="595959"/>
                 </a:solidFill>
               </a:rPr>
-              <a:t>•  分类在 GBIF 可靠支撑的分类层级进行,物种代表种写入知识库,保证标签真实可信。</a:t>
-            </a:r>
-          </a:p>
-        </p:txBody>
-      </p:sp>
-      <p:pic>
-        <p:nvPicPr>
-          <p:cNvPr id="8" name="Picture 7" descr="chart_counts.png"/>
-          <p:cNvPicPr>
-            <a:picLocks noChangeAspect="1"/>
-          </p:cNvPicPr>
-          <p:nvPr/>
-        </p:nvPicPr>
-        <p:blipFill>
-          <a:blip r:embed="rId2"/>
-          <a:stretch>
-            <a:fillRect/>
-          </a:stretch>
-        </p:blipFill>
-        <p:spPr>
-          <a:xfrm>
-            <a:off x="3108960" y="3291840"/>
-            <a:ext cx="6035040" cy="3084576"/>
-          </a:xfrm>
-          <a:prstGeom prst="rect">
-            <a:avLst/>
-          </a:prstGeom>
-        </p:spPr>
-      </p:pic>
+              <a:t>•  本工具思路:宏观海面照片+现场特征问卷做贝叶斯融合快速预警(主分支),显微照片做实验室级识别确认(次分支)。</a:t>
+            </a:r>
+            <a:endParaRPr sz="1900" b="0">
+              <a:solidFill>
+                <a:srgbClr val="595959"/>
+              </a:solidFill>
+            </a:endParaRPr>
+          </a:p>
+        </p:txBody>
+      </p:sp>
     </p:spTree>
   </p:cSld>
   <p:clrMapOvr>
@@ -4233,8 +4800,8 @@
 </p:sld>
 </file>
 
-<file path=ppt/slides/slide4.xml><?xml version="1.0" encoding="utf-8"?>
-<p:sld xmlns:a="http://schemas.openxmlformats.org/drawingml/2006/main" xmlns:p="http://schemas.openxmlformats.org/presentationml/2006/main" xmlns:r="http://schemas.openxmlformats.org/officeDocument/2006/relationships">
+<file path=ppt/slides/slide3.xml><?xml version="1.0" encoding="utf-8"?>
+<p:sld xmlns:a="http://schemas.openxmlformats.org/drawingml/2006/main" xmlns:r="http://schemas.openxmlformats.org/officeDocument/2006/relationships" xmlns:p="http://schemas.openxmlformats.org/presentationml/2006/main">
   <p:cSld>
     <p:spTree>
       <p:nvGrpSpPr>
@@ -4315,8 +4882,13 @@
                   <a:srgbClr val="FFFFFF"/>
                 </a:solidFill>
               </a:rPr>
-              <a:t>三、分支二(显微):MindSpore 迁移学习</a:t>
-            </a:r>
+              <a:t>二、数据集:真实、可溯源的赤潮藻影像</a:t>
+            </a:r>
+            <a:endParaRPr sz="3000" b="1">
+              <a:solidFill>
+                <a:srgbClr val="FFFFFF"/>
+              </a:solidFill>
+            </a:endParaRPr>
           </a:p>
         </p:txBody>
       </p:sp>
@@ -4329,7 +4901,7 @@
         <p:spPr>
           <a:xfrm>
             <a:off x="640080" y="1645920"/>
-            <a:ext cx="10881360" cy="749808"/>
+            <a:ext cx="10881360" cy="731520"/>
           </a:xfrm>
           <a:prstGeom prst="rect">
             <a:avLst/>
@@ -4344,13 +4916,18 @@
           <a:p>
             <a:pPr algn="l"/>
             <a:r>
-              <a:rPr sz="1800" b="0">
+              <a:rPr sz="1700" b="0">
                 <a:solidFill>
                   <a:srgbClr val="595959"/>
                 </a:solidFill>
               </a:rPr>
-              <a:t>•  骨干网络:MobileNetV3-Small(ImageNet 预训练),轻量、适合端侧/教学部署;</a:t>
-            </a:r>
+              <a:t>•  图像来源:GBIF(全球生物多样性信息网络)公开采集影像,辅以 CNKI 学术显微图;</a:t>
+            </a:r>
+            <a:endParaRPr sz="1700" b="0">
+              <a:solidFill>
+                <a:srgbClr val="595959"/>
+              </a:solidFill>
+            </a:endParaRPr>
           </a:p>
         </p:txBody>
       </p:sp>
@@ -4362,8 +4939,8 @@
         </p:nvSpPr>
         <p:spPr>
           <a:xfrm>
-            <a:off x="640080" y="2212848"/>
-            <a:ext cx="10881360" cy="749808"/>
+            <a:off x="640080" y="2194560"/>
+            <a:ext cx="10881360" cy="731520"/>
           </a:xfrm>
           <a:prstGeom prst="rect">
             <a:avLst/>
@@ -4378,13 +4955,18 @@
           <a:p>
             <a:pPr algn="l"/>
             <a:r>
-              <a:rPr sz="1800" b="0">
+              <a:rPr sz="1700" b="0">
                 <a:solidFill>
                   <a:srgbClr val="595959"/>
                 </a:solidFill>
               </a:rPr>
-              <a:t>•  迁移学习策略:冻结骨干特征层,仅训练分类头,小样本下快速收敛、抑制过拟合;</a:t>
-            </a:r>
+              <a:t>•  每一张图均记录溯源信息:采集记录号、记录学名、影像 URL、许可协议、权利人;</a:t>
+            </a:r>
+            <a:endParaRPr sz="1700" b="0">
+              <a:solidFill>
+                <a:srgbClr val="595959"/>
+              </a:solidFill>
+            </a:endParaRPr>
           </a:p>
         </p:txBody>
       </p:sp>
@@ -4396,8 +4978,8 @@
         </p:nvSpPr>
         <p:spPr>
           <a:xfrm>
-            <a:off x="640080" y="2779776"/>
-            <a:ext cx="10881360" cy="749808"/>
+            <a:off x="640080" y="2743200"/>
+            <a:ext cx="10881360" cy="731520"/>
           </a:xfrm>
           <a:prstGeom prst="rect">
             <a:avLst/>
@@ -4412,13 +4994,18 @@
           <a:p>
             <a:pPr algn="l"/>
             <a:r>
-              <a:rPr sz="1800" b="0">
+              <a:rPr sz="1700" b="0">
                 <a:solidFill>
                   <a:srgbClr val="595959"/>
                 </a:solidFill>
               </a:rPr>
-              <a:t>•  输入 224×224 RGB;数据增强:随机裁剪、水平翻转;</a:t>
-            </a:r>
+              <a:t>•  覆盖 7 个赤潮相关类群,共约 755 张真实影像(含显微与海面水华宏观照);</a:t>
+            </a:r>
+            <a:endParaRPr sz="1700" b="0">
+              <a:solidFill>
+                <a:srgbClr val="595959"/>
+              </a:solidFill>
+            </a:endParaRPr>
           </a:p>
         </p:txBody>
       </p:sp>
@@ -4430,8 +5017,8 @@
         </p:nvSpPr>
         <p:spPr>
           <a:xfrm>
-            <a:off x="640080" y="3346704"/>
-            <a:ext cx="10881360" cy="749808"/>
+            <a:off x="640080" y="3291840"/>
+            <a:ext cx="10881360" cy="731520"/>
           </a:xfrm>
           <a:prstGeom prst="rect">
             <a:avLst/>
@@ -4446,67 +5033,38 @@
           <a:p>
             <a:pPr algn="l"/>
             <a:r>
-              <a:rPr sz="1800" b="0">
+              <a:rPr sz="1700" b="0">
                 <a:solidFill>
                   <a:srgbClr val="595959"/>
                 </a:solidFill>
               </a:rPr>
-              <a:t>•  训练框架:MindSpore(昇思),PYNATIVE 模式 CPU 训练,30 epochs,Adam 优化;</a:t>
-            </a:r>
-          </a:p>
-        </p:txBody>
-      </p:sp>
-      <p:sp>
-        <p:nvSpPr>
-          <p:cNvPr id="8" name="TextBox 7"/>
-          <p:cNvSpPr txBox="1"/>
-          <p:nvPr/>
-        </p:nvSpPr>
-        <p:spPr>
-          <a:xfrm>
-            <a:off x="640080" y="3913632"/>
-            <a:ext cx="10881360" cy="749808"/>
-          </a:xfrm>
-          <a:prstGeom prst="rect">
-            <a:avLst/>
-          </a:prstGeom>
-          <a:noFill/>
-        </p:spPr>
-        <p:txBody>
-          <a:bodyPr wrap="square" anchor="t">
-            <a:spAutoFit/>
-          </a:bodyPr>
-          <a:lstStyle/>
-          <a:p>
-            <a:pPr algn="l"/>
-            <a:r>
-              <a:rPr sz="1800" b="0">
-                <a:solidFill>
-                  <a:srgbClr val="595959"/>
-                </a:solidFill>
-              </a:rPr>
-              <a:t>•  按验证集准确率自动保存最佳权重 best.ckpt。</a:t>
-            </a:r>
+              <a:t>•  分类在 GBIF 可靠支撑的分类层级进行,物种代表种写入知识库,保证标签真实可信。</a:t>
+            </a:r>
+            <a:endParaRPr sz="1700" b="0">
+              <a:solidFill>
+                <a:srgbClr val="595959"/>
+              </a:solidFill>
+            </a:endParaRPr>
           </a:p>
         </p:txBody>
       </p:sp>
       <p:pic>
         <p:nvPicPr>
-          <p:cNvPr id="9" name="Picture 8" descr="chart_acc_curve.png"/>
+          <p:cNvPr id="8" name="Picture 7" descr="chart_counts.png"/>
           <p:cNvPicPr>
             <a:picLocks noChangeAspect="1"/>
           </p:cNvPicPr>
           <p:nvPr/>
         </p:nvPicPr>
         <p:blipFill>
-          <a:blip r:embed="rId2"/>
+          <a:blip r:embed="rId1"/>
           <a:stretch>
             <a:fillRect/>
           </a:stretch>
         </p:blipFill>
         <p:spPr>
           <a:xfrm>
-            <a:off x="3108960" y="3931920"/>
+            <a:off x="3108960" y="3291840"/>
             <a:ext cx="6035040" cy="3084576"/>
           </a:xfrm>
           <a:prstGeom prst="rect">
@@ -4522,8 +5080,8 @@
 </p:sld>
 </file>
 
-<file path=ppt/slides/slide5.xml><?xml version="1.0" encoding="utf-8"?>
-<p:sld xmlns:a="http://schemas.openxmlformats.org/drawingml/2006/main" xmlns:p="http://schemas.openxmlformats.org/presentationml/2006/main" xmlns:r="http://schemas.openxmlformats.org/officeDocument/2006/relationships">
+<file path=ppt/slides/slide4.xml><?xml version="1.0" encoding="utf-8"?>
+<p:sld xmlns:a="http://schemas.openxmlformats.org/drawingml/2006/main" xmlns:r="http://schemas.openxmlformats.org/officeDocument/2006/relationships" xmlns:p="http://schemas.openxmlformats.org/presentationml/2006/main">
   <p:cSld>
     <p:spTree>
       <p:nvGrpSpPr>
@@ -4604,8 +5162,13 @@
                   <a:srgbClr val="FFFFFF"/>
                 </a:solidFill>
               </a:rPr>
-              <a:t>四、分支一(宏观):水色CV × 现场问卷 贝叶斯融合</a:t>
-            </a:r>
+              <a:t>三、分支二(显微):MindSpore 迁移学习</a:t>
+            </a:r>
+            <a:endParaRPr sz="3000" b="1">
+              <a:solidFill>
+                <a:srgbClr val="FFFFFF"/>
+              </a:solidFill>
+            </a:endParaRPr>
           </a:p>
         </p:txBody>
       </p:sp>
@@ -4633,13 +5196,18 @@
           <a:p>
             <a:pPr algn="l"/>
             <a:r>
-              <a:rPr sz="1700" b="0">
+              <a:rPr sz="1800" b="0">
                 <a:solidFill>
                   <a:srgbClr val="595959"/>
                 </a:solidFill>
               </a:rPr>
-              <a:t>•  图像证据:经典CV对海面照做水华色块检测(粉/褐/绿/泡沫占比),无需训练、不受宏观标注数据稀缺限制;</a:t>
-            </a:r>
+              <a:t>•  骨干网络:MobileNetV3-Small(ImageNet 预训练),轻量、适合端侧/教学部署;</a:t>
+            </a:r>
+            <a:endParaRPr sz="1800" b="0">
+              <a:solidFill>
+                <a:srgbClr val="595959"/>
+              </a:solidFill>
+            </a:endParaRPr>
           </a:p>
         </p:txBody>
       </p:sp>
@@ -4667,13 +5235,18 @@
           <a:p>
             <a:pPr algn="l"/>
             <a:r>
-              <a:rPr sz="1700" b="0">
+              <a:rPr sz="1800" b="0">
                 <a:solidFill>
                   <a:srgbClr val="595959"/>
                 </a:solidFill>
               </a:rPr>
-              <a:t>•  问卷证据:6 题现场特征(水色、夜间发光、死鱼贝类、漂浮物、气味、环境背景);</a:t>
-            </a:r>
+              <a:t>•  迁移学习策略:冻结骨干特征层,仅训练分类头,小样本下快速收敛、抑制过拟合;</a:t>
+            </a:r>
+            <a:endParaRPr sz="1800" b="0">
+              <a:solidFill>
+                <a:srgbClr val="595959"/>
+              </a:solidFill>
+            </a:endParaRPr>
           </a:p>
         </p:txBody>
       </p:sp>
@@ -4701,13 +5274,18 @@
           <a:p>
             <a:pPr algn="l"/>
             <a:r>
-              <a:rPr sz="1700" b="0">
+              <a:rPr sz="1800" b="0">
                 <a:solidFill>
                   <a:srgbClr val="595959"/>
                 </a:solidFill>
               </a:rPr>
-              <a:t>•  每个选项对假设集{夜光藻型/有毒甲藻型/硅藻型/绿潮/无赤潮}显式声明似然权重,可审计;</a:t>
-            </a:r>
+              <a:t>•  输入 224×224 RGB;数据增强:随机裁剪、水平翻转;</a:t>
+            </a:r>
+            <a:endParaRPr sz="1800" b="0">
+              <a:solidFill>
+                <a:srgbClr val="595959"/>
+              </a:solidFill>
+            </a:endParaRPr>
           </a:p>
         </p:txBody>
       </p:sp>
@@ -4735,13 +5313,18 @@
           <a:p>
             <a:pPr algn="l"/>
             <a:r>
-              <a:rPr sz="1700" b="0">
+              <a:rPr sz="1800" b="0">
                 <a:solidFill>
                   <a:srgbClr val="595959"/>
                 </a:solidFill>
               </a:rPr>
-              <a:t>•  融合:后验 ∝ 先验 × 图像似然^w × Π问卷似然,输出最可能致灾类群+风险等级+处置建议;</a:t>
-            </a:r>
+              <a:t>•  训练框架:MindSpore(昇思),PYNATIVE 模式 CPU 训练,30 epochs,Adam 优化;</a:t>
+            </a:r>
+            <a:endParaRPr sz="1800" b="0">
+              <a:solidFill>
+                <a:srgbClr val="595959"/>
+              </a:solidFill>
+            </a:endParaRPr>
           </a:p>
         </p:txBody>
       </p:sp>
@@ -4769,50 +5352,45 @@
           <a:p>
             <a:pPr algn="l"/>
             <a:r>
-              <a:rPr sz="1700" b="0">
+              <a:rPr sz="1800" b="0">
                 <a:solidFill>
                   <a:srgbClr val="595959"/>
                 </a:solidFill>
               </a:rPr>
-              <a:t>•  四级预警:预警指数=置信度×类群风险权重×100,分红/橙/黄/蓝四级,每级对应明确响应措施,阈值与权重可审计;</a:t>
-            </a:r>
-          </a:p>
-        </p:txBody>
-      </p:sp>
-      <p:sp>
-        <p:nvSpPr>
-          <p:cNvPr id="9" name="TextBox 8"/>
-          <p:cNvSpPr txBox="1"/>
+              <a:t>•  按验证集准确率自动保存最佳权重 best.ckpt。</a:t>
+            </a:r>
+            <a:endParaRPr sz="1800" b="0">
+              <a:solidFill>
+                <a:srgbClr val="595959"/>
+              </a:solidFill>
+            </a:endParaRPr>
+          </a:p>
+        </p:txBody>
+      </p:sp>
+      <p:pic>
+        <p:nvPicPr>
+          <p:cNvPr id="9" name="Picture 8" descr="chart_acc_curve.png"/>
+          <p:cNvPicPr>
+            <a:picLocks noChangeAspect="1"/>
+          </p:cNvPicPr>
           <p:nvPr/>
-        </p:nvSpPr>
-        <p:spPr>
-          <a:xfrm>
-            <a:off x="640080" y="4480560"/>
-            <a:ext cx="10881360" cy="749808"/>
-          </a:xfrm>
-          <a:prstGeom prst="rect">
-            <a:avLst/>
-          </a:prstGeom>
-          <a:noFill/>
-        </p:spPr>
-        <p:txBody>
-          <a:bodyPr wrap="square" anchor="t">
-            <a:spAutoFit/>
-          </a:bodyPr>
-          <a:lstStyle/>
-          <a:p>
-            <a:pPr algn="l"/>
-            <a:r>
-              <a:rPr sz="1700" b="0">
-                <a:solidFill>
-                  <a:srgbClr val="595959"/>
-                </a:solidFill>
-              </a:rPr>
-              <a:t>•  设计动机:真实赤潮监测本就综合水色与现场征象,融合比单图更稳、更可解释。</a:t>
-            </a:r>
-          </a:p>
-        </p:txBody>
-      </p:sp>
+        </p:nvPicPr>
+        <p:blipFill>
+          <a:blip r:embed="rId1"/>
+          <a:stretch>
+            <a:fillRect/>
+          </a:stretch>
+        </p:blipFill>
+        <p:spPr>
+          <a:xfrm>
+            <a:off x="3108960" y="3931920"/>
+            <a:ext cx="6035040" cy="3084576"/>
+          </a:xfrm>
+          <a:prstGeom prst="rect">
+            <a:avLst/>
+          </a:prstGeom>
+        </p:spPr>
+      </p:pic>
     </p:spTree>
   </p:cSld>
   <p:clrMapOvr>
@@ -4821,8 +5399,8 @@
 </p:sld>
 </file>
 
-<file path=ppt/slides/slide6.xml><?xml version="1.0" encoding="utf-8"?>
-<p:sld xmlns:a="http://schemas.openxmlformats.org/drawingml/2006/main" xmlns:p="http://schemas.openxmlformats.org/presentationml/2006/main" xmlns:r="http://schemas.openxmlformats.org/officeDocument/2006/relationships">
+<file path=ppt/slides/slide5.xml><?xml version="1.0" encoding="utf-8"?>
+<p:sld xmlns:a="http://schemas.openxmlformats.org/drawingml/2006/main" xmlns:r="http://schemas.openxmlformats.org/officeDocument/2006/relationships" xmlns:p="http://schemas.openxmlformats.org/presentationml/2006/main">
   <p:cSld>
     <p:spTree>
       <p:nvGrpSpPr>
@@ -4903,59 +5481,94 @@
                   <a:srgbClr val="FFFFFF"/>
                 </a:solidFill>
               </a:rPr>
-              <a:t>五、实验结果(显微分支):验证集准确率 95.4%</a:t>
-            </a:r>
-          </a:p>
-        </p:txBody>
-      </p:sp>
-      <p:pic>
-        <p:nvPicPr>
-          <p:cNvPr id="4" name="Picture 3" descr="chart_perclass.png"/>
-          <p:cNvPicPr>
-            <a:picLocks noChangeAspect="1"/>
-          </p:cNvPicPr>
+              <a:t>四、分支一(宏观):水色CV × 现场问卷 贝叶斯融合</a:t>
+            </a:r>
+            <a:endParaRPr sz="3000" b="1">
+              <a:solidFill>
+                <a:srgbClr val="FFFFFF"/>
+              </a:solidFill>
+            </a:endParaRPr>
+          </a:p>
+        </p:txBody>
+      </p:sp>
+      <p:sp>
+        <p:nvSpPr>
+          <p:cNvPr id="4" name="TextBox 3"/>
+          <p:cNvSpPr txBox="1"/>
           <p:nvPr/>
-        </p:nvPicPr>
-        <p:blipFill>
-          <a:blip r:embed="rId2"/>
-          <a:stretch>
-            <a:fillRect/>
-          </a:stretch>
-        </p:blipFill>
-        <p:spPr>
-          <a:xfrm>
-            <a:off x="548640" y="1463040"/>
-            <a:ext cx="5486400" cy="2804160"/>
-          </a:xfrm>
-          <a:prstGeom prst="rect">
-            <a:avLst/>
-          </a:prstGeom>
-        </p:spPr>
-      </p:pic>
-      <p:pic>
-        <p:nvPicPr>
-          <p:cNvPr id="5" name="Picture 4" descr="chart_acc_curve.png"/>
-          <p:cNvPicPr>
-            <a:picLocks noChangeAspect="1"/>
-          </p:cNvPicPr>
+        </p:nvSpPr>
+        <p:spPr>
+          <a:xfrm>
+            <a:off x="640080" y="1645920"/>
+            <a:ext cx="10881360" cy="749808"/>
+          </a:xfrm>
+          <a:prstGeom prst="rect">
+            <a:avLst/>
+          </a:prstGeom>
+          <a:noFill/>
+        </p:spPr>
+        <p:txBody>
+          <a:bodyPr wrap="square" anchor="t">
+            <a:spAutoFit/>
+          </a:bodyPr>
+          <a:lstStyle/>
+          <a:p>
+            <a:pPr algn="l"/>
+            <a:r>
+              <a:rPr sz="1700" b="0">
+                <a:solidFill>
+                  <a:srgbClr val="595959"/>
+                </a:solidFill>
+              </a:rPr>
+              <a:t>•  图像证据:经典CV对海面照做水华色块检测(粉/褐/绿/泡沫占比),无需训练、不受宏观标注数据稀缺限制;</a:t>
+            </a:r>
+            <a:endParaRPr sz="1700" b="0">
+              <a:solidFill>
+                <a:srgbClr val="595959"/>
+              </a:solidFill>
+            </a:endParaRPr>
+          </a:p>
+        </p:txBody>
+      </p:sp>
+      <p:sp>
+        <p:nvSpPr>
+          <p:cNvPr id="5" name="TextBox 4"/>
+          <p:cNvSpPr txBox="1"/>
           <p:nvPr/>
-        </p:nvPicPr>
-        <p:blipFill>
-          <a:blip r:embed="rId3"/>
-          <a:stretch>
-            <a:fillRect/>
-          </a:stretch>
-        </p:blipFill>
-        <p:spPr>
-          <a:xfrm>
-            <a:off x="6309360" y="1463040"/>
-            <a:ext cx="5486400" cy="2804160"/>
-          </a:xfrm>
-          <a:prstGeom prst="rect">
-            <a:avLst/>
-          </a:prstGeom>
-        </p:spPr>
-      </p:pic>
+        </p:nvSpPr>
+        <p:spPr>
+          <a:xfrm>
+            <a:off x="640080" y="2212848"/>
+            <a:ext cx="10881360" cy="749808"/>
+          </a:xfrm>
+          <a:prstGeom prst="rect">
+            <a:avLst/>
+          </a:prstGeom>
+          <a:noFill/>
+        </p:spPr>
+        <p:txBody>
+          <a:bodyPr wrap="square" anchor="t">
+            <a:spAutoFit/>
+          </a:bodyPr>
+          <a:lstStyle/>
+          <a:p>
+            <a:pPr algn="l"/>
+            <a:r>
+              <a:rPr sz="1700" b="0">
+                <a:solidFill>
+                  <a:srgbClr val="595959"/>
+                </a:solidFill>
+              </a:rPr>
+              <a:t>•  问卷证据:6 题现场特征(水色、夜间发光、死鱼贝类、漂浮物、气味、环境背景);</a:t>
+            </a:r>
+            <a:endParaRPr sz="1700" b="0">
+              <a:solidFill>
+                <a:srgbClr val="595959"/>
+              </a:solidFill>
+            </a:endParaRPr>
+          </a:p>
+        </p:txBody>
+      </p:sp>
       <p:sp>
         <p:nvSpPr>
           <p:cNvPr id="6" name="TextBox 5"/>
@@ -4964,8 +5577,8 @@
         </p:nvSpPr>
         <p:spPr>
           <a:xfrm>
-            <a:off x="548640" y="5120640"/>
-            <a:ext cx="11155680" cy="1280160"/>
+            <a:off x="640080" y="2779776"/>
+            <a:ext cx="10881360" cy="749808"/>
           </a:xfrm>
           <a:prstGeom prst="rect">
             <a:avLst/>
@@ -4980,13 +5593,135 @@
           <a:p>
             <a:pPr algn="l"/>
             <a:r>
-              <a:rPr sz="1800" b="1">
-                <a:solidFill>
-                  <a:srgbClr val="1F3B63"/>
-                </a:solidFill>
-              </a:rPr>
-              <a:t>总体验证准确率 95.39%(145/152),全部类别均超过 80% 验收线;最佳单轮验证准确率 95.4%。</a:t>
-            </a:r>
+              <a:rPr sz="1700" b="0">
+                <a:solidFill>
+                  <a:srgbClr val="595959"/>
+                </a:solidFill>
+              </a:rPr>
+              <a:t>•  每个选项对假设集{夜光藻型/有毒甲藻型/硅藻型/绿潮/无赤潮}显式声明似然权重,可审计;</a:t>
+            </a:r>
+            <a:endParaRPr sz="1700" b="0">
+              <a:solidFill>
+                <a:srgbClr val="595959"/>
+              </a:solidFill>
+            </a:endParaRPr>
+          </a:p>
+        </p:txBody>
+      </p:sp>
+      <p:sp>
+        <p:nvSpPr>
+          <p:cNvPr id="7" name="TextBox 6"/>
+          <p:cNvSpPr txBox="1"/>
+          <p:nvPr/>
+        </p:nvSpPr>
+        <p:spPr>
+          <a:xfrm>
+            <a:off x="640080" y="3346704"/>
+            <a:ext cx="10881360" cy="749808"/>
+          </a:xfrm>
+          <a:prstGeom prst="rect">
+            <a:avLst/>
+          </a:prstGeom>
+          <a:noFill/>
+        </p:spPr>
+        <p:txBody>
+          <a:bodyPr wrap="square" anchor="t">
+            <a:spAutoFit/>
+          </a:bodyPr>
+          <a:lstStyle/>
+          <a:p>
+            <a:pPr algn="l"/>
+            <a:r>
+              <a:rPr sz="1700" b="0">
+                <a:solidFill>
+                  <a:srgbClr val="595959"/>
+                </a:solidFill>
+              </a:rPr>
+              <a:t>•  融合:后验 ∝ 先验 × 图像似然^w × Π问卷似然,输出最可能致灾类群+风险等级+处置建议;</a:t>
+            </a:r>
+            <a:endParaRPr sz="1700" b="0">
+              <a:solidFill>
+                <a:srgbClr val="595959"/>
+              </a:solidFill>
+            </a:endParaRPr>
+          </a:p>
+        </p:txBody>
+      </p:sp>
+      <p:sp>
+        <p:nvSpPr>
+          <p:cNvPr id="8" name="TextBox 7"/>
+          <p:cNvSpPr txBox="1"/>
+          <p:nvPr/>
+        </p:nvSpPr>
+        <p:spPr>
+          <a:xfrm>
+            <a:off x="640080" y="3913632"/>
+            <a:ext cx="10881360" cy="749808"/>
+          </a:xfrm>
+          <a:prstGeom prst="rect">
+            <a:avLst/>
+          </a:prstGeom>
+          <a:noFill/>
+        </p:spPr>
+        <p:txBody>
+          <a:bodyPr wrap="square" anchor="t">
+            <a:spAutoFit/>
+          </a:bodyPr>
+          <a:lstStyle/>
+          <a:p>
+            <a:pPr algn="l"/>
+            <a:r>
+              <a:rPr sz="1700" b="0">
+                <a:solidFill>
+                  <a:srgbClr val="595959"/>
+                </a:solidFill>
+              </a:rPr>
+              <a:t>•  四级预警:预警指数=置信度×类群风险权重×100,分红/橙/黄/蓝四级,每级对应明确响应措施,阈值与权重可审计;</a:t>
+            </a:r>
+            <a:endParaRPr sz="1700" b="0">
+              <a:solidFill>
+                <a:srgbClr val="595959"/>
+              </a:solidFill>
+            </a:endParaRPr>
+          </a:p>
+        </p:txBody>
+      </p:sp>
+      <p:sp>
+        <p:nvSpPr>
+          <p:cNvPr id="9" name="TextBox 8"/>
+          <p:cNvSpPr txBox="1"/>
+          <p:nvPr/>
+        </p:nvSpPr>
+        <p:spPr>
+          <a:xfrm>
+            <a:off x="640080" y="4480560"/>
+            <a:ext cx="10881360" cy="749808"/>
+          </a:xfrm>
+          <a:prstGeom prst="rect">
+            <a:avLst/>
+          </a:prstGeom>
+          <a:noFill/>
+        </p:spPr>
+        <p:txBody>
+          <a:bodyPr wrap="square" anchor="t">
+            <a:spAutoFit/>
+          </a:bodyPr>
+          <a:lstStyle/>
+          <a:p>
+            <a:pPr algn="l"/>
+            <a:r>
+              <a:rPr sz="1700" b="0">
+                <a:solidFill>
+                  <a:srgbClr val="595959"/>
+                </a:solidFill>
+              </a:rPr>
+              <a:t>•  设计动机:真实赤潮监测本就综合水色与现场征象,融合比单图更稳、更可解释。</a:t>
+            </a:r>
+            <a:endParaRPr sz="1700" b="0">
+              <a:solidFill>
+                <a:srgbClr val="595959"/>
+              </a:solidFill>
+            </a:endParaRPr>
           </a:p>
         </p:txBody>
       </p:sp>
@@ -4998,8 +5733,8 @@
 </p:sld>
 </file>
 
-<file path=ppt/slides/slide7.xml><?xml version="1.0" encoding="utf-8"?>
-<p:sld xmlns:a="http://schemas.openxmlformats.org/drawingml/2006/main" xmlns:p="http://schemas.openxmlformats.org/presentationml/2006/main" xmlns:r="http://schemas.openxmlformats.org/officeDocument/2006/relationships">
+<file path=ppt/slides/slide6.xml><?xml version="1.0" encoding="utf-8"?>
+<p:sld xmlns:a="http://schemas.openxmlformats.org/drawingml/2006/main" xmlns:r="http://schemas.openxmlformats.org/officeDocument/2006/relationships" xmlns:p="http://schemas.openxmlformats.org/presentationml/2006/main">
   <p:cSld>
     <p:spTree>
       <p:nvGrpSpPr>
@@ -5080,14 +5815,43 @@
                   <a:srgbClr val="FFFFFF"/>
                 </a:solidFill>
               </a:rPr>
-              <a:t>六、逐类判别能力分析(混淆矩阵)</a:t>
-            </a:r>
+              <a:t>五、实验结果(显微分支):验证集准确率 95.4%</a:t>
+            </a:r>
+            <a:endParaRPr sz="3000" b="1">
+              <a:solidFill>
+                <a:srgbClr val="FFFFFF"/>
+              </a:solidFill>
+            </a:endParaRPr>
           </a:p>
         </p:txBody>
       </p:sp>
       <p:pic>
         <p:nvPicPr>
-          <p:cNvPr id="4" name="Picture 3" descr="chart_confusion.png"/>
+          <p:cNvPr id="4" name="Picture 3" descr="chart_perclass.png"/>
+          <p:cNvPicPr>
+            <a:picLocks noChangeAspect="1"/>
+          </p:cNvPicPr>
+          <p:nvPr/>
+        </p:nvPicPr>
+        <p:blipFill>
+          <a:blip r:embed="rId1"/>
+          <a:stretch>
+            <a:fillRect/>
+          </a:stretch>
+        </p:blipFill>
+        <p:spPr>
+          <a:xfrm>
+            <a:off x="548640" y="1463040"/>
+            <a:ext cx="5486400" cy="2804160"/>
+          </a:xfrm>
+          <a:prstGeom prst="rect">
+            <a:avLst/>
+          </a:prstGeom>
+        </p:spPr>
+      </p:pic>
+      <p:pic>
+        <p:nvPicPr>
+          <p:cNvPr id="5" name="Picture 4" descr="chart_acc_curve.png"/>
           <p:cNvPicPr>
             <a:picLocks noChangeAspect="1"/>
           </p:cNvPicPr>
@@ -5101,8 +5865,8 @@
         </p:blipFill>
         <p:spPr>
           <a:xfrm>
-            <a:off x="3657600" y="1371600"/>
-            <a:ext cx="5760720" cy="4937760"/>
+            <a:off x="6309360" y="1463040"/>
+            <a:ext cx="5486400" cy="2804160"/>
           </a:xfrm>
           <a:prstGeom prst="rect">
             <a:avLst/>
@@ -5111,14 +5875,14 @@
       </p:pic>
       <p:sp>
         <p:nvSpPr>
-          <p:cNvPr id="5" name="TextBox 4"/>
+          <p:cNvPr id="6" name="TextBox 5"/>
           <p:cNvSpPr txBox="1"/>
           <p:nvPr/>
         </p:nvSpPr>
         <p:spPr>
           <a:xfrm>
-            <a:off x="457200" y="6309360"/>
-            <a:ext cx="11247120" cy="457200"/>
+            <a:off x="548640" y="5120640"/>
+            <a:ext cx="11155680" cy="1280160"/>
           </a:xfrm>
           <a:prstGeom prst="rect">
             <a:avLst/>
@@ -5133,13 +5897,18 @@
           <a:p>
             <a:pPr algn="l"/>
             <a:r>
-              <a:rPr sz="1500" b="0">
-                <a:solidFill>
-                  <a:srgbClr val="595959"/>
-                </a:solidFill>
-              </a:rPr>
-              <a:t>对角线占绝对主导,类间混淆极少;夜光藻与骨条藻的少量误判源于低清/遮挡样本。</a:t>
-            </a:r>
+              <a:rPr sz="1800" b="1">
+                <a:solidFill>
+                  <a:srgbClr val="1F3B63"/>
+                </a:solidFill>
+              </a:rPr>
+              <a:t>总体验证准确率 95.39%(145/152),全部类别均超过 80% 验收线;最佳单轮验证准确率 95.4%。</a:t>
+            </a:r>
+            <a:endParaRPr sz="1800" b="1">
+              <a:solidFill>
+                <a:srgbClr val="1F3B63"/>
+              </a:solidFill>
+            </a:endParaRPr>
           </a:p>
         </p:txBody>
       </p:sp>
@@ -5151,8 +5920,8 @@
 </p:sld>
 </file>
 
-<file path=ppt/slides/slide8.xml><?xml version="1.0" encoding="utf-8"?>
-<p:sld xmlns:a="http://schemas.openxmlformats.org/drawingml/2006/main" xmlns:p="http://schemas.openxmlformats.org/presentationml/2006/main" xmlns:r="http://schemas.openxmlformats.org/officeDocument/2006/relationships">
+<file path=ppt/slides/slide7.xml><?xml version="1.0" encoding="utf-8"?>
+<p:sld xmlns:a="http://schemas.openxmlformats.org/drawingml/2006/main" xmlns:r="http://schemas.openxmlformats.org/officeDocument/2006/relationships" xmlns:p="http://schemas.openxmlformats.org/presentationml/2006/main">
   <p:cSld>
     <p:spTree>
       <p:nvGrpSpPr>
@@ -5233,29 +6002,34 @@
                   <a:srgbClr val="FFFFFF"/>
                 </a:solidFill>
               </a:rPr>
-              <a:t>七、宏观分支案例:海面照片→融合预警</a:t>
-            </a:r>
+              <a:t>六、逐类判别能力分析(混淆矩阵)</a:t>
+            </a:r>
+            <a:endParaRPr sz="3000" b="1">
+              <a:solidFill>
+                <a:srgbClr val="FFFFFF"/>
+              </a:solidFill>
+            </a:endParaRPr>
           </a:p>
         </p:txBody>
       </p:sp>
       <p:pic>
         <p:nvPicPr>
-          <p:cNvPr id="4" name="Picture 3" descr="noctiluca_0000.jpg"/>
+          <p:cNvPr id="4" name="Picture 3" descr="chart_confusion.png"/>
           <p:cNvPicPr>
             <a:picLocks noChangeAspect="1"/>
           </p:cNvPicPr>
           <p:nvPr/>
         </p:nvPicPr>
         <p:blipFill>
-          <a:blip r:embed="rId2"/>
+          <a:blip r:embed="rId1"/>
           <a:stretch>
             <a:fillRect/>
           </a:stretch>
         </p:blipFill>
         <p:spPr>
           <a:xfrm>
-            <a:off x="548640" y="1463040"/>
-            <a:ext cx="5120640" cy="3840480"/>
+            <a:off x="3657600" y="1371600"/>
+            <a:ext cx="5760720" cy="4937760"/>
           </a:xfrm>
           <a:prstGeom prst="rect">
             <a:avLst/>
@@ -5270,8 +6044,8 @@
         </p:nvSpPr>
         <p:spPr>
           <a:xfrm>
-            <a:off x="6035040" y="1645920"/>
-            <a:ext cx="5669280" cy="749808"/>
+            <a:off x="457200" y="6309360"/>
+            <a:ext cx="11247120" cy="457200"/>
           </a:xfrm>
           <a:prstGeom prst="rect">
             <a:avLst/>
@@ -5286,149 +6060,18 @@
           <a:p>
             <a:pPr algn="l"/>
             <a:r>
-              <a:rPr sz="1600" b="0">
+              <a:rPr sz="1500" b="0">
                 <a:solidFill>
                   <a:srgbClr val="595959"/>
                 </a:solidFill>
               </a:rPr>
-              <a:t>•  输入:一张岸拍海面照片(水华呈粉红色带);</a:t>
-            </a:r>
-          </a:p>
-        </p:txBody>
-      </p:sp>
-      <p:sp>
-        <p:nvSpPr>
-          <p:cNvPr id="6" name="TextBox 5"/>
-          <p:cNvSpPr txBox="1"/>
-          <p:nvPr/>
-        </p:nvSpPr>
-        <p:spPr>
-          <a:xfrm>
-            <a:off x="6035040" y="2212848"/>
-            <a:ext cx="5669280" cy="749808"/>
-          </a:xfrm>
-          <a:prstGeom prst="rect">
-            <a:avLst/>
-          </a:prstGeom>
-          <a:noFill/>
-        </p:spPr>
-        <p:txBody>
-          <a:bodyPr wrap="square" anchor="t">
-            <a:spAutoFit/>
-          </a:bodyPr>
-          <a:lstStyle/>
-          <a:p>
-            <a:pPr algn="l"/>
-            <a:r>
-              <a:rPr sz="1600" b="0">
-                <a:solidFill>
-                  <a:srgbClr val="595959"/>
-                </a:solidFill>
-              </a:rPr>
-              <a:t>•  水色CV:检出粉色块占比约 7% → 判定『粉红/砖红』水华色;</a:t>
-            </a:r>
-          </a:p>
-        </p:txBody>
-      </p:sp>
-      <p:sp>
-        <p:nvSpPr>
-          <p:cNvPr id="7" name="TextBox 6"/>
-          <p:cNvSpPr txBox="1"/>
-          <p:nvPr/>
-        </p:nvSpPr>
-        <p:spPr>
-          <a:xfrm>
-            <a:off x="6035040" y="2779776"/>
-            <a:ext cx="5669280" cy="749808"/>
-          </a:xfrm>
-          <a:prstGeom prst="rect">
-            <a:avLst/>
-          </a:prstGeom>
-          <a:noFill/>
-        </p:spPr>
-        <p:txBody>
-          <a:bodyPr wrap="square" anchor="t">
-            <a:spAutoFit/>
-          </a:bodyPr>
-          <a:lstStyle/>
-          <a:p>
-            <a:pPr algn="l"/>
-            <a:r>
-              <a:rPr sz="1600" b="0">
-                <a:solidFill>
-                  <a:srgbClr val="595959"/>
-                </a:solidFill>
-              </a:rPr>
-              <a:t>•  融合(仅图像证据):夜光藻型 75.7% &gt; 有毒甲藻型 18.9% &gt; 硅藻型 4.7%;</a:t>
-            </a:r>
-          </a:p>
-        </p:txBody>
-      </p:sp>
-      <p:sp>
-        <p:nvSpPr>
-          <p:cNvPr id="8" name="TextBox 7"/>
-          <p:cNvSpPr txBox="1"/>
-          <p:nvPr/>
-        </p:nvSpPr>
-        <p:spPr>
-          <a:xfrm>
-            <a:off x="6035040" y="3346704"/>
-            <a:ext cx="5669280" cy="749808"/>
-          </a:xfrm>
-          <a:prstGeom prst="rect">
-            <a:avLst/>
-          </a:prstGeom>
-          <a:noFill/>
-        </p:spPr>
-        <p:txBody>
-          <a:bodyPr wrap="square" anchor="t">
-            <a:spAutoFit/>
-          </a:bodyPr>
-          <a:lstStyle/>
-          <a:p>
-            <a:pPr algn="l"/>
-            <a:r>
-              <a:rPr sz="1600" b="0">
-                <a:solidFill>
-                  <a:srgbClr val="595959"/>
-                </a:solidFill>
-              </a:rPr>
-              <a:t>•  输出:夜光藻型水华,风险『中—高』→ 预警指数61 = 橙色Ⅱ级预警;响应:48h内复核+暂停该点位贝类采捕送检+每日监测;</a:t>
-            </a:r>
-          </a:p>
-        </p:txBody>
-      </p:sp>
-      <p:sp>
-        <p:nvSpPr>
-          <p:cNvPr id="9" name="TextBox 8"/>
-          <p:cNvSpPr txBox="1"/>
-          <p:nvPr/>
-        </p:nvSpPr>
-        <p:spPr>
-          <a:xfrm>
-            <a:off x="6035040" y="3913632"/>
-            <a:ext cx="5669280" cy="749808"/>
-          </a:xfrm>
-          <a:prstGeom prst="rect">
-            <a:avLst/>
-          </a:prstGeom>
-          <a:noFill/>
-        </p:spPr>
-        <p:txBody>
-          <a:bodyPr wrap="square" anchor="t">
-            <a:spAutoFit/>
-          </a:bodyPr>
-          <a:lstStyle/>
-          <a:p>
-            <a:pPr algn="l"/>
-            <a:r>
-              <a:rPr sz="1600" b="0">
-                <a:solidFill>
-                  <a:srgbClr val="595959"/>
-                </a:solidFill>
-              </a:rPr>
-              <a:t>•  叠加问卷(如夜间发光=是)后置信度进一步提升,体现融合的增益。</a:t>
-            </a:r>
+              <a:t>对角线占绝对主导,类间混淆极少;夜光藻与骨条藻的少量误判源于低清/遮挡样本。</a:t>
+            </a:r>
+            <a:endParaRPr sz="1500" b="0">
+              <a:solidFill>
+                <a:srgbClr val="595959"/>
+              </a:solidFill>
+            </a:endParaRPr>
           </a:p>
         </p:txBody>
       </p:sp>
@@ -5440,8 +6083,8 @@
 </p:sld>
 </file>
 
-<file path=ppt/slides/slide9.xml><?xml version="1.0" encoding="utf-8"?>
-<p:sld xmlns:a="http://schemas.openxmlformats.org/drawingml/2006/main" xmlns:p="http://schemas.openxmlformats.org/presentationml/2006/main" xmlns:r="http://schemas.openxmlformats.org/officeDocument/2006/relationships">
+<file path=ppt/slides/slide8.xml><?xml version="1.0" encoding="utf-8"?>
+<p:sld xmlns:a="http://schemas.openxmlformats.org/drawingml/2006/main" xmlns:r="http://schemas.openxmlformats.org/officeDocument/2006/relationships" xmlns:p="http://schemas.openxmlformats.org/presentationml/2006/main">
   <p:cSld>
     <p:spTree>
       <p:nvGrpSpPr>
@@ -5522,21 +6165,50 @@
                   <a:srgbClr val="FFFFFF"/>
                 </a:solidFill>
               </a:rPr>
-              <a:t>八、系统实现:双分支一体化前端</a:t>
-            </a:r>
-          </a:p>
-        </p:txBody>
-      </p:sp>
-      <p:sp>
-        <p:nvSpPr>
-          <p:cNvPr id="4" name="TextBox 3"/>
+              <a:t>七、宏观分支案例:海面照片→融合预警</a:t>
+            </a:r>
+            <a:endParaRPr sz="3000" b="1">
+              <a:solidFill>
+                <a:srgbClr val="FFFFFF"/>
+              </a:solidFill>
+            </a:endParaRPr>
+          </a:p>
+        </p:txBody>
+      </p:sp>
+      <p:pic>
+        <p:nvPicPr>
+          <p:cNvPr id="4" name="Picture 3" descr="noctiluca_0000.jpg"/>
+          <p:cNvPicPr>
+            <a:picLocks noChangeAspect="1"/>
+          </p:cNvPicPr>
+          <p:nvPr/>
+        </p:nvPicPr>
+        <p:blipFill>
+          <a:blip r:embed="rId1"/>
+          <a:stretch>
+            <a:fillRect/>
+          </a:stretch>
+        </p:blipFill>
+        <p:spPr>
+          <a:xfrm>
+            <a:off x="548640" y="1463040"/>
+            <a:ext cx="5120640" cy="3840480"/>
+          </a:xfrm>
+          <a:prstGeom prst="rect">
+            <a:avLst/>
+          </a:prstGeom>
+        </p:spPr>
+      </p:pic>
+      <p:sp>
+        <p:nvSpPr>
+          <p:cNvPr id="5" name="TextBox 4"/>
           <p:cNvSpPr txBox="1"/>
           <p:nvPr/>
         </p:nvSpPr>
         <p:spPr>
           <a:xfrm>
-            <a:off x="640080" y="1645920"/>
-            <a:ext cx="10881360" cy="777240"/>
+            <a:off x="6035040" y="1645920"/>
+            <a:ext cx="5669280" cy="749808"/>
           </a:xfrm>
           <a:prstGeom prst="rect">
             <a:avLst/>
@@ -5551,26 +6223,31 @@
           <a:p>
             <a:pPr algn="l"/>
             <a:r>
-              <a:rPr sz="1800" b="0">
+              <a:rPr sz="1600" b="0">
                 <a:solidFill>
                   <a:srgbClr val="595959"/>
                 </a:solidFill>
               </a:rPr>
-              <a:t>•  Streamlit 双页签前端:『拍海面查风险(渔民用)』(主,上传海面照+6题问卷+四级预警卡)/『显微照片(化验室人员用)』(次,实验室确认);</a:t>
-            </a:r>
-          </a:p>
-        </p:txBody>
-      </p:sp>
-      <p:sp>
-        <p:nvSpPr>
-          <p:cNvPr id="5" name="TextBox 4"/>
+              <a:t>•  输入:一张岸拍海面照片(水华呈粉红色带);</a:t>
+            </a:r>
+            <a:endParaRPr sz="1600" b="0">
+              <a:solidFill>
+                <a:srgbClr val="595959"/>
+              </a:solidFill>
+            </a:endParaRPr>
+          </a:p>
+        </p:txBody>
+      </p:sp>
+      <p:sp>
+        <p:nvSpPr>
+          <p:cNvPr id="6" name="TextBox 5"/>
           <p:cNvSpPr txBox="1"/>
           <p:nvPr/>
         </p:nvSpPr>
         <p:spPr>
           <a:xfrm>
-            <a:off x="640080" y="2240280"/>
-            <a:ext cx="10881360" cy="777240"/>
+            <a:off x="6035040" y="2212848"/>
+            <a:ext cx="5669280" cy="749808"/>
           </a:xfrm>
           <a:prstGeom prst="rect">
             <a:avLst/>
@@ -5585,26 +6262,31 @@
           <a:p>
             <a:pPr algn="l"/>
             <a:r>
-              <a:rPr sz="1800" b="0">
+              <a:rPr sz="1600" b="0">
                 <a:solidFill>
                   <a:srgbClr val="595959"/>
                 </a:solidFill>
               </a:rPr>
-              <a:t>•  面向渔民重做交互:结论压成三句大白话(什么情况/该干什么/该找谁)+『念给我听』语音播报+『复制上报话术』一键生成上报文本+『附上我的位置』定位;</a:t>
-            </a:r>
-          </a:p>
-        </p:txBody>
-      </p:sp>
-      <p:sp>
-        <p:nvSpPr>
-          <p:cNvPr id="6" name="TextBox 5"/>
+              <a:t>•  水色CV:检出粉色块占比约 7% → 判定『粉红/砖红』水华色;</a:t>
+            </a:r>
+            <a:endParaRPr sz="1600" b="0">
+              <a:solidFill>
+                <a:srgbClr val="595959"/>
+              </a:solidFill>
+            </a:endParaRPr>
+          </a:p>
+        </p:txBody>
+      </p:sp>
+      <p:sp>
+        <p:nvSpPr>
+          <p:cNvPr id="7" name="TextBox 6"/>
           <p:cNvSpPr txBox="1"/>
           <p:nvPr/>
         </p:nvSpPr>
         <p:spPr>
           <a:xfrm>
-            <a:off x="640080" y="2834640"/>
-            <a:ext cx="10881360" cy="777240"/>
+            <a:off x="6035040" y="2779776"/>
+            <a:ext cx="5669280" cy="749808"/>
           </a:xfrm>
           <a:prstGeom prst="rect">
             <a:avLst/>
@@ -5619,26 +6301,31 @@
           <a:p>
             <a:pPr algn="l"/>
             <a:r>
-              <a:rPr sz="1800" b="0">
+              <a:rPr sz="1600" b="0">
                 <a:solidFill>
                   <a:srgbClr val="595959"/>
                 </a:solidFill>
               </a:rPr>
-              <a:t>•  后验概率与似然证据链折叠进『我给专家看的』区,附✅好照片/❌不合适照片示例与本地查询历史;显微识别自动联动《藻种知识库》;</a:t>
-            </a:r>
-          </a:p>
-        </p:txBody>
-      </p:sp>
-      <p:sp>
-        <p:nvSpPr>
-          <p:cNvPr id="7" name="TextBox 6"/>
+              <a:t>•  融合(仅图像证据):夜光藻型 75.7% &gt; 有毒甲藻型 18.9% &gt; 硅藻型 4.7%;</a:t>
+            </a:r>
+            <a:endParaRPr sz="1600" b="0">
+              <a:solidFill>
+                <a:srgbClr val="595959"/>
+              </a:solidFill>
+            </a:endParaRPr>
+          </a:p>
+        </p:txBody>
+      </p:sp>
+      <p:sp>
+        <p:nvSpPr>
+          <p:cNvPr id="8" name="TextBox 7"/>
           <p:cNvSpPr txBox="1"/>
           <p:nvPr/>
         </p:nvSpPr>
         <p:spPr>
           <a:xfrm>
-            <a:off x="640080" y="3429000"/>
-            <a:ext cx="10881360" cy="777240"/>
+            <a:off x="6035040" y="3346704"/>
+            <a:ext cx="5669280" cy="749808"/>
           </a:xfrm>
           <a:prstGeom prst="rect">
             <a:avLst/>
@@ -5653,26 +6340,31 @@
           <a:p>
             <a:pPr algn="l"/>
             <a:r>
-              <a:rPr sz="1800" b="0">
+              <a:rPr sz="1600" b="0">
                 <a:solidFill>
                   <a:srgbClr val="595959"/>
                 </a:solidFill>
               </a:rPr>
-              <a:t>•  低饱和度图像自动提示『疑似显微照』引导切换;页脚附福建省海洋与渔业局官方入口;交互层改动不影响融合算法与预警阈值输出;</a:t>
-            </a:r>
-          </a:p>
-        </p:txBody>
-      </p:sp>
-      <p:sp>
-        <p:nvSpPr>
-          <p:cNvPr id="7" name="TextBox 6"/>
+              <a:t>•  输出:夜光藻型水华,风险『中—高』→ 预警指数61 = 橙色Ⅱ级预警;响应:48h内复核+暂停该点位贝类采捕送检+每日监测;</a:t>
+            </a:r>
+            <a:endParaRPr sz="1600" b="0">
+              <a:solidFill>
+                <a:srgbClr val="595959"/>
+              </a:solidFill>
+            </a:endParaRPr>
+          </a:p>
+        </p:txBody>
+      </p:sp>
+      <p:sp>
+        <p:nvSpPr>
+          <p:cNvPr id="9" name="TextBox 8"/>
           <p:cNvSpPr txBox="1"/>
           <p:nvPr/>
         </p:nvSpPr>
         <p:spPr>
           <a:xfrm>
-            <a:off x="640080" y="4023360"/>
-            <a:ext cx="10881360" cy="777240"/>
+            <a:off x="6035040" y="3913632"/>
+            <a:ext cx="5669280" cy="749808"/>
           </a:xfrm>
           <a:prstGeom prst="rect">
             <a:avLst/>
@@ -5687,13 +6379,18 @@
           <a:p>
             <a:pPr algn="l"/>
             <a:r>
-              <a:rPr sz="1800" b="0">
+              <a:rPr sz="1600" b="0">
                 <a:solidFill>
                   <a:srgbClr val="595959"/>
                 </a:solidFill>
               </a:rPr>
-              <a:t>•  v3 迭代仅改展示与交互层,融合与四级预警输出与 v2 完全一致(已回归验证),结论可信、可复现。</a:t>
-            </a:r>
+              <a:t>•  叠加问卷(如夜间发光=是)后置信度进一步提升,体现融合的增益。</a:t>
+            </a:r>
+            <a:endParaRPr sz="1600" b="0">
+              <a:solidFill>
+                <a:srgbClr val="595959"/>
+              </a:solidFill>
+            </a:endParaRPr>
           </a:p>
         </p:txBody>
       </p:sp>
@@ -5703,6 +6400,2562 @@
     <a:masterClrMapping/>
   </p:clrMapOvr>
 </p:sld>
+</file>
+
+<file path=ppt/slides/slide9.xml><?xml version="1.0" encoding="utf-8"?>
+<p:sld xmlns:a="http://schemas.openxmlformats.org/drawingml/2006/main" xmlns:r="http://schemas.openxmlformats.org/officeDocument/2006/relationships" xmlns:p="http://schemas.openxmlformats.org/presentationml/2006/main">
+  <p:cSld>
+    <p:bg>
+      <p:bgPr>
+        <a:solidFill>
+          <a:srgbClr val="FFFFFF"/>
+        </a:solidFill>
+        <a:effectLst/>
+      </p:bgPr>
+    </p:bg>
+    <p:spTree>
+      <p:nvGrpSpPr>
+        <p:cNvPr id="1" name=""/>
+        <p:cNvGrpSpPr/>
+        <p:nvPr/>
+      </p:nvGrpSpPr>
+      <p:grpSpPr/>
+      <p:sp>
+        <p:nvSpPr>
+          <p:cNvPr id="2" name="矩形 1"/>
+          <p:cNvSpPr/>
+          <p:nvPr/>
+        </p:nvSpPr>
+        <p:spPr>
+          <a:xfrm>
+            <a:off x="608965" y="508000"/>
+            <a:ext cx="330200" cy="38100"/>
+          </a:xfrm>
+          <a:prstGeom prst="rect">
+            <a:avLst/>
+          </a:prstGeom>
+          <a:solidFill>
+            <a:srgbClr val="C8102E"/>
+          </a:solidFill>
+          <a:ln w="9525" cap="flat" cmpd="sng" algn="ctr">
+            <a:noFill/>
+            <a:prstDash val="solid"/>
+          </a:ln>
+          <a:effectLst/>
+          <a:extLst>
+            <a:ext uri="{91240B29-F687-4F45-9708-019B960494DF}">
+              <a14:hiddenLine xmlns:a14="http://schemas.microsoft.com/office/drawing/2010/main" w="9525" cap="flat" cmpd="sng" algn="ctr">
+                <a:solidFill>
+                  <a:schemeClr val="accent1">
+                    <a:shade val="95000"/>
+                    <a:satMod val="105000"/>
+                  </a:schemeClr>
+                </a:solidFill>
+                <a:prstDash val="solid"/>
+              </a14:hiddenLine>
+            </a:ext>
+            <a:ext uri="{AF507438-7753-43E0-B8FC-AC1667EBCBE1}">
+              <a14:hiddenEffects xmlns:a14="http://schemas.microsoft.com/office/drawing/2010/main">
+                <a:effectLst>
+                  <a:outerShdw blurRad="40000" dist="23000" dir="5400000" rotWithShape="0">
+                    <a:srgbClr val="000000">
+                      <a:alpha val="35000"/>
+                    </a:srgbClr>
+                  </a:outerShdw>
+                </a:effectLst>
+              </a14:hiddenEffects>
+            </a:ext>
+          </a:extLst>
+        </p:spPr>
+        <p:style>
+          <a:lnRef idx="1">
+            <a:schemeClr val="accent1"/>
+          </a:lnRef>
+          <a:fillRef idx="3">
+            <a:schemeClr val="accent1"/>
+          </a:fillRef>
+          <a:effectRef idx="2">
+            <a:schemeClr val="accent1"/>
+          </a:effectRef>
+          <a:fontRef idx="minor">
+            <a:schemeClr val="lt1"/>
+          </a:fontRef>
+        </p:style>
+        <p:txBody>
+          <a:bodyPr/>
+          <a:p>
+            <a:endParaRPr lang="zh-CN" altLang="en-US"/>
+          </a:p>
+        </p:txBody>
+      </p:sp>
+      <p:sp>
+        <p:nvSpPr>
+          <p:cNvPr id="3" name="Kicker"/>
+          <p:cNvSpPr txBox="1"/>
+          <p:nvPr/>
+        </p:nvSpPr>
+        <p:spPr>
+          <a:xfrm>
+            <a:off x="608965" y="635000"/>
+            <a:ext cx="8127365" cy="203200"/>
+          </a:xfrm>
+          <a:prstGeom prst="rect">
+            <a:avLst/>
+          </a:prstGeom>
+          <a:noFill/>
+        </p:spPr>
+        <p:txBody>
+          <a:bodyPr wrap="square" lIns="0" tIns="0" rIns="0" bIns="0" rtlCol="0" anchor="t">
+            <a:noAutofit/>
+          </a:bodyPr>
+          <a:p>
+            <a:pPr algn="l">
+              <a:lnSpc>
+                <a:spcPct val="108000"/>
+              </a:lnSpc>
+            </a:pPr>
+            <a:r>
+              <a:rPr lang="zh-CN" altLang="en-US" sz="1260">
+                <a:solidFill>
+                  <a:srgbClr val="6B7280"/>
+                </a:solidFill>
+                <a:latin typeface="微软雅黑" panose="020B0503020204020204" charset="-122"/>
+                <a:ea typeface="微软雅黑" panose="020B0503020204020204" charset="-122"/>
+                <a:cs typeface="微软雅黑" panose="020B0503020204020204" charset="-122"/>
+              </a:rPr>
+              <a:t>数据扩充</a:t>
+            </a:r>
+            <a:r>
+              <a:rPr lang="en-US" altLang="zh-CN" sz="1260">
+                <a:solidFill>
+                  <a:srgbClr val="6B7280"/>
+                </a:solidFill>
+                <a:latin typeface="微软雅黑" panose="020B0503020204020204" charset="-122"/>
+                <a:ea typeface="微软雅黑" panose="020B0503020204020204" charset="-122"/>
+                <a:cs typeface="微软雅黑" panose="020B0503020204020204" charset="-122"/>
+              </a:rPr>
+              <a:t> </a:t>
+            </a:r>
+            <a:r>
+              <a:rPr lang="zh-CN" altLang="en-US" sz="1260">
+                <a:solidFill>
+                  <a:srgbClr val="6B7280"/>
+                </a:solidFill>
+                <a:latin typeface="微软雅黑" panose="020B0503020204020204" charset="-122"/>
+                <a:ea typeface="微软雅黑" panose="020B0503020204020204" charset="-122"/>
+                <a:cs typeface="微软雅黑" panose="020B0503020204020204" charset="-122"/>
+              </a:rPr>
+              <a:t>×</a:t>
+            </a:r>
+            <a:r>
+              <a:rPr lang="en-US" altLang="zh-CN" sz="1260">
+                <a:solidFill>
+                  <a:srgbClr val="6B7280"/>
+                </a:solidFill>
+                <a:latin typeface="微软雅黑" panose="020B0503020204020204" charset="-122"/>
+                <a:ea typeface="微软雅黑" panose="020B0503020204020204" charset="-122"/>
+                <a:cs typeface="微软雅黑" panose="020B0503020204020204" charset="-122"/>
+              </a:rPr>
+              <a:t> </a:t>
+            </a:r>
+            <a:r>
+              <a:rPr lang="zh-CN" altLang="en-US" sz="1260">
+                <a:solidFill>
+                  <a:srgbClr val="6B7280"/>
+                </a:solidFill>
+                <a:latin typeface="微软雅黑" panose="020B0503020204020204" charset="-122"/>
+                <a:ea typeface="微软雅黑" panose="020B0503020204020204" charset="-122"/>
+                <a:cs typeface="微软雅黑" panose="020B0503020204020204" charset="-122"/>
+              </a:rPr>
+              <a:t>弱监督</a:t>
+            </a:r>
+            <a:endParaRPr lang="zh-CN" altLang="en-US" sz="1260">
+              <a:solidFill>
+                <a:srgbClr val="6B7280"/>
+              </a:solidFill>
+              <a:latin typeface="微软雅黑" panose="020B0503020204020204" charset="-122"/>
+              <a:ea typeface="微软雅黑" panose="020B0503020204020204" charset="-122"/>
+              <a:cs typeface="微软雅黑" panose="020B0503020204020204" charset="-122"/>
+            </a:endParaRPr>
+          </a:p>
+        </p:txBody>
+      </p:sp>
+      <p:sp>
+        <p:nvSpPr>
+          <p:cNvPr id="4" name="PageNumber"/>
+          <p:cNvSpPr txBox="1"/>
+          <p:nvPr/>
+        </p:nvSpPr>
+        <p:spPr>
+          <a:xfrm>
+            <a:off x="10057765" y="635000"/>
+            <a:ext cx="1523365" cy="203200"/>
+          </a:xfrm>
+          <a:prstGeom prst="rect">
+            <a:avLst/>
+          </a:prstGeom>
+          <a:noFill/>
+        </p:spPr>
+        <p:txBody>
+          <a:bodyPr wrap="square" lIns="0" tIns="0" rIns="0" bIns="0" rtlCol="0" anchor="t">
+            <a:noAutofit/>
+          </a:bodyPr>
+          <a:p>
+            <a:pPr algn="r">
+              <a:lnSpc>
+                <a:spcPct val="108000"/>
+              </a:lnSpc>
+            </a:pPr>
+            <a:r>
+              <a:rPr lang="en-US" altLang="en-US" sz="1195">
+                <a:solidFill>
+                  <a:srgbClr val="6B7280"/>
+                </a:solidFill>
+                <a:latin typeface="微软雅黑" panose="020B0503020204020204" charset="-122"/>
+                <a:ea typeface="微软雅黑" panose="020B0503020204020204" charset="-122"/>
+              </a:rPr>
+              <a:t>09 / 12</a:t>
+            </a:r>
+            <a:endParaRPr lang="en-US" altLang="en-US" sz="1195">
+              <a:solidFill>
+                <a:srgbClr val="6B7280"/>
+              </a:solidFill>
+              <a:latin typeface="微软雅黑" panose="020B0503020204020204" charset="-122"/>
+              <a:ea typeface="微软雅黑" panose="020B0503020204020204" charset="-122"/>
+            </a:endParaRPr>
+          </a:p>
+        </p:txBody>
+      </p:sp>
+      <p:sp>
+        <p:nvSpPr>
+          <p:cNvPr id="5" name="Title"/>
+          <p:cNvSpPr txBox="1"/>
+          <p:nvPr/>
+        </p:nvSpPr>
+        <p:spPr>
+          <a:xfrm>
+            <a:off x="608965" y="889000"/>
+            <a:ext cx="10972165" cy="508000"/>
+          </a:xfrm>
+          <a:prstGeom prst="rect">
+            <a:avLst/>
+          </a:prstGeom>
+          <a:noFill/>
+        </p:spPr>
+        <p:txBody>
+          <a:bodyPr wrap="square" lIns="0" tIns="0" rIns="0" bIns="0" rtlCol="0" anchor="ctr">
+            <a:noAutofit/>
+          </a:bodyPr>
+          <a:p>
+            <a:pPr algn="l">
+              <a:lnSpc>
+                <a:spcPct val="108000"/>
+              </a:lnSpc>
+            </a:pPr>
+            <a:r>
+              <a:rPr lang="zh-CN" altLang="en-US" sz="2300" b="1">
+                <a:solidFill>
+                  <a:srgbClr val="0F3D75"/>
+                </a:solidFill>
+                <a:latin typeface="微软雅黑" panose="020B0503020204020204" charset="-122"/>
+                <a:ea typeface="微软雅黑" panose="020B0503020204020204" charset="-122"/>
+                <a:cs typeface="微软雅黑" panose="020B0503020204020204" charset="-122"/>
+              </a:rPr>
+              <a:t>宏观分支升级</a:t>
+            </a:r>
+            <a:r>
+              <a:rPr lang="en-US" altLang="zh-CN" sz="2300" b="1">
+                <a:solidFill>
+                  <a:srgbClr val="0F3D75"/>
+                </a:solidFill>
+                <a:latin typeface="微软雅黑" panose="020B0503020204020204" charset="-122"/>
+                <a:ea typeface="微软雅黑" panose="020B0503020204020204" charset="-122"/>
+                <a:cs typeface="微软雅黑" panose="020B0503020204020204" charset="-122"/>
+              </a:rPr>
+              <a:t>:3065 </a:t>
+            </a:r>
+            <a:r>
+              <a:rPr lang="zh-CN" altLang="en-US" sz="2300" b="1">
+                <a:solidFill>
+                  <a:srgbClr val="0F3D75"/>
+                </a:solidFill>
+                <a:latin typeface="微软雅黑" panose="020B0503020204020204" charset="-122"/>
+                <a:ea typeface="微软雅黑" panose="020B0503020204020204" charset="-122"/>
+                <a:cs typeface="微软雅黑" panose="020B0503020204020204" charset="-122"/>
+              </a:rPr>
+              <a:t>张伪标签自训练</a:t>
+            </a:r>
+            <a:r>
+              <a:rPr lang="en-US" altLang="zh-CN" sz="2300" b="1">
+                <a:solidFill>
+                  <a:srgbClr val="0F3D75"/>
+                </a:solidFill>
+                <a:latin typeface="微软雅黑" panose="020B0503020204020204" charset="-122"/>
+                <a:ea typeface="微软雅黑" panose="020B0503020204020204" charset="-122"/>
+                <a:cs typeface="微软雅黑" panose="020B0503020204020204" charset="-122"/>
+              </a:rPr>
+              <a:t> CNN,</a:t>
+            </a:r>
+            <a:r>
+              <a:rPr lang="zh-CN" altLang="en-US" sz="2300" b="1">
+                <a:solidFill>
+                  <a:srgbClr val="0F3D75"/>
+                </a:solidFill>
+                <a:latin typeface="微软雅黑" panose="020B0503020204020204" charset="-122"/>
+                <a:ea typeface="微软雅黑" panose="020B0503020204020204" charset="-122"/>
+                <a:cs typeface="微软雅黑" panose="020B0503020204020204" charset="-122"/>
+              </a:rPr>
+              <a:t>与规则流互补</a:t>
+            </a:r>
+            <a:endParaRPr lang="zh-CN" altLang="en-US" sz="2300" b="1">
+              <a:solidFill>
+                <a:srgbClr val="0F3D75"/>
+              </a:solidFill>
+              <a:latin typeface="微软雅黑" panose="020B0503020204020204" charset="-122"/>
+              <a:ea typeface="微软雅黑" panose="020B0503020204020204" charset="-122"/>
+              <a:cs typeface="微软雅黑" panose="020B0503020204020204" charset="-122"/>
+            </a:endParaRPr>
+          </a:p>
+        </p:txBody>
+      </p:sp>
+      <p:cxnSp>
+        <p:nvCxnSpPr>
+          <p:cNvPr id="6" name="直接连接符 5"/>
+          <p:cNvCxnSpPr/>
+          <p:nvPr/>
+        </p:nvCxnSpPr>
+        <p:spPr>
+          <a:xfrm>
+            <a:off x="608965" y="1498600"/>
+            <a:ext cx="10972165" cy="635"/>
+          </a:xfrm>
+          <a:prstGeom prst="line">
+            <a:avLst/>
+          </a:prstGeom>
+          <a:ln w="9525">
+            <a:solidFill>
+              <a:srgbClr val="D9DEE7"/>
+            </a:solidFill>
+          </a:ln>
+        </p:spPr>
+        <p:style>
+          <a:lnRef idx="2">
+            <a:schemeClr val="accent1"/>
+          </a:lnRef>
+          <a:fillRef idx="0">
+            <a:schemeClr val="accent1"/>
+          </a:fillRef>
+          <a:effectRef idx="1">
+            <a:schemeClr val="accent1"/>
+          </a:effectRef>
+          <a:fontRef idx="minor">
+            <a:schemeClr val="tx1"/>
+          </a:fontRef>
+        </p:style>
+      </p:cxnSp>
+      <p:cxnSp>
+        <p:nvCxnSpPr>
+          <p:cNvPr id="7" name="直接连接符 6"/>
+          <p:cNvCxnSpPr/>
+          <p:nvPr/>
+        </p:nvCxnSpPr>
+        <p:spPr>
+          <a:xfrm>
+            <a:off x="608965" y="2303145"/>
+            <a:ext cx="2475865" cy="635"/>
+          </a:xfrm>
+          <a:prstGeom prst="line">
+            <a:avLst/>
+          </a:prstGeom>
+          <a:ln w="19049">
+            <a:solidFill>
+              <a:srgbClr val="0F3D75"/>
+            </a:solidFill>
+          </a:ln>
+        </p:spPr>
+        <p:style>
+          <a:lnRef idx="2">
+            <a:schemeClr val="accent1"/>
+          </a:lnRef>
+          <a:fillRef idx="0">
+            <a:schemeClr val="accent1"/>
+          </a:fillRef>
+          <a:effectRef idx="1">
+            <a:schemeClr val="accent1"/>
+          </a:effectRef>
+          <a:fontRef idx="minor">
+            <a:schemeClr val="tx1"/>
+          </a:fontRef>
+        </p:style>
+      </p:cxnSp>
+      <p:sp>
+        <p:nvSpPr>
+          <p:cNvPr id="8" name="文本框 7"/>
+          <p:cNvSpPr txBox="1"/>
+          <p:nvPr/>
+        </p:nvSpPr>
+        <p:spPr>
+          <a:xfrm>
+            <a:off x="608965" y="2442845"/>
+            <a:ext cx="2475865" cy="228600"/>
+          </a:xfrm>
+          <a:prstGeom prst="rect">
+            <a:avLst/>
+          </a:prstGeom>
+          <a:noFill/>
+        </p:spPr>
+        <p:txBody>
+          <a:bodyPr wrap="square" lIns="0" tIns="0" rIns="0" bIns="0" rtlCol="0" anchor="t">
+            <a:noAutofit/>
+          </a:bodyPr>
+          <a:p>
+            <a:pPr algn="l">
+              <a:lnSpc>
+                <a:spcPct val="108000"/>
+              </a:lnSpc>
+            </a:pPr>
+            <a:r>
+              <a:rPr lang="zh-CN" altLang="en-US" sz="1380">
+                <a:solidFill>
+                  <a:srgbClr val="6B7280"/>
+                </a:solidFill>
+                <a:latin typeface="微软雅黑" panose="020B0503020204020204" charset="-122"/>
+                <a:ea typeface="微软雅黑" panose="020B0503020204020204" charset="-122"/>
+                <a:cs typeface="微软雅黑" panose="020B0503020204020204" charset="-122"/>
+              </a:rPr>
+              <a:t>宏观海面图</a:t>
+            </a:r>
+            <a:r>
+              <a:rPr lang="en-US" altLang="zh-CN" sz="1380">
+                <a:solidFill>
+                  <a:srgbClr val="6B7280"/>
+                </a:solidFill>
+                <a:latin typeface="微软雅黑" panose="020B0503020204020204" charset="-122"/>
+                <a:ea typeface="微软雅黑" panose="020B0503020204020204" charset="-122"/>
+                <a:cs typeface="微软雅黑" panose="020B0503020204020204" charset="-122"/>
+              </a:rPr>
+              <a:t>(</a:t>
+            </a:r>
+            <a:r>
+              <a:rPr lang="zh-CN" altLang="en-US" sz="1380">
+                <a:solidFill>
+                  <a:srgbClr val="6B7280"/>
+                </a:solidFill>
+                <a:latin typeface="微软雅黑" panose="020B0503020204020204" charset="-122"/>
+                <a:ea typeface="微软雅黑" panose="020B0503020204020204" charset="-122"/>
+                <a:cs typeface="微软雅黑" panose="020B0503020204020204" charset="-122"/>
+              </a:rPr>
+              <a:t>伪标签训练集</a:t>
+            </a:r>
+            <a:r>
+              <a:rPr lang="en-US" altLang="zh-CN" sz="1380">
+                <a:solidFill>
+                  <a:srgbClr val="6B7280"/>
+                </a:solidFill>
+                <a:latin typeface="微软雅黑" panose="020B0503020204020204" charset="-122"/>
+                <a:ea typeface="微软雅黑" panose="020B0503020204020204" charset="-122"/>
+                <a:cs typeface="微软雅黑" panose="020B0503020204020204" charset="-122"/>
+              </a:rPr>
+              <a:t> 2760+</a:t>
+            </a:r>
+            <a:r>
+              <a:rPr lang="zh-CN" altLang="en-US" sz="1380">
+                <a:solidFill>
+                  <a:srgbClr val="6B7280"/>
+                </a:solidFill>
+                <a:latin typeface="微软雅黑" panose="020B0503020204020204" charset="-122"/>
+                <a:ea typeface="微软雅黑" panose="020B0503020204020204" charset="-122"/>
+                <a:cs typeface="微软雅黑" panose="020B0503020204020204" charset="-122"/>
+              </a:rPr>
+              <a:t>监控</a:t>
+            </a:r>
+            <a:r>
+              <a:rPr lang="en-US" altLang="zh-CN" sz="1380">
+                <a:solidFill>
+                  <a:srgbClr val="6B7280"/>
+                </a:solidFill>
+                <a:latin typeface="微软雅黑" panose="020B0503020204020204" charset="-122"/>
+                <a:ea typeface="微软雅黑" panose="020B0503020204020204" charset="-122"/>
+                <a:cs typeface="微软雅黑" panose="020B0503020204020204" charset="-122"/>
+              </a:rPr>
+              <a:t> 305)</a:t>
+            </a:r>
+            <a:endParaRPr lang="en-US" altLang="zh-CN" sz="1380">
+              <a:solidFill>
+                <a:srgbClr val="6B7280"/>
+              </a:solidFill>
+              <a:latin typeface="微软雅黑" panose="020B0503020204020204" charset="-122"/>
+              <a:ea typeface="微软雅黑" panose="020B0503020204020204" charset="-122"/>
+              <a:cs typeface="微软雅黑" panose="020B0503020204020204" charset="-122"/>
+            </a:endParaRPr>
+          </a:p>
+        </p:txBody>
+      </p:sp>
+      <p:sp>
+        <p:nvSpPr>
+          <p:cNvPr id="9" name="文本框 8"/>
+          <p:cNvSpPr txBox="1"/>
+          <p:nvPr/>
+        </p:nvSpPr>
+        <p:spPr>
+          <a:xfrm>
+            <a:off x="608965" y="2760345"/>
+            <a:ext cx="2475865" cy="838200"/>
+          </a:xfrm>
+          <a:prstGeom prst="rect">
+            <a:avLst/>
+          </a:prstGeom>
+          <a:noFill/>
+        </p:spPr>
+        <p:txBody>
+          <a:bodyPr wrap="square" lIns="0" tIns="0" rIns="0" bIns="0" rtlCol="0" anchor="ctr">
+            <a:noAutofit/>
+          </a:bodyPr>
+          <a:p>
+            <a:pPr algn="l">
+              <a:lnSpc>
+                <a:spcPct val="108000"/>
+              </a:lnSpc>
+            </a:pPr>
+            <a:r>
+              <a:rPr lang="en-US" altLang="en-US" sz="4200" b="1">
+                <a:solidFill>
+                  <a:srgbClr val="0F3D75"/>
+                </a:solidFill>
+                <a:latin typeface="微软雅黑" panose="020B0503020204020204" charset="-122"/>
+                <a:ea typeface="微软雅黑" panose="020B0503020204020204" charset="-122"/>
+              </a:rPr>
+              <a:t>3065</a:t>
+            </a:r>
+            <a:endParaRPr lang="en-US" altLang="en-US" sz="4200" b="1">
+              <a:solidFill>
+                <a:srgbClr val="0F3D75"/>
+              </a:solidFill>
+              <a:latin typeface="微软雅黑" panose="020B0503020204020204" charset="-122"/>
+              <a:ea typeface="微软雅黑" panose="020B0503020204020204" charset="-122"/>
+            </a:endParaRPr>
+          </a:p>
+        </p:txBody>
+      </p:sp>
+      <p:cxnSp>
+        <p:nvCxnSpPr>
+          <p:cNvPr id="10" name="直接连接符 9"/>
+          <p:cNvCxnSpPr/>
+          <p:nvPr/>
+        </p:nvCxnSpPr>
+        <p:spPr>
+          <a:xfrm>
+            <a:off x="3441065" y="2303145"/>
+            <a:ext cx="2475865" cy="635"/>
+          </a:xfrm>
+          <a:prstGeom prst="line">
+            <a:avLst/>
+          </a:prstGeom>
+          <a:ln w="19049">
+            <a:solidFill>
+              <a:srgbClr val="C8102E"/>
+            </a:solidFill>
+          </a:ln>
+        </p:spPr>
+        <p:style>
+          <a:lnRef idx="2">
+            <a:schemeClr val="accent1"/>
+          </a:lnRef>
+          <a:fillRef idx="0">
+            <a:schemeClr val="accent1"/>
+          </a:fillRef>
+          <a:effectRef idx="1">
+            <a:schemeClr val="accent1"/>
+          </a:effectRef>
+          <a:fontRef idx="minor">
+            <a:schemeClr val="tx1"/>
+          </a:fontRef>
+        </p:style>
+      </p:cxnSp>
+      <p:sp>
+        <p:nvSpPr>
+          <p:cNvPr id="11" name="文本框 10"/>
+          <p:cNvSpPr txBox="1"/>
+          <p:nvPr/>
+        </p:nvSpPr>
+        <p:spPr>
+          <a:xfrm>
+            <a:off x="3441065" y="2442845"/>
+            <a:ext cx="2475865" cy="228600"/>
+          </a:xfrm>
+          <a:prstGeom prst="rect">
+            <a:avLst/>
+          </a:prstGeom>
+          <a:noFill/>
+        </p:spPr>
+        <p:txBody>
+          <a:bodyPr wrap="square" lIns="0" tIns="0" rIns="0" bIns="0" rtlCol="0" anchor="t">
+            <a:noAutofit/>
+          </a:bodyPr>
+          <a:p>
+            <a:pPr algn="l">
+              <a:lnSpc>
+                <a:spcPct val="108000"/>
+              </a:lnSpc>
+            </a:pPr>
+            <a:r>
+              <a:rPr lang="en-US" altLang="en-US" sz="1380">
+                <a:solidFill>
+                  <a:srgbClr val="6B7280"/>
+                </a:solidFill>
+                <a:latin typeface="微软雅黑" panose="020B0503020204020204" charset="-122"/>
+                <a:ea typeface="微软雅黑" panose="020B0503020204020204" charset="-122"/>
+                <a:cs typeface="微软雅黑" panose="020B0503020204020204" charset="-122"/>
+              </a:rPr>
+              <a:t>25 </a:t>
+            </a:r>
+            <a:r>
+              <a:rPr lang="zh-CN" altLang="en-US" sz="1380">
+                <a:solidFill>
+                  <a:srgbClr val="6B7280"/>
+                </a:solidFill>
+                <a:latin typeface="微软雅黑" panose="020B0503020204020204" charset="-122"/>
+                <a:ea typeface="微软雅黑" panose="020B0503020204020204" charset="-122"/>
+                <a:cs typeface="微软雅黑" panose="020B0503020204020204" charset="-122"/>
+              </a:rPr>
+              <a:t>张人工真实验证</a:t>
+            </a:r>
+            <a:r>
+              <a:rPr lang="en-US" altLang="zh-CN" sz="1380">
+                <a:solidFill>
+                  <a:srgbClr val="6B7280"/>
+                </a:solidFill>
+                <a:latin typeface="微软雅黑" panose="020B0503020204020204" charset="-122"/>
+                <a:ea typeface="微软雅黑" panose="020B0503020204020204" charset="-122"/>
+                <a:cs typeface="微软雅黑" panose="020B0503020204020204" charset="-122"/>
+              </a:rPr>
+              <a:t>(5</a:t>
+            </a:r>
+            <a:r>
+              <a:rPr lang="zh-CN" altLang="en-US" sz="1380">
+                <a:solidFill>
+                  <a:srgbClr val="6B7280"/>
+                </a:solidFill>
+                <a:latin typeface="微软雅黑" panose="020B0503020204020204" charset="-122"/>
+                <a:ea typeface="微软雅黑" panose="020B0503020204020204" charset="-122"/>
+                <a:cs typeface="微软雅黑" panose="020B0503020204020204" charset="-122"/>
+              </a:rPr>
+              <a:t>类</a:t>
+            </a:r>
+            <a:r>
+              <a:rPr lang="en-US" altLang="zh-CN" sz="1380">
+                <a:solidFill>
+                  <a:srgbClr val="6B7280"/>
+                </a:solidFill>
+                <a:latin typeface="微软雅黑" panose="020B0503020204020204" charset="-122"/>
+                <a:ea typeface="微软雅黑" panose="020B0503020204020204" charset="-122"/>
+                <a:cs typeface="微软雅黑" panose="020B0503020204020204" charset="-122"/>
+              </a:rPr>
+              <a:t>→3</a:t>
+            </a:r>
+            <a:r>
+              <a:rPr lang="zh-CN" altLang="en-US" sz="1380">
+                <a:solidFill>
+                  <a:srgbClr val="6B7280"/>
+                </a:solidFill>
+                <a:latin typeface="微软雅黑" panose="020B0503020204020204" charset="-122"/>
+                <a:ea typeface="微软雅黑" panose="020B0503020204020204" charset="-122"/>
+                <a:cs typeface="微软雅黑" panose="020B0503020204020204" charset="-122"/>
+              </a:rPr>
+              <a:t>类口径</a:t>
+            </a:r>
+            <a:r>
+              <a:rPr lang="en-US" altLang="zh-CN" sz="1380">
+                <a:solidFill>
+                  <a:srgbClr val="6B7280"/>
+                </a:solidFill>
+                <a:latin typeface="微软雅黑" panose="020B0503020204020204" charset="-122"/>
+                <a:ea typeface="微软雅黑" panose="020B0503020204020204" charset="-122"/>
+                <a:cs typeface="微软雅黑" panose="020B0503020204020204" charset="-122"/>
+              </a:rPr>
+              <a:t>)</a:t>
+            </a:r>
+            <a:endParaRPr lang="en-US" altLang="zh-CN" sz="1380">
+              <a:solidFill>
+                <a:srgbClr val="6B7280"/>
+              </a:solidFill>
+              <a:latin typeface="微软雅黑" panose="020B0503020204020204" charset="-122"/>
+              <a:ea typeface="微软雅黑" panose="020B0503020204020204" charset="-122"/>
+              <a:cs typeface="微软雅黑" panose="020B0503020204020204" charset="-122"/>
+            </a:endParaRPr>
+          </a:p>
+        </p:txBody>
+      </p:sp>
+      <p:sp>
+        <p:nvSpPr>
+          <p:cNvPr id="12" name="文本框 11"/>
+          <p:cNvSpPr txBox="1"/>
+          <p:nvPr/>
+        </p:nvSpPr>
+        <p:spPr>
+          <a:xfrm>
+            <a:off x="3441065" y="2760345"/>
+            <a:ext cx="2475865" cy="838200"/>
+          </a:xfrm>
+          <a:prstGeom prst="rect">
+            <a:avLst/>
+          </a:prstGeom>
+          <a:noFill/>
+        </p:spPr>
+        <p:txBody>
+          <a:bodyPr wrap="square" lIns="0" tIns="0" rIns="0" bIns="0" rtlCol="0" anchor="ctr">
+            <a:noAutofit/>
+          </a:bodyPr>
+          <a:p>
+            <a:pPr algn="l">
+              <a:lnSpc>
+                <a:spcPct val="108000"/>
+              </a:lnSpc>
+            </a:pPr>
+            <a:r>
+              <a:rPr lang="en-US" altLang="en-US" sz="4200" b="1">
+                <a:solidFill>
+                  <a:srgbClr val="C8102E"/>
+                </a:solidFill>
+                <a:latin typeface="微软雅黑" panose="020B0503020204020204" charset="-122"/>
+                <a:ea typeface="微软雅黑" panose="020B0503020204020204" charset="-122"/>
+              </a:rPr>
+              <a:t>80.0%</a:t>
+            </a:r>
+            <a:endParaRPr lang="en-US" altLang="en-US" sz="4200" b="1">
+              <a:solidFill>
+                <a:srgbClr val="C8102E"/>
+              </a:solidFill>
+              <a:latin typeface="微软雅黑" panose="020B0503020204020204" charset="-122"/>
+              <a:ea typeface="微软雅黑" panose="020B0503020204020204" charset="-122"/>
+            </a:endParaRPr>
+          </a:p>
+        </p:txBody>
+      </p:sp>
+      <p:cxnSp>
+        <p:nvCxnSpPr>
+          <p:cNvPr id="13" name="直接连接符 12"/>
+          <p:cNvCxnSpPr/>
+          <p:nvPr/>
+        </p:nvCxnSpPr>
+        <p:spPr>
+          <a:xfrm>
+            <a:off x="6273165" y="2303145"/>
+            <a:ext cx="2475865" cy="635"/>
+          </a:xfrm>
+          <a:prstGeom prst="line">
+            <a:avLst/>
+          </a:prstGeom>
+          <a:ln w="19049">
+            <a:solidFill>
+              <a:srgbClr val="0F3D75"/>
+            </a:solidFill>
+          </a:ln>
+        </p:spPr>
+        <p:style>
+          <a:lnRef idx="2">
+            <a:schemeClr val="accent1"/>
+          </a:lnRef>
+          <a:fillRef idx="0">
+            <a:schemeClr val="accent1"/>
+          </a:fillRef>
+          <a:effectRef idx="1">
+            <a:schemeClr val="accent1"/>
+          </a:effectRef>
+          <a:fontRef idx="minor">
+            <a:schemeClr val="tx1"/>
+          </a:fontRef>
+        </p:style>
+      </p:cxnSp>
+      <p:sp>
+        <p:nvSpPr>
+          <p:cNvPr id="14" name="文本框 13"/>
+          <p:cNvSpPr txBox="1"/>
+          <p:nvPr/>
+        </p:nvSpPr>
+        <p:spPr>
+          <a:xfrm>
+            <a:off x="6273165" y="2442845"/>
+            <a:ext cx="2475865" cy="228600"/>
+          </a:xfrm>
+          <a:prstGeom prst="rect">
+            <a:avLst/>
+          </a:prstGeom>
+          <a:noFill/>
+        </p:spPr>
+        <p:txBody>
+          <a:bodyPr wrap="square" lIns="0" tIns="0" rIns="0" bIns="0" rtlCol="0" anchor="t">
+            <a:noAutofit/>
+          </a:bodyPr>
+          <a:p>
+            <a:pPr algn="l">
+              <a:lnSpc>
+                <a:spcPct val="108000"/>
+              </a:lnSpc>
+            </a:pPr>
+            <a:r>
+              <a:rPr lang="zh-CN" altLang="en-US" sz="1380">
+                <a:solidFill>
+                  <a:srgbClr val="6B7280"/>
+                </a:solidFill>
+                <a:latin typeface="微软雅黑" panose="020B0503020204020204" charset="-122"/>
+                <a:ea typeface="微软雅黑" panose="020B0503020204020204" charset="-122"/>
+                <a:cs typeface="微软雅黑" panose="020B0503020204020204" charset="-122"/>
+              </a:rPr>
+              <a:t>伪标签监控集准确率</a:t>
+            </a:r>
+            <a:r>
+              <a:rPr lang="en-US" altLang="zh-CN" sz="1380">
+                <a:solidFill>
+                  <a:srgbClr val="6B7280"/>
+                </a:solidFill>
+                <a:latin typeface="微软雅黑" panose="020B0503020204020204" charset="-122"/>
+                <a:ea typeface="微软雅黑" panose="020B0503020204020204" charset="-122"/>
+                <a:cs typeface="微软雅黑" panose="020B0503020204020204" charset="-122"/>
+              </a:rPr>
+              <a:t>(</a:t>
+            </a:r>
+            <a:r>
+              <a:rPr lang="zh-CN" altLang="en-US" sz="1380">
+                <a:solidFill>
+                  <a:srgbClr val="6B7280"/>
+                </a:solidFill>
+                <a:latin typeface="微软雅黑" panose="020B0503020204020204" charset="-122"/>
+                <a:ea typeface="微软雅黑" panose="020B0503020204020204" charset="-122"/>
+                <a:cs typeface="微软雅黑" panose="020B0503020204020204" charset="-122"/>
+              </a:rPr>
+              <a:t>选优依据</a:t>
+            </a:r>
+            <a:r>
+              <a:rPr lang="en-US" altLang="zh-CN" sz="1380">
+                <a:solidFill>
+                  <a:srgbClr val="6B7280"/>
+                </a:solidFill>
+                <a:latin typeface="微软雅黑" panose="020B0503020204020204" charset="-122"/>
+                <a:ea typeface="微软雅黑" panose="020B0503020204020204" charset="-122"/>
+                <a:cs typeface="微软雅黑" panose="020B0503020204020204" charset="-122"/>
+              </a:rPr>
+              <a:t>)</a:t>
+            </a:r>
+            <a:endParaRPr lang="en-US" altLang="zh-CN" sz="1380">
+              <a:solidFill>
+                <a:srgbClr val="6B7280"/>
+              </a:solidFill>
+              <a:latin typeface="微软雅黑" panose="020B0503020204020204" charset="-122"/>
+              <a:ea typeface="微软雅黑" panose="020B0503020204020204" charset="-122"/>
+              <a:cs typeface="微软雅黑" panose="020B0503020204020204" charset="-122"/>
+            </a:endParaRPr>
+          </a:p>
+        </p:txBody>
+      </p:sp>
+      <p:sp>
+        <p:nvSpPr>
+          <p:cNvPr id="15" name="文本框 14"/>
+          <p:cNvSpPr txBox="1"/>
+          <p:nvPr/>
+        </p:nvSpPr>
+        <p:spPr>
+          <a:xfrm>
+            <a:off x="6273165" y="2760345"/>
+            <a:ext cx="2475865" cy="838200"/>
+          </a:xfrm>
+          <a:prstGeom prst="rect">
+            <a:avLst/>
+          </a:prstGeom>
+          <a:noFill/>
+        </p:spPr>
+        <p:txBody>
+          <a:bodyPr wrap="square" lIns="0" tIns="0" rIns="0" bIns="0" rtlCol="0" anchor="ctr">
+            <a:noAutofit/>
+          </a:bodyPr>
+          <a:p>
+            <a:pPr algn="l">
+              <a:lnSpc>
+                <a:spcPct val="108000"/>
+              </a:lnSpc>
+            </a:pPr>
+            <a:r>
+              <a:rPr lang="en-US" altLang="en-US" sz="4200" b="1">
+                <a:solidFill>
+                  <a:srgbClr val="0F3D75"/>
+                </a:solidFill>
+                <a:latin typeface="微软雅黑" panose="020B0503020204020204" charset="-122"/>
+                <a:ea typeface="微软雅黑" panose="020B0503020204020204" charset="-122"/>
+              </a:rPr>
+              <a:t>75.4%</a:t>
+            </a:r>
+            <a:endParaRPr lang="en-US" altLang="en-US" sz="4200" b="1">
+              <a:solidFill>
+                <a:srgbClr val="0F3D75"/>
+              </a:solidFill>
+              <a:latin typeface="微软雅黑" panose="020B0503020204020204" charset="-122"/>
+              <a:ea typeface="微软雅黑" panose="020B0503020204020204" charset="-122"/>
+            </a:endParaRPr>
+          </a:p>
+        </p:txBody>
+      </p:sp>
+      <p:cxnSp>
+        <p:nvCxnSpPr>
+          <p:cNvPr id="16" name="直接连接符 15"/>
+          <p:cNvCxnSpPr/>
+          <p:nvPr/>
+        </p:nvCxnSpPr>
+        <p:spPr>
+          <a:xfrm>
+            <a:off x="9105265" y="2303145"/>
+            <a:ext cx="2475865" cy="635"/>
+          </a:xfrm>
+          <a:prstGeom prst="line">
+            <a:avLst/>
+          </a:prstGeom>
+          <a:ln w="19049">
+            <a:solidFill>
+              <a:srgbClr val="C8102E"/>
+            </a:solidFill>
+          </a:ln>
+        </p:spPr>
+        <p:style>
+          <a:lnRef idx="2">
+            <a:schemeClr val="accent1"/>
+          </a:lnRef>
+          <a:fillRef idx="0">
+            <a:schemeClr val="accent1"/>
+          </a:fillRef>
+          <a:effectRef idx="1">
+            <a:schemeClr val="accent1"/>
+          </a:effectRef>
+          <a:fontRef idx="minor">
+            <a:schemeClr val="tx1"/>
+          </a:fontRef>
+        </p:style>
+      </p:cxnSp>
+      <p:sp>
+        <p:nvSpPr>
+          <p:cNvPr id="17" name="文本框 16"/>
+          <p:cNvSpPr txBox="1"/>
+          <p:nvPr/>
+        </p:nvSpPr>
+        <p:spPr>
+          <a:xfrm>
+            <a:off x="9105265" y="2442845"/>
+            <a:ext cx="2475865" cy="228600"/>
+          </a:xfrm>
+          <a:prstGeom prst="rect">
+            <a:avLst/>
+          </a:prstGeom>
+          <a:noFill/>
+        </p:spPr>
+        <p:txBody>
+          <a:bodyPr wrap="square" lIns="0" tIns="0" rIns="0" bIns="0" rtlCol="0" anchor="t">
+            <a:noAutofit/>
+          </a:bodyPr>
+          <a:p>
+            <a:pPr algn="l">
+              <a:lnSpc>
+                <a:spcPct val="108000"/>
+              </a:lnSpc>
+            </a:pPr>
+            <a:r>
+              <a:rPr lang="zh-CN" altLang="en-US" sz="1380">
+                <a:solidFill>
+                  <a:srgbClr val="6B7280"/>
+                </a:solidFill>
+                <a:latin typeface="微软雅黑" panose="020B0503020204020204" charset="-122"/>
+                <a:ea typeface="微软雅黑" panose="020B0503020204020204" charset="-122"/>
+                <a:cs typeface="微软雅黑" panose="020B0503020204020204" charset="-122"/>
+              </a:rPr>
+              <a:t>同期规则流基线</a:t>
+            </a:r>
+            <a:r>
+              <a:rPr lang="en-US" altLang="zh-CN" sz="1380">
+                <a:solidFill>
+                  <a:srgbClr val="6B7280"/>
+                </a:solidFill>
+                <a:latin typeface="微软雅黑" panose="020B0503020204020204" charset="-122"/>
+                <a:ea typeface="微软雅黑" panose="020B0503020204020204" charset="-122"/>
+                <a:cs typeface="微软雅黑" panose="020B0503020204020204" charset="-122"/>
+              </a:rPr>
+              <a:t>(</a:t>
+            </a:r>
+            <a:r>
+              <a:rPr lang="zh-CN" altLang="en-US" sz="1380">
+                <a:solidFill>
+                  <a:srgbClr val="6B7280"/>
+                </a:solidFill>
+                <a:latin typeface="微软雅黑" panose="020B0503020204020204" charset="-122"/>
+                <a:ea typeface="微软雅黑" panose="020B0503020204020204" charset="-122"/>
+                <a:cs typeface="微软雅黑" panose="020B0503020204020204" charset="-122"/>
+              </a:rPr>
+              <a:t>对照</a:t>
+            </a:r>
+            <a:r>
+              <a:rPr lang="en-US" altLang="zh-CN" sz="1380">
+                <a:solidFill>
+                  <a:srgbClr val="6B7280"/>
+                </a:solidFill>
+                <a:latin typeface="微软雅黑" panose="020B0503020204020204" charset="-122"/>
+                <a:ea typeface="微软雅黑" panose="020B0503020204020204" charset="-122"/>
+                <a:cs typeface="微软雅黑" panose="020B0503020204020204" charset="-122"/>
+              </a:rPr>
+              <a:t>)</a:t>
+            </a:r>
+            <a:endParaRPr lang="en-US" altLang="zh-CN" sz="1380">
+              <a:solidFill>
+                <a:srgbClr val="6B7280"/>
+              </a:solidFill>
+              <a:latin typeface="微软雅黑" panose="020B0503020204020204" charset="-122"/>
+              <a:ea typeface="微软雅黑" panose="020B0503020204020204" charset="-122"/>
+              <a:cs typeface="微软雅黑" panose="020B0503020204020204" charset="-122"/>
+            </a:endParaRPr>
+          </a:p>
+        </p:txBody>
+      </p:sp>
+      <p:sp>
+        <p:nvSpPr>
+          <p:cNvPr id="18" name="文本框 17"/>
+          <p:cNvSpPr txBox="1"/>
+          <p:nvPr/>
+        </p:nvSpPr>
+        <p:spPr>
+          <a:xfrm>
+            <a:off x="9105265" y="2760345"/>
+            <a:ext cx="2475865" cy="838200"/>
+          </a:xfrm>
+          <a:prstGeom prst="rect">
+            <a:avLst/>
+          </a:prstGeom>
+          <a:noFill/>
+        </p:spPr>
+        <p:txBody>
+          <a:bodyPr wrap="square" lIns="0" tIns="0" rIns="0" bIns="0" rtlCol="0" anchor="ctr">
+            <a:noAutofit/>
+          </a:bodyPr>
+          <a:p>
+            <a:pPr algn="l">
+              <a:lnSpc>
+                <a:spcPct val="108000"/>
+              </a:lnSpc>
+            </a:pPr>
+            <a:r>
+              <a:rPr lang="en-US" altLang="en-US" sz="4200" b="1">
+                <a:solidFill>
+                  <a:srgbClr val="C8102E"/>
+                </a:solidFill>
+                <a:latin typeface="微软雅黑" panose="020B0503020204020204" charset="-122"/>
+                <a:ea typeface="微软雅黑" panose="020B0503020204020204" charset="-122"/>
+              </a:rPr>
+              <a:t>92.0%</a:t>
+            </a:r>
+            <a:endParaRPr lang="en-US" altLang="en-US" sz="4200" b="1">
+              <a:solidFill>
+                <a:srgbClr val="C8102E"/>
+              </a:solidFill>
+              <a:latin typeface="微软雅黑" panose="020B0503020204020204" charset="-122"/>
+              <a:ea typeface="微软雅黑" panose="020B0503020204020204" charset="-122"/>
+            </a:endParaRPr>
+          </a:p>
+        </p:txBody>
+      </p:sp>
+      <p:sp>
+        <p:nvSpPr>
+          <p:cNvPr id="19" name="矩形 18"/>
+          <p:cNvSpPr/>
+          <p:nvPr/>
+        </p:nvSpPr>
+        <p:spPr>
+          <a:xfrm>
+            <a:off x="608965" y="4322445"/>
+            <a:ext cx="76200" cy="76200"/>
+          </a:xfrm>
+          <a:prstGeom prst="rect">
+            <a:avLst/>
+          </a:prstGeom>
+          <a:solidFill>
+            <a:srgbClr val="C8102E"/>
+          </a:solidFill>
+          <a:ln w="9525" cap="flat" cmpd="sng" algn="ctr">
+            <a:noFill/>
+            <a:prstDash val="solid"/>
+          </a:ln>
+          <a:effectLst/>
+          <a:extLst>
+            <a:ext uri="{91240B29-F687-4F45-9708-019B960494DF}">
+              <a14:hiddenLine xmlns:a14="http://schemas.microsoft.com/office/drawing/2010/main" w="9525" cap="flat" cmpd="sng" algn="ctr">
+                <a:solidFill>
+                  <a:schemeClr val="accent1">
+                    <a:shade val="95000"/>
+                    <a:satMod val="105000"/>
+                  </a:schemeClr>
+                </a:solidFill>
+                <a:prstDash val="solid"/>
+              </a14:hiddenLine>
+            </a:ext>
+            <a:ext uri="{AF507438-7753-43E0-B8FC-AC1667EBCBE1}">
+              <a14:hiddenEffects xmlns:a14="http://schemas.microsoft.com/office/drawing/2010/main">
+                <a:effectLst>
+                  <a:outerShdw blurRad="40000" dist="23000" dir="5400000" rotWithShape="0">
+                    <a:srgbClr val="000000">
+                      <a:alpha val="35000"/>
+                    </a:srgbClr>
+                  </a:outerShdw>
+                </a:effectLst>
+              </a14:hiddenEffects>
+            </a:ext>
+          </a:extLst>
+        </p:spPr>
+        <p:style>
+          <a:lnRef idx="1">
+            <a:schemeClr val="accent1"/>
+          </a:lnRef>
+          <a:fillRef idx="3">
+            <a:schemeClr val="accent1"/>
+          </a:fillRef>
+          <a:effectRef idx="2">
+            <a:schemeClr val="accent1"/>
+          </a:effectRef>
+          <a:fontRef idx="minor">
+            <a:schemeClr val="lt1"/>
+          </a:fontRef>
+        </p:style>
+        <p:txBody>
+          <a:bodyPr/>
+          <a:p>
+            <a:endParaRPr lang="zh-CN" altLang="en-US"/>
+          </a:p>
+        </p:txBody>
+      </p:sp>
+      <p:sp>
+        <p:nvSpPr>
+          <p:cNvPr id="20" name="文本框 19"/>
+          <p:cNvSpPr txBox="1"/>
+          <p:nvPr/>
+        </p:nvSpPr>
+        <p:spPr>
+          <a:xfrm>
+            <a:off x="837565" y="4208145"/>
+            <a:ext cx="10743565" cy="381000"/>
+          </a:xfrm>
+          <a:prstGeom prst="rect">
+            <a:avLst/>
+          </a:prstGeom>
+          <a:noFill/>
+        </p:spPr>
+        <p:txBody>
+          <a:bodyPr wrap="square" lIns="0" tIns="0" rIns="0" bIns="0" rtlCol="0" anchor="t">
+            <a:noAutofit/>
+          </a:bodyPr>
+          <a:p>
+            <a:pPr algn="l">
+              <a:lnSpc>
+                <a:spcPct val="108000"/>
+              </a:lnSpc>
+            </a:pPr>
+            <a:r>
+              <a:rPr lang="zh-CN" altLang="en-US" sz="1740">
+                <a:solidFill>
+                  <a:srgbClr val="1A2233"/>
+                </a:solidFill>
+                <a:latin typeface="微软雅黑" panose="020B0503020204020204" charset="-122"/>
+                <a:ea typeface="微软雅黑" panose="020B0503020204020204" charset="-122"/>
+                <a:cs typeface="微软雅黑" panose="020B0503020204020204" charset="-122"/>
+              </a:rPr>
+              <a:t>搜索引擎公开海面图</a:t>
+            </a:r>
+            <a:r>
+              <a:rPr lang="en-US" altLang="zh-CN" sz="1740">
+                <a:solidFill>
+                  <a:srgbClr val="1A2233"/>
+                </a:solidFill>
+                <a:latin typeface="微软雅黑" panose="020B0503020204020204" charset="-122"/>
+                <a:ea typeface="微软雅黑" panose="020B0503020204020204" charset="-122"/>
+                <a:cs typeface="微软雅黑" panose="020B0503020204020204" charset="-122"/>
+              </a:rPr>
+              <a:t>→</a:t>
+            </a:r>
+            <a:r>
+              <a:rPr lang="zh-CN" altLang="en-US" sz="1740">
+                <a:solidFill>
+                  <a:srgbClr val="1A2233"/>
+                </a:solidFill>
+                <a:latin typeface="微软雅黑" panose="020B0503020204020204" charset="-122"/>
+                <a:ea typeface="微软雅黑" panose="020B0503020204020204" charset="-122"/>
+                <a:cs typeface="微软雅黑" panose="020B0503020204020204" charset="-122"/>
+              </a:rPr>
+              <a:t>可审计规则流</a:t>
+            </a:r>
+            <a:r>
+              <a:rPr lang="en-US" altLang="zh-CN" sz="1740">
+                <a:solidFill>
+                  <a:srgbClr val="1A2233"/>
+                </a:solidFill>
+                <a:latin typeface="微软雅黑" panose="020B0503020204020204" charset="-122"/>
+                <a:ea typeface="微软雅黑" panose="020B0503020204020204" charset="-122"/>
+                <a:cs typeface="微软雅黑" panose="020B0503020204020204" charset="-122"/>
+              </a:rPr>
+              <a:t>(</a:t>
+            </a:r>
+            <a:r>
+              <a:rPr lang="zh-CN" altLang="en-US" sz="1740">
+                <a:solidFill>
+                  <a:srgbClr val="1A2233"/>
+                </a:solidFill>
+                <a:latin typeface="微软雅黑" panose="020B0503020204020204" charset="-122"/>
+                <a:ea typeface="微软雅黑" panose="020B0503020204020204" charset="-122"/>
+                <a:cs typeface="微软雅黑" panose="020B0503020204020204" charset="-122"/>
+              </a:rPr>
+              <a:t>水色</a:t>
+            </a:r>
+            <a:r>
+              <a:rPr lang="en-US" altLang="zh-CN" sz="1740">
+                <a:solidFill>
+                  <a:srgbClr val="1A2233"/>
+                </a:solidFill>
+                <a:latin typeface="微软雅黑" panose="020B0503020204020204" charset="-122"/>
+                <a:ea typeface="微软雅黑" panose="020B0503020204020204" charset="-122"/>
+                <a:cs typeface="微软雅黑" panose="020B0503020204020204" charset="-122"/>
+              </a:rPr>
+              <a:t>CV)</a:t>
+            </a:r>
+            <a:r>
+              <a:rPr lang="zh-CN" altLang="en-US" sz="1740">
+                <a:solidFill>
+                  <a:srgbClr val="1A2233"/>
+                </a:solidFill>
+                <a:latin typeface="微软雅黑" panose="020B0503020204020204" charset="-122"/>
+                <a:ea typeface="微软雅黑" panose="020B0503020204020204" charset="-122"/>
+                <a:cs typeface="微软雅黑" panose="020B0503020204020204" charset="-122"/>
+              </a:rPr>
+              <a:t>打</a:t>
+            </a:r>
+            <a:r>
+              <a:rPr lang="en-US" altLang="zh-CN" sz="1740">
+                <a:solidFill>
+                  <a:srgbClr val="1A2233"/>
+                </a:solidFill>
+                <a:latin typeface="微软雅黑" panose="020B0503020204020204" charset="-122"/>
+                <a:ea typeface="微软雅黑" panose="020B0503020204020204" charset="-122"/>
+                <a:cs typeface="微软雅黑" panose="020B0503020204020204" charset="-122"/>
+              </a:rPr>
+              <a:t> 5 </a:t>
+            </a:r>
+            <a:r>
+              <a:rPr lang="zh-CN" altLang="en-US" sz="1740">
+                <a:solidFill>
+                  <a:srgbClr val="1A2233"/>
+                </a:solidFill>
+                <a:latin typeface="微软雅黑" panose="020B0503020204020204" charset="-122"/>
+                <a:ea typeface="微软雅黑" panose="020B0503020204020204" charset="-122"/>
+                <a:cs typeface="微软雅黑" panose="020B0503020204020204" charset="-122"/>
+              </a:rPr>
+              <a:t>类伪标签</a:t>
+            </a:r>
+            <a:r>
+              <a:rPr lang="en-US" altLang="zh-CN" sz="1740">
+                <a:solidFill>
+                  <a:srgbClr val="1A2233"/>
+                </a:solidFill>
+                <a:latin typeface="微软雅黑" panose="020B0503020204020204" charset="-122"/>
+                <a:ea typeface="微软雅黑" panose="020B0503020204020204" charset="-122"/>
+                <a:cs typeface="微软雅黑" panose="020B0503020204020204" charset="-122"/>
+              </a:rPr>
+              <a:t>→md5</a:t>
+            </a:r>
+            <a:r>
+              <a:rPr lang="zh-CN" altLang="en-US" sz="1740">
+                <a:solidFill>
+                  <a:srgbClr val="1A2233"/>
+                </a:solidFill>
+                <a:latin typeface="微软雅黑" panose="020B0503020204020204" charset="-122"/>
+                <a:ea typeface="微软雅黑" panose="020B0503020204020204" charset="-122"/>
+                <a:cs typeface="微软雅黑" panose="020B0503020204020204" charset="-122"/>
+              </a:rPr>
+              <a:t>去重</a:t>
+            </a:r>
+            <a:r>
+              <a:rPr lang="en-US" altLang="zh-CN" sz="1740">
+                <a:solidFill>
+                  <a:srgbClr val="1A2233"/>
+                </a:solidFill>
+                <a:latin typeface="微软雅黑" panose="020B0503020204020204" charset="-122"/>
+                <a:ea typeface="微软雅黑" panose="020B0503020204020204" charset="-122"/>
+                <a:cs typeface="微软雅黑" panose="020B0503020204020204" charset="-122"/>
+              </a:rPr>
+              <a:t>/</a:t>
+            </a:r>
+            <a:r>
+              <a:rPr lang="zh-CN" altLang="en-US" sz="1740">
+                <a:solidFill>
+                  <a:srgbClr val="1A2233"/>
+                </a:solidFill>
+                <a:latin typeface="微软雅黑" panose="020B0503020204020204" charset="-122"/>
+                <a:ea typeface="微软雅黑" panose="020B0503020204020204" charset="-122"/>
+                <a:cs typeface="微软雅黑" panose="020B0503020204020204" charset="-122"/>
+              </a:rPr>
+              <a:t>质量过滤</a:t>
+            </a:r>
+            <a:r>
+              <a:rPr lang="en-US" altLang="zh-CN" sz="1740">
+                <a:solidFill>
+                  <a:srgbClr val="1A2233"/>
+                </a:solidFill>
+                <a:latin typeface="微软雅黑" panose="020B0503020204020204" charset="-122"/>
+                <a:ea typeface="微软雅黑" panose="020B0503020204020204" charset="-122"/>
+                <a:cs typeface="微软雅黑" panose="020B0503020204020204" charset="-122"/>
+              </a:rPr>
+              <a:t>→MobileNetV3-Small </a:t>
+            </a:r>
+            <a:r>
+              <a:rPr lang="zh-CN" altLang="en-US" sz="1740">
+                <a:solidFill>
+                  <a:srgbClr val="1A2233"/>
+                </a:solidFill>
+                <a:latin typeface="微软雅黑" panose="020B0503020204020204" charset="-122"/>
+                <a:ea typeface="微软雅黑" panose="020B0503020204020204" charset="-122"/>
+                <a:cs typeface="微软雅黑" panose="020B0503020204020204" charset="-122"/>
+              </a:rPr>
+              <a:t>冻结骨干训练</a:t>
+            </a:r>
+            <a:r>
+              <a:rPr lang="en-US" altLang="zh-CN" sz="1740">
+                <a:solidFill>
+                  <a:srgbClr val="1A2233"/>
+                </a:solidFill>
+                <a:latin typeface="微软雅黑" panose="020B0503020204020204" charset="-122"/>
+                <a:ea typeface="微软雅黑" panose="020B0503020204020204" charset="-122"/>
+                <a:cs typeface="微软雅黑" panose="020B0503020204020204" charset="-122"/>
+              </a:rPr>
+              <a:t>;</a:t>
+            </a:r>
+            <a:r>
+              <a:rPr lang="zh-CN" altLang="en-US" sz="1740">
+                <a:solidFill>
+                  <a:srgbClr val="1A2233"/>
+                </a:solidFill>
+                <a:latin typeface="微软雅黑" panose="020B0503020204020204" charset="-122"/>
+                <a:ea typeface="微软雅黑" panose="020B0503020204020204" charset="-122"/>
+                <a:cs typeface="微软雅黑" panose="020B0503020204020204" charset="-122"/>
+              </a:rPr>
+              <a:t>逐张记录来源</a:t>
+            </a:r>
+            <a:r>
+              <a:rPr lang="en-US" altLang="zh-CN" sz="1740">
+                <a:solidFill>
+                  <a:srgbClr val="1A2233"/>
+                </a:solidFill>
+                <a:latin typeface="微软雅黑" panose="020B0503020204020204" charset="-122"/>
+                <a:ea typeface="微软雅黑" panose="020B0503020204020204" charset="-122"/>
+                <a:cs typeface="微软雅黑" panose="020B0503020204020204" charset="-122"/>
+              </a:rPr>
+              <a:t> URL</a:t>
+            </a:r>
+            <a:endParaRPr lang="en-US" altLang="zh-CN" sz="1740">
+              <a:solidFill>
+                <a:srgbClr val="1A2233"/>
+              </a:solidFill>
+              <a:latin typeface="微软雅黑" panose="020B0503020204020204" charset="-122"/>
+              <a:ea typeface="微软雅黑" panose="020B0503020204020204" charset="-122"/>
+              <a:cs typeface="微软雅黑" panose="020B0503020204020204" charset="-122"/>
+            </a:endParaRPr>
+          </a:p>
+        </p:txBody>
+      </p:sp>
+      <p:sp>
+        <p:nvSpPr>
+          <p:cNvPr id="21" name="矩形 20"/>
+          <p:cNvSpPr/>
+          <p:nvPr/>
+        </p:nvSpPr>
+        <p:spPr>
+          <a:xfrm>
+            <a:off x="608965" y="4805045"/>
+            <a:ext cx="76200" cy="76200"/>
+          </a:xfrm>
+          <a:prstGeom prst="rect">
+            <a:avLst/>
+          </a:prstGeom>
+          <a:solidFill>
+            <a:srgbClr val="C8102E"/>
+          </a:solidFill>
+          <a:ln w="9525" cap="flat" cmpd="sng" algn="ctr">
+            <a:noFill/>
+            <a:prstDash val="solid"/>
+          </a:ln>
+          <a:effectLst/>
+          <a:extLst>
+            <a:ext uri="{91240B29-F687-4F45-9708-019B960494DF}">
+              <a14:hiddenLine xmlns:a14="http://schemas.microsoft.com/office/drawing/2010/main" w="9525" cap="flat" cmpd="sng" algn="ctr">
+                <a:solidFill>
+                  <a:schemeClr val="accent1">
+                    <a:shade val="95000"/>
+                    <a:satMod val="105000"/>
+                  </a:schemeClr>
+                </a:solidFill>
+                <a:prstDash val="solid"/>
+              </a14:hiddenLine>
+            </a:ext>
+            <a:ext uri="{AF507438-7753-43E0-B8FC-AC1667EBCBE1}">
+              <a14:hiddenEffects xmlns:a14="http://schemas.microsoft.com/office/drawing/2010/main">
+                <a:effectLst>
+                  <a:outerShdw blurRad="40000" dist="23000" dir="5400000" rotWithShape="0">
+                    <a:srgbClr val="000000">
+                      <a:alpha val="35000"/>
+                    </a:srgbClr>
+                  </a:outerShdw>
+                </a:effectLst>
+              </a14:hiddenEffects>
+            </a:ext>
+          </a:extLst>
+        </p:spPr>
+        <p:style>
+          <a:lnRef idx="1">
+            <a:schemeClr val="accent1"/>
+          </a:lnRef>
+          <a:fillRef idx="3">
+            <a:schemeClr val="accent1"/>
+          </a:fillRef>
+          <a:effectRef idx="2">
+            <a:schemeClr val="accent1"/>
+          </a:effectRef>
+          <a:fontRef idx="minor">
+            <a:schemeClr val="lt1"/>
+          </a:fontRef>
+        </p:style>
+        <p:txBody>
+          <a:bodyPr/>
+          <a:p>
+            <a:endParaRPr lang="zh-CN" altLang="en-US"/>
+          </a:p>
+        </p:txBody>
+      </p:sp>
+      <p:sp>
+        <p:nvSpPr>
+          <p:cNvPr id="22" name="文本框 21"/>
+          <p:cNvSpPr txBox="1"/>
+          <p:nvPr/>
+        </p:nvSpPr>
+        <p:spPr>
+          <a:xfrm>
+            <a:off x="837565" y="4690745"/>
+            <a:ext cx="10743565" cy="381000"/>
+          </a:xfrm>
+          <a:prstGeom prst="rect">
+            <a:avLst/>
+          </a:prstGeom>
+          <a:noFill/>
+        </p:spPr>
+        <p:txBody>
+          <a:bodyPr wrap="square" lIns="0" tIns="0" rIns="0" bIns="0" rtlCol="0" anchor="t">
+            <a:noAutofit/>
+          </a:bodyPr>
+          <a:p>
+            <a:pPr algn="l">
+              <a:lnSpc>
+                <a:spcPct val="108000"/>
+              </a:lnSpc>
+            </a:pPr>
+            <a:r>
+              <a:rPr lang="zh-CN" altLang="en-US" sz="1740">
+                <a:solidFill>
+                  <a:srgbClr val="1A2233"/>
+                </a:solidFill>
+                <a:latin typeface="微软雅黑" panose="020B0503020204020204" charset="-122"/>
+                <a:ea typeface="微软雅黑" panose="020B0503020204020204" charset="-122"/>
+                <a:cs typeface="微软雅黑" panose="020B0503020204020204" charset="-122"/>
+              </a:rPr>
+              <a:t>伪标签监控准确率仅作选优</a:t>
+            </a:r>
+            <a:r>
+              <a:rPr lang="en-US" altLang="zh-CN" sz="1740">
+                <a:solidFill>
+                  <a:srgbClr val="1A2233"/>
+                </a:solidFill>
+                <a:latin typeface="微软雅黑" panose="020B0503020204020204" charset="-122"/>
+                <a:ea typeface="微软雅黑" panose="020B0503020204020204" charset="-122"/>
+                <a:cs typeface="微软雅黑" panose="020B0503020204020204" charset="-122"/>
+              </a:rPr>
+              <a:t>,</a:t>
+            </a:r>
+            <a:r>
+              <a:rPr lang="zh-CN" altLang="en-US" sz="1740">
+                <a:solidFill>
+                  <a:srgbClr val="1A2233"/>
+                </a:solidFill>
+                <a:latin typeface="微软雅黑" panose="020B0503020204020204" charset="-122"/>
+                <a:ea typeface="微软雅黑" panose="020B0503020204020204" charset="-122"/>
+                <a:cs typeface="微软雅黑" panose="020B0503020204020204" charset="-122"/>
+              </a:rPr>
+              <a:t>不声明为最终效果</a:t>
+            </a:r>
+            <a:r>
+              <a:rPr lang="en-US" altLang="zh-CN" sz="1740">
+                <a:solidFill>
+                  <a:srgbClr val="1A2233"/>
+                </a:solidFill>
+                <a:latin typeface="微软雅黑" panose="020B0503020204020204" charset="-122"/>
+                <a:ea typeface="微软雅黑" panose="020B0503020204020204" charset="-122"/>
+                <a:cs typeface="微软雅黑" panose="020B0503020204020204" charset="-122"/>
+              </a:rPr>
+              <a:t>;</a:t>
+            </a:r>
+            <a:r>
+              <a:rPr lang="zh-CN" altLang="en-US" sz="1740">
+                <a:solidFill>
+                  <a:srgbClr val="1A2233"/>
+                </a:solidFill>
+                <a:latin typeface="微软雅黑" panose="020B0503020204020204" charset="-122"/>
+                <a:ea typeface="微软雅黑" panose="020B0503020204020204" charset="-122"/>
+                <a:cs typeface="微软雅黑" panose="020B0503020204020204" charset="-122"/>
+              </a:rPr>
+              <a:t>真实效果以人工精选</a:t>
+            </a:r>
+            <a:r>
+              <a:rPr lang="en-US" altLang="zh-CN" sz="1740">
+                <a:solidFill>
+                  <a:srgbClr val="1A2233"/>
+                </a:solidFill>
+                <a:latin typeface="微软雅黑" panose="020B0503020204020204" charset="-122"/>
+                <a:ea typeface="微软雅黑" panose="020B0503020204020204" charset="-122"/>
+                <a:cs typeface="微软雅黑" panose="020B0503020204020204" charset="-122"/>
+              </a:rPr>
+              <a:t> 25 </a:t>
+            </a:r>
+            <a:r>
+              <a:rPr lang="zh-CN" altLang="en-US" sz="1740">
+                <a:solidFill>
+                  <a:srgbClr val="1A2233"/>
+                </a:solidFill>
+                <a:latin typeface="微软雅黑" panose="020B0503020204020204" charset="-122"/>
+                <a:ea typeface="微软雅黑" panose="020B0503020204020204" charset="-122"/>
+                <a:cs typeface="微软雅黑" panose="020B0503020204020204" charset="-122"/>
+              </a:rPr>
+              <a:t>张验证</a:t>
+            </a:r>
+            <a:r>
+              <a:rPr lang="en-US" altLang="zh-CN" sz="1740">
+                <a:solidFill>
+                  <a:srgbClr val="1A2233"/>
+                </a:solidFill>
+                <a:latin typeface="微软雅黑" panose="020B0503020204020204" charset="-122"/>
+                <a:ea typeface="微软雅黑" panose="020B0503020204020204" charset="-122"/>
+                <a:cs typeface="微软雅黑" panose="020B0503020204020204" charset="-122"/>
+              </a:rPr>
+              <a:t>,</a:t>
+            </a:r>
+            <a:r>
+              <a:rPr lang="zh-CN" altLang="en-US" sz="1740">
+                <a:solidFill>
+                  <a:srgbClr val="1A2233"/>
+                </a:solidFill>
+                <a:latin typeface="微软雅黑" panose="020B0503020204020204" charset="-122"/>
+                <a:ea typeface="微软雅黑" panose="020B0503020204020204" charset="-122"/>
+                <a:cs typeface="微软雅黑" panose="020B0503020204020204" charset="-122"/>
+              </a:rPr>
+              <a:t>并与规则流并列报告</a:t>
+            </a:r>
+            <a:endParaRPr lang="zh-CN" altLang="en-US" sz="1740">
+              <a:solidFill>
+                <a:srgbClr val="1A2233"/>
+              </a:solidFill>
+              <a:latin typeface="微软雅黑" panose="020B0503020204020204" charset="-122"/>
+              <a:ea typeface="微软雅黑" panose="020B0503020204020204" charset="-122"/>
+              <a:cs typeface="微软雅黑" panose="020B0503020204020204" charset="-122"/>
+            </a:endParaRPr>
+          </a:p>
+        </p:txBody>
+      </p:sp>
+      <p:sp>
+        <p:nvSpPr>
+          <p:cNvPr id="23" name="矩形 22"/>
+          <p:cNvSpPr/>
+          <p:nvPr/>
+        </p:nvSpPr>
+        <p:spPr>
+          <a:xfrm>
+            <a:off x="608965" y="5287645"/>
+            <a:ext cx="76200" cy="76200"/>
+          </a:xfrm>
+          <a:prstGeom prst="rect">
+            <a:avLst/>
+          </a:prstGeom>
+          <a:solidFill>
+            <a:srgbClr val="C8102E"/>
+          </a:solidFill>
+          <a:ln w="9525" cap="flat" cmpd="sng" algn="ctr">
+            <a:noFill/>
+            <a:prstDash val="solid"/>
+          </a:ln>
+          <a:effectLst/>
+          <a:extLst>
+            <a:ext uri="{91240B29-F687-4F45-9708-019B960494DF}">
+              <a14:hiddenLine xmlns:a14="http://schemas.microsoft.com/office/drawing/2010/main" w="9525" cap="flat" cmpd="sng" algn="ctr">
+                <a:solidFill>
+                  <a:schemeClr val="accent1">
+                    <a:shade val="95000"/>
+                    <a:satMod val="105000"/>
+                  </a:schemeClr>
+                </a:solidFill>
+                <a:prstDash val="solid"/>
+              </a14:hiddenLine>
+            </a:ext>
+            <a:ext uri="{AF507438-7753-43E0-B8FC-AC1667EBCBE1}">
+              <a14:hiddenEffects xmlns:a14="http://schemas.microsoft.com/office/drawing/2010/main">
+                <a:effectLst>
+                  <a:outerShdw blurRad="40000" dist="23000" dir="5400000" rotWithShape="0">
+                    <a:srgbClr val="000000">
+                      <a:alpha val="35000"/>
+                    </a:srgbClr>
+                  </a:outerShdw>
+                </a:effectLst>
+              </a14:hiddenEffects>
+            </a:ext>
+          </a:extLst>
+        </p:spPr>
+        <p:style>
+          <a:lnRef idx="1">
+            <a:schemeClr val="accent1"/>
+          </a:lnRef>
+          <a:fillRef idx="3">
+            <a:schemeClr val="accent1"/>
+          </a:fillRef>
+          <a:effectRef idx="2">
+            <a:schemeClr val="accent1"/>
+          </a:effectRef>
+          <a:fontRef idx="minor">
+            <a:schemeClr val="lt1"/>
+          </a:fontRef>
+        </p:style>
+        <p:txBody>
+          <a:bodyPr/>
+          <a:p>
+            <a:endParaRPr lang="zh-CN" altLang="en-US"/>
+          </a:p>
+        </p:txBody>
+      </p:sp>
+      <p:sp>
+        <p:nvSpPr>
+          <p:cNvPr id="24" name="文本框 23"/>
+          <p:cNvSpPr txBox="1"/>
+          <p:nvPr/>
+        </p:nvSpPr>
+        <p:spPr>
+          <a:xfrm>
+            <a:off x="837565" y="5173345"/>
+            <a:ext cx="10743565" cy="381000"/>
+          </a:xfrm>
+          <a:prstGeom prst="rect">
+            <a:avLst/>
+          </a:prstGeom>
+          <a:noFill/>
+        </p:spPr>
+        <p:txBody>
+          <a:bodyPr wrap="square" lIns="0" tIns="0" rIns="0" bIns="0" rtlCol="0" anchor="t">
+            <a:noAutofit/>
+          </a:bodyPr>
+          <a:p>
+            <a:pPr algn="l">
+              <a:lnSpc>
+                <a:spcPct val="108000"/>
+              </a:lnSpc>
+            </a:pPr>
+            <a:r>
+              <a:rPr lang="en-US" altLang="en-US" sz="1740">
+                <a:solidFill>
+                  <a:srgbClr val="1A2233"/>
+                </a:solidFill>
+                <a:latin typeface="微软雅黑" panose="020B0503020204020204" charset="-122"/>
+                <a:ea typeface="微软雅黑" panose="020B0503020204020204" charset="-122"/>
+                <a:cs typeface="微软雅黑" panose="020B0503020204020204" charset="-122"/>
+              </a:rPr>
+              <a:t>CNN </a:t>
+            </a:r>
+            <a:r>
+              <a:rPr lang="zh-CN" altLang="en-US" sz="1740">
+                <a:solidFill>
+                  <a:srgbClr val="1A2233"/>
+                </a:solidFill>
+                <a:latin typeface="微软雅黑" panose="020B0503020204020204" charset="-122"/>
+                <a:ea typeface="微软雅黑" panose="020B0503020204020204" charset="-122"/>
+                <a:cs typeface="微软雅黑" panose="020B0503020204020204" charset="-122"/>
+              </a:rPr>
+              <a:t>找回</a:t>
+            </a:r>
+            <a:r>
+              <a:rPr lang="en-US" altLang="zh-CN" sz="1740">
+                <a:solidFill>
+                  <a:srgbClr val="1A2233"/>
+                </a:solidFill>
+                <a:latin typeface="微软雅黑" panose="020B0503020204020204" charset="-122"/>
+                <a:ea typeface="微软雅黑" panose="020B0503020204020204" charset="-122"/>
+                <a:cs typeface="微软雅黑" panose="020B0503020204020204" charset="-122"/>
+              </a:rPr>
+              <a:t> 2 </a:t>
+            </a:r>
+            <a:r>
+              <a:rPr lang="zh-CN" altLang="en-US" sz="1740">
+                <a:solidFill>
+                  <a:srgbClr val="1A2233"/>
+                </a:solidFill>
+                <a:latin typeface="微软雅黑" panose="020B0503020204020204" charset="-122"/>
+                <a:ea typeface="微软雅黑" panose="020B0503020204020204" charset="-122"/>
+                <a:cs typeface="微软雅黑" panose="020B0503020204020204" charset="-122"/>
+              </a:rPr>
+              <a:t>张规则流漏判的暖色水华图</a:t>
+            </a:r>
+            <a:r>
+              <a:rPr lang="en-US" altLang="zh-CN" sz="1740">
+                <a:solidFill>
+                  <a:srgbClr val="1A2233"/>
+                </a:solidFill>
+                <a:latin typeface="微软雅黑" panose="020B0503020204020204" charset="-122"/>
+                <a:ea typeface="微软雅黑" panose="020B0503020204020204" charset="-122"/>
+                <a:cs typeface="微软雅黑" panose="020B0503020204020204" charset="-122"/>
+              </a:rPr>
+              <a:t>;</a:t>
+            </a:r>
+            <a:r>
+              <a:rPr lang="zh-CN" altLang="en-US" sz="1740">
+                <a:solidFill>
+                  <a:srgbClr val="1A2233"/>
+                </a:solidFill>
+                <a:latin typeface="微软雅黑" panose="020B0503020204020204" charset="-122"/>
+                <a:ea typeface="微软雅黑" panose="020B0503020204020204" charset="-122"/>
+                <a:cs typeface="微软雅黑" panose="020B0503020204020204" charset="-122"/>
+              </a:rPr>
+              <a:t>按融合钩子</a:t>
+            </a:r>
+            <a:r>
+              <a:rPr lang="en-US" altLang="zh-CN" sz="1740">
+                <a:solidFill>
+                  <a:srgbClr val="1A2233"/>
+                </a:solidFill>
+                <a:latin typeface="微软雅黑" panose="020B0503020204020204" charset="-122"/>
+                <a:ea typeface="微软雅黑" panose="020B0503020204020204" charset="-122"/>
+                <a:cs typeface="微软雅黑" panose="020B0503020204020204" charset="-122"/>
+              </a:rPr>
+              <a:t> image_cnn_likelihood </a:t>
+            </a:r>
+            <a:r>
+              <a:rPr lang="zh-CN" altLang="en-US" sz="1740">
+                <a:solidFill>
+                  <a:srgbClr val="1A2233"/>
+                </a:solidFill>
+                <a:latin typeface="微软雅黑" panose="020B0503020204020204" charset="-122"/>
+                <a:ea typeface="微软雅黑" panose="020B0503020204020204" charset="-122"/>
+                <a:cs typeface="微软雅黑" panose="020B0503020204020204" charset="-122"/>
+              </a:rPr>
+              <a:t>接入为第三路证据</a:t>
+            </a:r>
+            <a:r>
+              <a:rPr lang="en-US" altLang="zh-CN" sz="1740">
+                <a:solidFill>
+                  <a:srgbClr val="1A2233"/>
+                </a:solidFill>
+                <a:latin typeface="微软雅黑" panose="020B0503020204020204" charset="-122"/>
+                <a:ea typeface="微软雅黑" panose="020B0503020204020204" charset="-122"/>
+                <a:cs typeface="微软雅黑" panose="020B0503020204020204" charset="-122"/>
+              </a:rPr>
+              <a:t>,</a:t>
+            </a:r>
+            <a:r>
+              <a:rPr lang="zh-CN" altLang="en-US" sz="1740">
+                <a:solidFill>
+                  <a:srgbClr val="1A2233"/>
+                </a:solidFill>
+                <a:latin typeface="微软雅黑" panose="020B0503020204020204" charset="-122"/>
+                <a:ea typeface="微软雅黑" panose="020B0503020204020204" charset="-122"/>
+                <a:cs typeface="微软雅黑" panose="020B0503020204020204" charset="-122"/>
+              </a:rPr>
+              <a:t>暂不单独作为预警依据</a:t>
+            </a:r>
+            <a:endParaRPr lang="zh-CN" altLang="en-US" sz="1740">
+              <a:solidFill>
+                <a:srgbClr val="1A2233"/>
+              </a:solidFill>
+              <a:latin typeface="微软雅黑" panose="020B0503020204020204" charset="-122"/>
+              <a:ea typeface="微软雅黑" panose="020B0503020204020204" charset="-122"/>
+              <a:cs typeface="微软雅黑" panose="020B0503020204020204" charset="-122"/>
+            </a:endParaRPr>
+          </a:p>
+        </p:txBody>
+      </p:sp>
+    </p:spTree>
+    <p:custDataLst>
+      <p:tags r:id="rId1"/>
+    </p:custDataLst>
+  </p:cSld>
+  <p:clrMapOvr>
+    <a:masterClrMapping/>
+  </p:clrMapOvr>
+  <mc:AlternateContent xmlns:mc="http://schemas.openxmlformats.org/markup-compatibility/2006">
+    <mc:Choice xmlns:p14="http://schemas.microsoft.com/office/powerpoint/2010/main" Requires="p14">
+      <p:transition spd="med" p14:dur="600">
+        <p:fade/>
+      </p:transition>
+    </mc:Choice>
+    <mc:Fallback>
+      <p:transition spd="med">
+        <p:fade/>
+      </p:transition>
+    </mc:Fallback>
+  </mc:AlternateContent>
+  <p:timing>
+    <p:tnLst>
+      <p:par>
+        <p:cTn id="1" dur="indefinite" restart="never" nodeType="tmRoot">
+          <p:childTnLst>
+            <p:seq concurrent="1" nextAc="seek">
+              <p:cTn id="2" dur="indefinite" nodeType="mainSeq">
+                <p:childTnLst>
+                  <p:par>
+                    <p:cTn id="3" fill="hold">
+                      <p:stCondLst>
+                        <p:cond delay="indefinite"/>
+                        <p:cond evt="onBegin" delay="0">
+                          <p:tn val="2"/>
+                        </p:cond>
+                      </p:stCondLst>
+                      <p:childTnLst>
+                        <p:par>
+                          <p:cTn id="4" fill="hold">
+                            <p:stCondLst>
+                              <p:cond delay="0"/>
+                            </p:stCondLst>
+                            <p:childTnLst>
+                              <p:par>
+                                <p:cTn id="5" presetID="10" presetClass="entr" presetSubtype="0" fill="hold" nodeType="withEffect">
+                                  <p:stCondLst>
+                                    <p:cond delay="0"/>
+                                  </p:stCondLst>
+                                  <p:childTnLst>
+                                    <p:set>
+                                      <p:cBhvr>
+                                        <p:cTn id="6" dur="350" fill="hold">
+                                          <p:stCondLst>
+                                            <p:cond delay="0"/>
+                                          </p:stCondLst>
+                                        </p:cTn>
+                                        <p:tgtEl>
+                                          <p:spTgt spid="7"/>
+                                        </p:tgtEl>
+                                        <p:attrNameLst>
+                                          <p:attrName>style.visibility</p:attrName>
+                                        </p:attrNameLst>
+                                      </p:cBhvr>
+                                      <p:to>
+                                        <p:strVal val="visible"/>
+                                      </p:to>
+                                    </p:set>
+                                    <p:animEffect transition="in" filter="fade">
+                                      <p:cBhvr>
+                                        <p:cTn id="7" dur="350"/>
+                                        <p:tgtEl>
+                                          <p:spTgt spid="7"/>
+                                        </p:tgtEl>
+                                      </p:cBhvr>
+                                    </p:animEffect>
+                                  </p:childTnLst>
+                                </p:cTn>
+                              </p:par>
+                              <p:par>
+                                <p:cTn id="8" presetID="10" presetClass="entr" presetSubtype="0" fill="hold" grpId="0" nodeType="withEffect">
+                                  <p:stCondLst>
+                                    <p:cond delay="0"/>
+                                  </p:stCondLst>
+                                  <p:childTnLst>
+                                    <p:set>
+                                      <p:cBhvr>
+                                        <p:cTn id="9" dur="350" fill="hold">
+                                          <p:stCondLst>
+                                            <p:cond delay="0"/>
+                                          </p:stCondLst>
+                                        </p:cTn>
+                                        <p:tgtEl>
+                                          <p:spTgt spid="8"/>
+                                        </p:tgtEl>
+                                        <p:attrNameLst>
+                                          <p:attrName>style.visibility</p:attrName>
+                                        </p:attrNameLst>
+                                      </p:cBhvr>
+                                      <p:to>
+                                        <p:strVal val="visible"/>
+                                      </p:to>
+                                    </p:set>
+                                    <p:animEffect transition="in" filter="fade">
+                                      <p:cBhvr>
+                                        <p:cTn id="10" dur="350"/>
+                                        <p:tgtEl>
+                                          <p:spTgt spid="8"/>
+                                        </p:tgtEl>
+                                      </p:cBhvr>
+                                    </p:animEffect>
+                                  </p:childTnLst>
+                                </p:cTn>
+                              </p:par>
+                              <p:par>
+                                <p:cTn id="11" presetID="10" presetClass="entr" presetSubtype="0" fill="hold" grpId="0" nodeType="withEffect">
+                                  <p:stCondLst>
+                                    <p:cond delay="0"/>
+                                  </p:stCondLst>
+                                  <p:childTnLst>
+                                    <p:set>
+                                      <p:cBhvr>
+                                        <p:cTn id="12" dur="350" fill="hold">
+                                          <p:stCondLst>
+                                            <p:cond delay="0"/>
+                                          </p:stCondLst>
+                                        </p:cTn>
+                                        <p:tgtEl>
+                                          <p:spTgt spid="9"/>
+                                        </p:tgtEl>
+                                        <p:attrNameLst>
+                                          <p:attrName>style.visibility</p:attrName>
+                                        </p:attrNameLst>
+                                      </p:cBhvr>
+                                      <p:to>
+                                        <p:strVal val="visible"/>
+                                      </p:to>
+                                    </p:set>
+                                    <p:animEffect transition="in" filter="fade">
+                                      <p:cBhvr>
+                                        <p:cTn id="13" dur="350"/>
+                                        <p:tgtEl>
+                                          <p:spTgt spid="9"/>
+                                        </p:tgtEl>
+                                      </p:cBhvr>
+                                    </p:animEffect>
+                                  </p:childTnLst>
+                                </p:cTn>
+                              </p:par>
+                            </p:childTnLst>
+                          </p:cTn>
+                        </p:par>
+                        <p:par>
+                          <p:cTn id="14" fill="hold">
+                            <p:stCondLst>
+                              <p:cond delay="500"/>
+                            </p:stCondLst>
+                            <p:childTnLst>
+                              <p:par>
+                                <p:cTn id="15" presetID="10" presetClass="entr" presetSubtype="0" fill="hold" nodeType="afterEffect">
+                                  <p:stCondLst>
+                                    <p:cond delay="0"/>
+                                  </p:stCondLst>
+                                  <p:childTnLst>
+                                    <p:set>
+                                      <p:cBhvr>
+                                        <p:cTn id="16" dur="350" fill="hold">
+                                          <p:stCondLst>
+                                            <p:cond delay="0"/>
+                                          </p:stCondLst>
+                                        </p:cTn>
+                                        <p:tgtEl>
+                                          <p:spTgt spid="10"/>
+                                        </p:tgtEl>
+                                        <p:attrNameLst>
+                                          <p:attrName>style.visibility</p:attrName>
+                                        </p:attrNameLst>
+                                      </p:cBhvr>
+                                      <p:to>
+                                        <p:strVal val="visible"/>
+                                      </p:to>
+                                    </p:set>
+                                    <p:animEffect transition="in" filter="fade">
+                                      <p:cBhvr>
+                                        <p:cTn id="17" dur="350"/>
+                                        <p:tgtEl>
+                                          <p:spTgt spid="10"/>
+                                        </p:tgtEl>
+                                      </p:cBhvr>
+                                    </p:animEffect>
+                                  </p:childTnLst>
+                                </p:cTn>
+                              </p:par>
+                              <p:par>
+                                <p:cTn id="18" presetID="10" presetClass="entr" presetSubtype="0" fill="hold" grpId="0" nodeType="withEffect">
+                                  <p:stCondLst>
+                                    <p:cond delay="0"/>
+                                  </p:stCondLst>
+                                  <p:childTnLst>
+                                    <p:set>
+                                      <p:cBhvr>
+                                        <p:cTn id="19" dur="350" fill="hold">
+                                          <p:stCondLst>
+                                            <p:cond delay="0"/>
+                                          </p:stCondLst>
+                                        </p:cTn>
+                                        <p:tgtEl>
+                                          <p:spTgt spid="11"/>
+                                        </p:tgtEl>
+                                        <p:attrNameLst>
+                                          <p:attrName>style.visibility</p:attrName>
+                                        </p:attrNameLst>
+                                      </p:cBhvr>
+                                      <p:to>
+                                        <p:strVal val="visible"/>
+                                      </p:to>
+                                    </p:set>
+                                    <p:animEffect transition="in" filter="fade">
+                                      <p:cBhvr>
+                                        <p:cTn id="20" dur="350"/>
+                                        <p:tgtEl>
+                                          <p:spTgt spid="11"/>
+                                        </p:tgtEl>
+                                      </p:cBhvr>
+                                    </p:animEffect>
+                                  </p:childTnLst>
+                                </p:cTn>
+                              </p:par>
+                              <p:par>
+                                <p:cTn id="21" presetID="10" presetClass="entr" presetSubtype="0" fill="hold" grpId="0" nodeType="withEffect">
+                                  <p:stCondLst>
+                                    <p:cond delay="0"/>
+                                  </p:stCondLst>
+                                  <p:childTnLst>
+                                    <p:set>
+                                      <p:cBhvr>
+                                        <p:cTn id="22" dur="350" fill="hold">
+                                          <p:stCondLst>
+                                            <p:cond delay="0"/>
+                                          </p:stCondLst>
+                                        </p:cTn>
+                                        <p:tgtEl>
+                                          <p:spTgt spid="12"/>
+                                        </p:tgtEl>
+                                        <p:attrNameLst>
+                                          <p:attrName>style.visibility</p:attrName>
+                                        </p:attrNameLst>
+                                      </p:cBhvr>
+                                      <p:to>
+                                        <p:strVal val="visible"/>
+                                      </p:to>
+                                    </p:set>
+                                    <p:animEffect transition="in" filter="fade">
+                                      <p:cBhvr>
+                                        <p:cTn id="23" dur="350"/>
+                                        <p:tgtEl>
+                                          <p:spTgt spid="12"/>
+                                        </p:tgtEl>
+                                      </p:cBhvr>
+                                    </p:animEffect>
+                                  </p:childTnLst>
+                                </p:cTn>
+                              </p:par>
+                            </p:childTnLst>
+                          </p:cTn>
+                        </p:par>
+                        <p:par>
+                          <p:cTn id="24" fill="hold">
+                            <p:stCondLst>
+                              <p:cond delay="1000"/>
+                            </p:stCondLst>
+                            <p:childTnLst>
+                              <p:par>
+                                <p:cTn id="25" presetID="10" presetClass="entr" presetSubtype="0" fill="hold" nodeType="afterEffect">
+                                  <p:stCondLst>
+                                    <p:cond delay="0"/>
+                                  </p:stCondLst>
+                                  <p:childTnLst>
+                                    <p:set>
+                                      <p:cBhvr>
+                                        <p:cTn id="26" dur="350" fill="hold">
+                                          <p:stCondLst>
+                                            <p:cond delay="0"/>
+                                          </p:stCondLst>
+                                        </p:cTn>
+                                        <p:tgtEl>
+                                          <p:spTgt spid="13"/>
+                                        </p:tgtEl>
+                                        <p:attrNameLst>
+                                          <p:attrName>style.visibility</p:attrName>
+                                        </p:attrNameLst>
+                                      </p:cBhvr>
+                                      <p:to>
+                                        <p:strVal val="visible"/>
+                                      </p:to>
+                                    </p:set>
+                                    <p:animEffect transition="in" filter="fade">
+                                      <p:cBhvr>
+                                        <p:cTn id="27" dur="350"/>
+                                        <p:tgtEl>
+                                          <p:spTgt spid="13"/>
+                                        </p:tgtEl>
+                                      </p:cBhvr>
+                                    </p:animEffect>
+                                  </p:childTnLst>
+                                </p:cTn>
+                              </p:par>
+                              <p:par>
+                                <p:cTn id="28" presetID="10" presetClass="entr" presetSubtype="0" fill="hold" grpId="0" nodeType="withEffect">
+                                  <p:stCondLst>
+                                    <p:cond delay="0"/>
+                                  </p:stCondLst>
+                                  <p:childTnLst>
+                                    <p:set>
+                                      <p:cBhvr>
+                                        <p:cTn id="29" dur="350" fill="hold">
+                                          <p:stCondLst>
+                                            <p:cond delay="0"/>
+                                          </p:stCondLst>
+                                        </p:cTn>
+                                        <p:tgtEl>
+                                          <p:spTgt spid="14"/>
+                                        </p:tgtEl>
+                                        <p:attrNameLst>
+                                          <p:attrName>style.visibility</p:attrName>
+                                        </p:attrNameLst>
+                                      </p:cBhvr>
+                                      <p:to>
+                                        <p:strVal val="visible"/>
+                                      </p:to>
+                                    </p:set>
+                                    <p:animEffect transition="in" filter="fade">
+                                      <p:cBhvr>
+                                        <p:cTn id="30" dur="350"/>
+                                        <p:tgtEl>
+                                          <p:spTgt spid="14"/>
+                                        </p:tgtEl>
+                                      </p:cBhvr>
+                                    </p:animEffect>
+                                  </p:childTnLst>
+                                </p:cTn>
+                              </p:par>
+                              <p:par>
+                                <p:cTn id="31" presetID="10" presetClass="entr" presetSubtype="0" fill="hold" grpId="0" nodeType="withEffect">
+                                  <p:stCondLst>
+                                    <p:cond delay="0"/>
+                                  </p:stCondLst>
+                                  <p:childTnLst>
+                                    <p:set>
+                                      <p:cBhvr>
+                                        <p:cTn id="32" dur="350" fill="hold">
+                                          <p:stCondLst>
+                                            <p:cond delay="0"/>
+                                          </p:stCondLst>
+                                        </p:cTn>
+                                        <p:tgtEl>
+                                          <p:spTgt spid="15"/>
+                                        </p:tgtEl>
+                                        <p:attrNameLst>
+                                          <p:attrName>style.visibility</p:attrName>
+                                        </p:attrNameLst>
+                                      </p:cBhvr>
+                                      <p:to>
+                                        <p:strVal val="visible"/>
+                                      </p:to>
+                                    </p:set>
+                                    <p:animEffect transition="in" filter="fade">
+                                      <p:cBhvr>
+                                        <p:cTn id="33" dur="350"/>
+                                        <p:tgtEl>
+                                          <p:spTgt spid="15"/>
+                                        </p:tgtEl>
+                                      </p:cBhvr>
+                                    </p:animEffect>
+                                  </p:childTnLst>
+                                </p:cTn>
+                              </p:par>
+                            </p:childTnLst>
+                          </p:cTn>
+                        </p:par>
+                        <p:par>
+                          <p:cTn id="34" fill="hold">
+                            <p:stCondLst>
+                              <p:cond delay="1500"/>
+                            </p:stCondLst>
+                            <p:childTnLst>
+                              <p:par>
+                                <p:cTn id="35" presetID="10" presetClass="entr" presetSubtype="0" fill="hold" nodeType="afterEffect">
+                                  <p:stCondLst>
+                                    <p:cond delay="0"/>
+                                  </p:stCondLst>
+                                  <p:childTnLst>
+                                    <p:set>
+                                      <p:cBhvr>
+                                        <p:cTn id="36" dur="350" fill="hold">
+                                          <p:stCondLst>
+                                            <p:cond delay="0"/>
+                                          </p:stCondLst>
+                                        </p:cTn>
+                                        <p:tgtEl>
+                                          <p:spTgt spid="16"/>
+                                        </p:tgtEl>
+                                        <p:attrNameLst>
+                                          <p:attrName>style.visibility</p:attrName>
+                                        </p:attrNameLst>
+                                      </p:cBhvr>
+                                      <p:to>
+                                        <p:strVal val="visible"/>
+                                      </p:to>
+                                    </p:set>
+                                    <p:animEffect transition="in" filter="fade">
+                                      <p:cBhvr>
+                                        <p:cTn id="37" dur="350"/>
+                                        <p:tgtEl>
+                                          <p:spTgt spid="16"/>
+                                        </p:tgtEl>
+                                      </p:cBhvr>
+                                    </p:animEffect>
+                                  </p:childTnLst>
+                                </p:cTn>
+                              </p:par>
+                              <p:par>
+                                <p:cTn id="38" presetID="10" presetClass="entr" presetSubtype="0" fill="hold" grpId="0" nodeType="withEffect">
+                                  <p:stCondLst>
+                                    <p:cond delay="0"/>
+                                  </p:stCondLst>
+                                  <p:childTnLst>
+                                    <p:set>
+                                      <p:cBhvr>
+                                        <p:cTn id="39" dur="350" fill="hold">
+                                          <p:stCondLst>
+                                            <p:cond delay="0"/>
+                                          </p:stCondLst>
+                                        </p:cTn>
+                                        <p:tgtEl>
+                                          <p:spTgt spid="17"/>
+                                        </p:tgtEl>
+                                        <p:attrNameLst>
+                                          <p:attrName>style.visibility</p:attrName>
+                                        </p:attrNameLst>
+                                      </p:cBhvr>
+                                      <p:to>
+                                        <p:strVal val="visible"/>
+                                      </p:to>
+                                    </p:set>
+                                    <p:animEffect transition="in" filter="fade">
+                                      <p:cBhvr>
+                                        <p:cTn id="40" dur="350"/>
+                                        <p:tgtEl>
+                                          <p:spTgt spid="17"/>
+                                        </p:tgtEl>
+                                      </p:cBhvr>
+                                    </p:animEffect>
+                                  </p:childTnLst>
+                                </p:cTn>
+                              </p:par>
+                              <p:par>
+                                <p:cTn id="41" presetID="10" presetClass="entr" presetSubtype="0" fill="hold" grpId="0" nodeType="withEffect">
+                                  <p:stCondLst>
+                                    <p:cond delay="0"/>
+                                  </p:stCondLst>
+                                  <p:childTnLst>
+                                    <p:set>
+                                      <p:cBhvr>
+                                        <p:cTn id="42" dur="350" fill="hold">
+                                          <p:stCondLst>
+                                            <p:cond delay="0"/>
+                                          </p:stCondLst>
+                                        </p:cTn>
+                                        <p:tgtEl>
+                                          <p:spTgt spid="18"/>
+                                        </p:tgtEl>
+                                        <p:attrNameLst>
+                                          <p:attrName>style.visibility</p:attrName>
+                                        </p:attrNameLst>
+                                      </p:cBhvr>
+                                      <p:to>
+                                        <p:strVal val="visible"/>
+                                      </p:to>
+                                    </p:set>
+                                    <p:animEffect transition="in" filter="fade">
+                                      <p:cBhvr>
+                                        <p:cTn id="43" dur="350"/>
+                                        <p:tgtEl>
+                                          <p:spTgt spid="18"/>
+                                        </p:tgtEl>
+                                      </p:cBhvr>
+                                    </p:animEffect>
+                                  </p:childTnLst>
+                                </p:cTn>
+                              </p:par>
+                            </p:childTnLst>
+                          </p:cTn>
+                        </p:par>
+                        <p:par>
+                          <p:cTn id="44" fill="hold">
+                            <p:stCondLst>
+                              <p:cond delay="2000"/>
+                            </p:stCondLst>
+                            <p:childTnLst>
+                              <p:par>
+                                <p:cTn id="45" presetID="10" presetClass="entr" presetSubtype="0" fill="hold" grpId="0" nodeType="afterEffect">
+                                  <p:stCondLst>
+                                    <p:cond delay="0"/>
+                                  </p:stCondLst>
+                                  <p:childTnLst>
+                                    <p:set>
+                                      <p:cBhvr>
+                                        <p:cTn id="46" dur="350" fill="hold">
+                                          <p:stCondLst>
+                                            <p:cond delay="0"/>
+                                          </p:stCondLst>
+                                        </p:cTn>
+                                        <p:tgtEl>
+                                          <p:spTgt spid="19"/>
+                                        </p:tgtEl>
+                                        <p:attrNameLst>
+                                          <p:attrName>style.visibility</p:attrName>
+                                        </p:attrNameLst>
+                                      </p:cBhvr>
+                                      <p:to>
+                                        <p:strVal val="visible"/>
+                                      </p:to>
+                                    </p:set>
+                                    <p:animEffect transition="in" filter="fade">
+                                      <p:cBhvr>
+                                        <p:cTn id="47" dur="350"/>
+                                        <p:tgtEl>
+                                          <p:spTgt spid="19"/>
+                                        </p:tgtEl>
+                                      </p:cBhvr>
+                                    </p:animEffect>
+                                  </p:childTnLst>
+                                </p:cTn>
+                              </p:par>
+                              <p:par>
+                                <p:cTn id="48" presetID="10" presetClass="entr" presetSubtype="0" fill="hold" grpId="0" nodeType="withEffect">
+                                  <p:stCondLst>
+                                    <p:cond delay="0"/>
+                                  </p:stCondLst>
+                                  <p:childTnLst>
+                                    <p:set>
+                                      <p:cBhvr>
+                                        <p:cTn id="49" dur="350" fill="hold">
+                                          <p:stCondLst>
+                                            <p:cond delay="0"/>
+                                          </p:stCondLst>
+                                        </p:cTn>
+                                        <p:tgtEl>
+                                          <p:spTgt spid="20"/>
+                                        </p:tgtEl>
+                                        <p:attrNameLst>
+                                          <p:attrName>style.visibility</p:attrName>
+                                        </p:attrNameLst>
+                                      </p:cBhvr>
+                                      <p:to>
+                                        <p:strVal val="visible"/>
+                                      </p:to>
+                                    </p:set>
+                                    <p:animEffect transition="in" filter="fade">
+                                      <p:cBhvr>
+                                        <p:cTn id="50" dur="350"/>
+                                        <p:tgtEl>
+                                          <p:spTgt spid="20"/>
+                                        </p:tgtEl>
+                                      </p:cBhvr>
+                                    </p:animEffect>
+                                  </p:childTnLst>
+                                </p:cTn>
+                              </p:par>
+                            </p:childTnLst>
+                          </p:cTn>
+                        </p:par>
+                        <p:par>
+                          <p:cTn id="51" fill="hold">
+                            <p:stCondLst>
+                              <p:cond delay="2500"/>
+                            </p:stCondLst>
+                            <p:childTnLst>
+                              <p:par>
+                                <p:cTn id="52" presetID="10" presetClass="entr" presetSubtype="0" fill="hold" grpId="0" nodeType="afterEffect">
+                                  <p:stCondLst>
+                                    <p:cond delay="0"/>
+                                  </p:stCondLst>
+                                  <p:childTnLst>
+                                    <p:set>
+                                      <p:cBhvr>
+                                        <p:cTn id="53" dur="350" fill="hold">
+                                          <p:stCondLst>
+                                            <p:cond delay="0"/>
+                                          </p:stCondLst>
+                                        </p:cTn>
+                                        <p:tgtEl>
+                                          <p:spTgt spid="21"/>
+                                        </p:tgtEl>
+                                        <p:attrNameLst>
+                                          <p:attrName>style.visibility</p:attrName>
+                                        </p:attrNameLst>
+                                      </p:cBhvr>
+                                      <p:to>
+                                        <p:strVal val="visible"/>
+                                      </p:to>
+                                    </p:set>
+                                    <p:animEffect transition="in" filter="fade">
+                                      <p:cBhvr>
+                                        <p:cTn id="54" dur="350"/>
+                                        <p:tgtEl>
+                                          <p:spTgt spid="21"/>
+                                        </p:tgtEl>
+                                      </p:cBhvr>
+                                    </p:animEffect>
+                                  </p:childTnLst>
+                                </p:cTn>
+                              </p:par>
+                              <p:par>
+                                <p:cTn id="55" presetID="10" presetClass="entr" presetSubtype="0" fill="hold" grpId="0" nodeType="withEffect">
+                                  <p:stCondLst>
+                                    <p:cond delay="0"/>
+                                  </p:stCondLst>
+                                  <p:childTnLst>
+                                    <p:set>
+                                      <p:cBhvr>
+                                        <p:cTn id="56" dur="350" fill="hold">
+                                          <p:stCondLst>
+                                            <p:cond delay="0"/>
+                                          </p:stCondLst>
+                                        </p:cTn>
+                                        <p:tgtEl>
+                                          <p:spTgt spid="22"/>
+                                        </p:tgtEl>
+                                        <p:attrNameLst>
+                                          <p:attrName>style.visibility</p:attrName>
+                                        </p:attrNameLst>
+                                      </p:cBhvr>
+                                      <p:to>
+                                        <p:strVal val="visible"/>
+                                      </p:to>
+                                    </p:set>
+                                    <p:animEffect transition="in" filter="fade">
+                                      <p:cBhvr>
+                                        <p:cTn id="57" dur="350"/>
+                                        <p:tgtEl>
+                                          <p:spTgt spid="22"/>
+                                        </p:tgtEl>
+                                      </p:cBhvr>
+                                    </p:animEffect>
+                                  </p:childTnLst>
+                                </p:cTn>
+                              </p:par>
+                            </p:childTnLst>
+                          </p:cTn>
+                        </p:par>
+                        <p:par>
+                          <p:cTn id="58" fill="hold">
+                            <p:stCondLst>
+                              <p:cond delay="3000"/>
+                            </p:stCondLst>
+                            <p:childTnLst>
+                              <p:par>
+                                <p:cTn id="59" presetID="10" presetClass="entr" presetSubtype="0" fill="hold" grpId="0" nodeType="afterEffect">
+                                  <p:stCondLst>
+                                    <p:cond delay="0"/>
+                                  </p:stCondLst>
+                                  <p:childTnLst>
+                                    <p:set>
+                                      <p:cBhvr>
+                                        <p:cTn id="60" dur="350" fill="hold">
+                                          <p:stCondLst>
+                                            <p:cond delay="0"/>
+                                          </p:stCondLst>
+                                        </p:cTn>
+                                        <p:tgtEl>
+                                          <p:spTgt spid="23"/>
+                                        </p:tgtEl>
+                                        <p:attrNameLst>
+                                          <p:attrName>style.visibility</p:attrName>
+                                        </p:attrNameLst>
+                                      </p:cBhvr>
+                                      <p:to>
+                                        <p:strVal val="visible"/>
+                                      </p:to>
+                                    </p:set>
+                                    <p:animEffect transition="in" filter="fade">
+                                      <p:cBhvr>
+                                        <p:cTn id="61" dur="350"/>
+                                        <p:tgtEl>
+                                          <p:spTgt spid="23"/>
+                                        </p:tgtEl>
+                                      </p:cBhvr>
+                                    </p:animEffect>
+                                  </p:childTnLst>
+                                </p:cTn>
+                              </p:par>
+                              <p:par>
+                                <p:cTn id="62" presetID="10" presetClass="entr" presetSubtype="0" fill="hold" grpId="0" nodeType="withEffect">
+                                  <p:stCondLst>
+                                    <p:cond delay="0"/>
+                                  </p:stCondLst>
+                                  <p:childTnLst>
+                                    <p:set>
+                                      <p:cBhvr>
+                                        <p:cTn id="63" dur="350" fill="hold">
+                                          <p:stCondLst>
+                                            <p:cond delay="0"/>
+                                          </p:stCondLst>
+                                        </p:cTn>
+                                        <p:tgtEl>
+                                          <p:spTgt spid="24"/>
+                                        </p:tgtEl>
+                                        <p:attrNameLst>
+                                          <p:attrName>style.visibility</p:attrName>
+                                        </p:attrNameLst>
+                                      </p:cBhvr>
+                                      <p:to>
+                                        <p:strVal val="visible"/>
+                                      </p:to>
+                                    </p:set>
+                                    <p:animEffect transition="in" filter="fade">
+                                      <p:cBhvr>
+                                        <p:cTn id="64" dur="350"/>
+                                        <p:tgtEl>
+                                          <p:spTgt spid="24"/>
+                                        </p:tgtEl>
+                                      </p:cBhvr>
+                                    </p:animEffect>
+                                  </p:childTnLst>
+                                </p:cTn>
+                              </p:par>
+                            </p:childTnLst>
+                          </p:cTn>
+                        </p:par>
+                      </p:childTnLst>
+                    </p:cTn>
+                  </p:par>
+                </p:childTnLst>
+              </p:cTn>
+              <p:prevCondLst>
+                <p:cond evt="onPrev" delay="0">
+                  <p:tgtEl>
+                    <p:sldTgt/>
+                  </p:tgtEl>
+                </p:cond>
+              </p:prevCondLst>
+              <p:nextCondLst>
+                <p:cond evt="onNext" delay="0">
+                  <p:tgtEl>
+                    <p:sldTgt/>
+                  </p:tgtEl>
+                </p:cond>
+              </p:nextCondLst>
+            </p:seq>
+          </p:childTnLst>
+        </p:cTn>
+      </p:par>
+    </p:tnLst>
+    <p:bldLst>
+      <p:bldP spid="8" grpId="0"/>
+      <p:bldP spid="9" grpId="0"/>
+      <p:bldP spid="11" grpId="0"/>
+      <p:bldP spid="12" grpId="0"/>
+      <p:bldP spid="14" grpId="0"/>
+      <p:bldP spid="15" grpId="0"/>
+      <p:bldP spid="17" grpId="0"/>
+      <p:bldP spid="18" grpId="0"/>
+      <p:bldP spid="19" grpId="0" animBg="1"/>
+      <p:bldP spid="20" grpId="0"/>
+      <p:bldP spid="21" grpId="0" animBg="1"/>
+      <p:bldP spid="22" grpId="0"/>
+      <p:bldP spid="23" grpId="0" animBg="1"/>
+      <p:bldP spid="24" grpId="0"/>
+    </p:bldLst>
+  </p:timing>
+</p:sld>
+</file>
+
+<file path=ppt/tags/tag1.xml><?xml version="1.0" encoding="utf-8"?>
+<p:tagLst xmlns:p="http://schemas.openxmlformats.org/presentationml/2006/main">
+  <p:tag name="DSHKIND" val="stats"/>
+</p:tagLst>
 </file>
 
 <file path=ppt/theme/theme1.xml><?xml version="1.0" encoding="utf-8"?>
@@ -6021,6 +9274,269 @@
       </a:style>
     </a:lnDef>
   </a:objectDefaults>
-  <a:extraClrSchemeLst/>
+  <a:extLst>
+    <a:ext uri="{05A4C25C-085E-4340-85A3-A5531E510DB2}">
+      <thm15:themeFamily xmlns:thm15="http://schemas.microsoft.com/office/thememl/2012/main" name="Office Theme" id="{62F939B6-93AF-4DB8-9C6B-D6C7DFDC589F}" vid="{4A3C46E8-61CC-4603-A589-7422A47A8E4A}"/>
+    </a:ext>
+  </a:extLst>
+</a:theme>
+</file>
+
+<file path=ppt/theme/theme2.xml><?xml version="1.0" encoding="utf-8"?>
+<a:theme xmlns:a="http://schemas.openxmlformats.org/drawingml/2006/main" name="Office 主题">
+  <a:themeElements>
+    <a:clrScheme name="Office">
+      <a:dk1>
+        <a:sysClr val="windowText" lastClr="000000"/>
+      </a:dk1>
+      <a:lt1>
+        <a:sysClr val="window" lastClr="FFFFFF"/>
+      </a:lt1>
+      <a:dk2>
+        <a:srgbClr val="44546A"/>
+      </a:dk2>
+      <a:lt2>
+        <a:srgbClr val="E7E6E6"/>
+      </a:lt2>
+      <a:accent1>
+        <a:srgbClr val="5B9BD5"/>
+      </a:accent1>
+      <a:accent2>
+        <a:srgbClr val="ED7D31"/>
+      </a:accent2>
+      <a:accent3>
+        <a:srgbClr val="A5A5A5"/>
+      </a:accent3>
+      <a:accent4>
+        <a:srgbClr val="FFC000"/>
+      </a:accent4>
+      <a:accent5>
+        <a:srgbClr val="4472C4"/>
+      </a:accent5>
+      <a:accent6>
+        <a:srgbClr val="70AD47"/>
+      </a:accent6>
+      <a:hlink>
+        <a:srgbClr val="0563C1"/>
+      </a:hlink>
+      <a:folHlink>
+        <a:srgbClr val="954F72"/>
+      </a:folHlink>
+    </a:clrScheme>
+    <a:fontScheme name="Office">
+      <a:majorFont>
+        <a:latin typeface="Calibri Light"/>
+        <a:ea typeface=""/>
+        <a:cs typeface=""/>
+        <a:font script="Jpan" typeface="ＭＳ Ｐゴシック"/>
+        <a:font script="Hang" typeface="맑은 고딕"/>
+        <a:font script="Hans" typeface="宋体"/>
+        <a:font script="Hant" typeface="新細明體"/>
+        <a:font script="Arab" typeface="Times New Roman"/>
+        <a:font script="Hebr" typeface="Times New Roman"/>
+        <a:font script="Thai" typeface="Angsana New"/>
+        <a:font script="Ethi" typeface="Nyala"/>
+        <a:font script="Beng" typeface="Vrinda"/>
+        <a:font script="Gujr" typeface="Shruti"/>
+        <a:font script="Khmr" typeface="MoolBoran"/>
+        <a:font script="Knda" typeface="Tunga"/>
+        <a:font script="Guru" typeface="Raavi"/>
+        <a:font script="Cans" typeface="Euphemia"/>
+        <a:font script="Cher" typeface="Plantagenet Cherokee"/>
+        <a:font script="Yiii" typeface="Microsoft Yi Baiti"/>
+        <a:font script="Tibt" typeface="Microsoft Himalaya"/>
+        <a:font script="Thaa" typeface="MV Boli"/>
+        <a:font script="Deva" typeface="Mangal"/>
+        <a:font script="Telu" typeface="Gautami"/>
+        <a:font script="Taml" typeface="Latha"/>
+        <a:font script="Syrc" typeface="Estrangelo Edessa"/>
+        <a:font script="Orya" typeface="Kalinga"/>
+        <a:font script="Mlym" typeface="Kartika"/>
+        <a:font script="Laoo" typeface="DokChampa"/>
+        <a:font script="Sinh" typeface="Iskoola Pota"/>
+        <a:font script="Mong" typeface="Mongolian Baiti"/>
+        <a:font script="Viet" typeface="Times New Roman"/>
+        <a:font script="Uigh" typeface="Microsoft Uighur"/>
+        <a:font script="Geor" typeface="Sylfaen"/>
+      </a:majorFont>
+      <a:minorFont>
+        <a:latin typeface="Calibri"/>
+        <a:ea typeface=""/>
+        <a:cs typeface=""/>
+        <a:font script="Jpan" typeface="ＭＳ Ｐゴシック"/>
+        <a:font script="Hang" typeface="맑은 고딕"/>
+        <a:font script="Hans" typeface="宋体"/>
+        <a:font script="Hant" typeface="新細明體"/>
+        <a:font script="Arab" typeface="Arial"/>
+        <a:font script="Hebr" typeface="Arial"/>
+        <a:font script="Thai" typeface="Cordia New"/>
+        <a:font script="Ethi" typeface="Nyala"/>
+        <a:font script="Beng" typeface="Vrinda"/>
+        <a:font script="Gujr" typeface="Shruti"/>
+        <a:font script="Khmr" typeface="DaunPenh"/>
+        <a:font script="Knda" typeface="Tunga"/>
+        <a:font script="Guru" typeface="Raavi"/>
+        <a:font script="Cans" typeface="Euphemia"/>
+        <a:font script="Cher" typeface="Plantagenet Cherokee"/>
+        <a:font script="Yiii" typeface="Microsoft Yi Baiti"/>
+        <a:font script="Tibt" typeface="Microsoft Himalaya"/>
+        <a:font script="Thaa" typeface="MV Boli"/>
+        <a:font script="Deva" typeface="Mangal"/>
+        <a:font script="Telu" typeface="Gautami"/>
+        <a:font script="Taml" typeface="Latha"/>
+        <a:font script="Syrc" typeface="Estrangelo Edessa"/>
+        <a:font script="Orya" typeface="Kalinga"/>
+        <a:font script="Mlym" typeface="Kartika"/>
+        <a:font script="Laoo" typeface="DokChampa"/>
+        <a:font script="Sinh" typeface="Iskoola Pota"/>
+        <a:font script="Mong" typeface="Mongolian Baiti"/>
+        <a:font script="Viet" typeface="Arial"/>
+        <a:font script="Uigh" typeface="Microsoft Uighur"/>
+        <a:font script="Geor" typeface="Sylfaen"/>
+      </a:minorFont>
+    </a:fontScheme>
+    <a:fmtScheme name="Office">
+      <a:fillStyleLst>
+        <a:solidFill>
+          <a:schemeClr val="phClr"/>
+        </a:solidFill>
+        <a:gradFill rotWithShape="1">
+          <a:gsLst>
+            <a:gs pos="0">
+              <a:schemeClr val="phClr">
+                <a:lumMod val="110000"/>
+                <a:satMod val="105000"/>
+                <a:tint val="67000"/>
+              </a:schemeClr>
+            </a:gs>
+            <a:gs pos="50000">
+              <a:schemeClr val="phClr">
+                <a:lumMod val="105000"/>
+                <a:satMod val="103000"/>
+                <a:tint val="73000"/>
+              </a:schemeClr>
+            </a:gs>
+            <a:gs pos="100000">
+              <a:schemeClr val="phClr">
+                <a:lumMod val="105000"/>
+                <a:satMod val="109000"/>
+                <a:tint val="81000"/>
+              </a:schemeClr>
+            </a:gs>
+          </a:gsLst>
+          <a:lin ang="5400000" scaled="0"/>
+        </a:gradFill>
+        <a:gradFill rotWithShape="1">
+          <a:gsLst>
+            <a:gs pos="0">
+              <a:schemeClr val="phClr">
+                <a:satMod val="103000"/>
+                <a:lumMod val="102000"/>
+                <a:tint val="94000"/>
+              </a:schemeClr>
+            </a:gs>
+            <a:gs pos="50000">
+              <a:schemeClr val="phClr">
+                <a:satMod val="110000"/>
+                <a:lumMod val="100000"/>
+                <a:shade val="100000"/>
+              </a:schemeClr>
+            </a:gs>
+            <a:gs pos="100000">
+              <a:schemeClr val="phClr">
+                <a:lumMod val="99000"/>
+                <a:satMod val="120000"/>
+                <a:shade val="78000"/>
+              </a:schemeClr>
+            </a:gs>
+          </a:gsLst>
+          <a:lin ang="5400000" scaled="0"/>
+        </a:gradFill>
+      </a:fillStyleLst>
+      <a:lnStyleLst>
+        <a:ln w="6350" cap="flat" cmpd="sng" algn="ctr">
+          <a:solidFill>
+            <a:schemeClr val="phClr"/>
+          </a:solidFill>
+          <a:prstDash val="solid"/>
+          <a:miter lim="800000"/>
+        </a:ln>
+        <a:ln w="12700" cap="flat" cmpd="sng" algn="ctr">
+          <a:solidFill>
+            <a:schemeClr val="phClr"/>
+          </a:solidFill>
+          <a:prstDash val="solid"/>
+          <a:miter lim="800000"/>
+        </a:ln>
+        <a:ln w="19050" cap="flat" cmpd="sng" algn="ctr">
+          <a:solidFill>
+            <a:schemeClr val="phClr"/>
+          </a:solidFill>
+          <a:prstDash val="solid"/>
+          <a:miter lim="800000"/>
+        </a:ln>
+      </a:lnStyleLst>
+      <a:effectStyleLst>
+        <a:effectStyle>
+          <a:effectLst/>
+        </a:effectStyle>
+        <a:effectStyle>
+          <a:effectLst/>
+        </a:effectStyle>
+        <a:effectStyle>
+          <a:effectLst>
+            <a:outerShdw blurRad="57150" dist="19050" dir="5400000" algn="ctr" rotWithShape="0">
+              <a:srgbClr val="000000">
+                <a:alpha val="63000"/>
+              </a:srgbClr>
+            </a:outerShdw>
+          </a:effectLst>
+        </a:effectStyle>
+      </a:effectStyleLst>
+      <a:bgFillStyleLst>
+        <a:solidFill>
+          <a:schemeClr val="phClr"/>
+        </a:solidFill>
+        <a:solidFill>
+          <a:schemeClr val="phClr">
+            <a:tint val="95000"/>
+            <a:satMod val="170000"/>
+          </a:schemeClr>
+        </a:solidFill>
+        <a:gradFill rotWithShape="1">
+          <a:gsLst>
+            <a:gs pos="0">
+              <a:schemeClr val="phClr">
+                <a:tint val="93000"/>
+                <a:satMod val="150000"/>
+                <a:shade val="98000"/>
+                <a:lumMod val="102000"/>
+              </a:schemeClr>
+            </a:gs>
+            <a:gs pos="50000">
+              <a:schemeClr val="phClr">
+                <a:tint val="98000"/>
+                <a:satMod val="130000"/>
+                <a:shade val="90000"/>
+                <a:lumMod val="103000"/>
+              </a:schemeClr>
+            </a:gs>
+            <a:gs pos="100000">
+              <a:schemeClr val="phClr">
+                <a:shade val="63000"/>
+                <a:satMod val="120000"/>
+              </a:schemeClr>
+            </a:gs>
+          </a:gsLst>
+          <a:lin ang="5400000" scaled="0"/>
+        </a:gradFill>
+      </a:bgFillStyleLst>
+    </a:fmtScheme>
+  </a:themeElements>
+  <a:extLst>
+    <a:ext uri="{05A4C25C-085E-4340-85A3-A5531E510DB2}">
+      <thm15:themeFamily xmlns:thm15="http://schemas.microsoft.com/office/thememl/2012/main" name="Office Theme" id="{62F939B6-93AF-4DB8-9C6B-D6C7DFDC589F}" vid="{4A3C46E8-61CC-4603-A589-7422A47A8E4A}"/>
+    </a:ext>
+  </a:extLst>
 </a:theme>
 </file>